--- a/docs/AHB to APB Bridge UVM Project.pptx
+++ b/docs/AHB to APB Bridge UVM Project.pptx
@@ -4466,105 +4466,6 @@
         </p:nvGrpSpPr>
         <p:grpSpPr>
           <a:xfrm rot="0">
-            <a:off x="685800" y="9710928"/>
-            <a:ext cx="10972800" cy="411480"/>
-            <a:chOff x="0" y="0"/>
-            <a:chExt cx="14630400" cy="548640"/>
-          </a:xfrm>
-        </p:grpSpPr>
-        <p:sp>
-          <p:nvSpPr>
-            <p:cNvPr name="Freeform 20" id="20"/>
-            <p:cNvSpPr/>
-            <p:nvPr/>
-          </p:nvSpPr>
-          <p:spPr>
-            <a:xfrm flipH="false" flipV="false" rot="0">
-              <a:off x="0" y="0"/>
-              <a:ext cx="14630400" cy="548640"/>
-            </a:xfrm>
-            <a:custGeom>
-              <a:avLst/>
-              <a:gdLst/>
-              <a:ahLst/>
-              <a:cxnLst/>
-              <a:rect r="r" b="b" t="t" l="l"/>
-              <a:pathLst>
-                <a:path h="548640" w="14630400">
-                  <a:moveTo>
-                    <a:pt x="0" y="0"/>
-                  </a:moveTo>
-                  <a:lnTo>
-                    <a:pt x="14630400" y="0"/>
-                  </a:lnTo>
-                  <a:lnTo>
-                    <a:pt x="14630400" y="548640"/>
-                  </a:lnTo>
-                  <a:lnTo>
-                    <a:pt x="0" y="548640"/>
-                  </a:lnTo>
-                  <a:close/>
-                </a:path>
-              </a:pathLst>
-            </a:custGeom>
-            <a:blipFill>
-              <a:blip r:embed="rId4">
-                <a:alphaModFix amt="0"/>
-              </a:blip>
-              <a:stretch>
-                <a:fillRect l="0" t="-469601" r="0" b="-469601"/>
-              </a:stretch>
-            </a:blipFill>
-          </p:spPr>
-        </p:sp>
-        <p:sp>
-          <p:nvSpPr>
-            <p:cNvPr name="TextBox 21" id="21"/>
-            <p:cNvSpPr txBox="true"/>
-            <p:nvPr/>
-          </p:nvSpPr>
-          <p:spPr>
-            <a:xfrm>
-              <a:off x="0" y="-28575"/>
-              <a:ext cx="14630400" cy="577215"/>
-            </a:xfrm>
-            <a:prstGeom prst="rect">
-              <a:avLst/>
-            </a:prstGeom>
-          </p:spPr>
-          <p:txBody>
-            <a:bodyPr anchor="ctr" rtlCol="false" tIns="0" lIns="0" bIns="0" rIns="0"/>
-            <a:lstStyle/>
-            <a:p>
-              <a:pPr algn="l">
-                <a:lnSpc>
-                  <a:spcPts val="1620"/>
-                </a:lnSpc>
-              </a:pPr>
-              <a:r>
-                <a:rPr lang="en-US" sz="1350">
-                  <a:solidFill>
-                    <a:srgbClr val="5B6B82"/>
-                  </a:solidFill>
-                  <a:latin typeface="Calibri (MS)"/>
-                  <a:ea typeface="Calibri (MS)"/>
-                  <a:cs typeface="Calibri (MS)"/>
-                  <a:sym typeface="Calibri (MS)"/>
-                </a:rPr>
-                <a:t>AHB to APB Bridge UVM Project</a:t>
-              </a:r>
-            </a:p>
-          </p:txBody>
-        </p:sp>
-      </p:grpSp>
-      <p:grpSp>
-        <p:nvGrpSpPr>
-          <p:cNvPr name="Group 22" id="22"/>
-          <p:cNvGrpSpPr/>
-          <p:nvPr/>
-        </p:nvGrpSpPr>
-        <p:grpSpPr>
-          <a:xfrm rot="0">
             <a:off x="16911828" y="9710928"/>
             <a:ext cx="685800" cy="411480"/>
             <a:chOff x="0" y="0"/>
@@ -4573,7 +4474,7 @@
         </p:grpSpPr>
         <p:sp>
           <p:nvSpPr>
-            <p:cNvPr name="Freeform 23" id="23"/>
+            <p:cNvPr name="Freeform 20" id="20"/>
             <p:cNvSpPr/>
             <p:nvPr/>
           </p:nvSpPr>
@@ -4618,7 +4519,7 @@
         </p:sp>
         <p:sp>
           <p:nvSpPr>
-            <p:cNvPr name="TextBox 24" id="24"/>
+            <p:cNvPr name="TextBox 21" id="21"/>
             <p:cNvSpPr txBox="true"/>
             <p:nvPr/>
           </p:nvSpPr>
@@ -5189,45 +5090,7 @@
                   <a:cs typeface="Calibri (MS)"/>
                   <a:sym typeface="Calibri (MS)"/>
                 </a:rPr>
-                <a:t>The DUT acts as APB master.</a:t>
-              </a:r>
-            </a:p>
-            <a:p>
-              <a:pPr algn="ctr">
-                <a:lnSpc>
-                  <a:spcPts val="2879"/>
-                </a:lnSpc>
-              </a:pPr>
-              <a:r>
-                <a:rPr lang="en-US" sz="2399">
-                  <a:solidFill>
-                    <a:srgbClr val="23496D"/>
-                  </a:solidFill>
-                  <a:latin typeface="Calibri (MS)"/>
-                  <a:ea typeface="Calibri (MS)"/>
-                  <a:cs typeface="Calibri (MS)"/>
-                  <a:sym typeface="Calibri (MS)"/>
-                </a:rPr>
-                <a:t>The agent answers it by driving</a:t>
-              </a:r>
-            </a:p>
-            <a:p>
-              <a:pPr algn="ctr">
-                <a:lnSpc>
-                  <a:spcPts val="2879"/>
-                </a:lnSpc>
-              </a:pPr>
-              <a:r>
-                <a:rPr lang="en-US" sz="2399">
-                  <a:solidFill>
-                    <a:srgbClr val="23496D"/>
-                  </a:solidFill>
-                  <a:latin typeface="Calibri (MS)"/>
-                  <a:ea typeface="Calibri (MS)"/>
-                  <a:cs typeface="Calibri (MS)"/>
-                  <a:sym typeface="Calibri (MS)"/>
-                </a:rPr>
-                <a:t>PREADY, PRDATA and PSLVERR.</a:t>
+                <a:t>The monitor sees each request first. The sequence then builds the matching reply.</a:t>
               </a:r>
             </a:p>
             <a:p>
@@ -7074,1438 +6937,6 @@
     <p:bg>
       <p:bgPr>
         <a:solidFill>
-          <a:srgbClr val="F6F4EE"/>
-        </a:solidFill>
-      </p:bgPr>
-    </p:bg>
-    <p:spTree>
-      <p:nvGrpSpPr>
-        <p:cNvPr id="1" name=""/>
-        <p:cNvGrpSpPr/>
-        <p:nvPr/>
-      </p:nvGrpSpPr>
-      <p:grpSpPr>
-        <a:xfrm>
-          <a:off x="0" y="0"/>
-          <a:ext cx="0" cy="0"/>
-          <a:chOff x="0" y="0"/>
-          <a:chExt cx="0" cy="0"/>
-        </a:xfrm>
-      </p:grpSpPr>
-      <p:grpSp>
-        <p:nvGrpSpPr>
-          <p:cNvPr name="Group 2" id="2"/>
-          <p:cNvGrpSpPr/>
-          <p:nvPr/>
-        </p:nvGrpSpPr>
-        <p:grpSpPr>
-          <a:xfrm rot="0">
-            <a:off x="1028700" y="3165513"/>
-            <a:ext cx="3738506" cy="4463401"/>
-            <a:chOff x="0" y="0"/>
-            <a:chExt cx="984627" cy="1175546"/>
-          </a:xfrm>
-        </p:grpSpPr>
-        <p:sp>
-          <p:nvSpPr>
-            <p:cNvPr name="Freeform 3" id="3"/>
-            <p:cNvSpPr/>
-            <p:nvPr/>
-          </p:nvSpPr>
-          <p:spPr>
-            <a:xfrm flipH="false" flipV="false" rot="0">
-              <a:off x="0" y="0"/>
-              <a:ext cx="984627" cy="1175546"/>
-            </a:xfrm>
-            <a:custGeom>
-              <a:avLst/>
-              <a:gdLst/>
-              <a:ahLst/>
-              <a:cxnLst/>
-              <a:rect r="r" b="b" t="t" l="l"/>
-              <a:pathLst>
-                <a:path h="1175546" w="984627">
-                  <a:moveTo>
-                    <a:pt x="28992" y="0"/>
-                  </a:moveTo>
-                  <a:lnTo>
-                    <a:pt x="955635" y="0"/>
-                  </a:lnTo>
-                  <a:cubicBezTo>
-                    <a:pt x="971647" y="0"/>
-                    <a:pt x="984627" y="12980"/>
-                    <a:pt x="984627" y="28992"/>
-                  </a:cubicBezTo>
-                  <a:lnTo>
-                    <a:pt x="984627" y="1146554"/>
-                  </a:lnTo>
-                  <a:cubicBezTo>
-                    <a:pt x="984627" y="1154243"/>
-                    <a:pt x="981573" y="1161617"/>
-                    <a:pt x="976135" y="1167054"/>
-                  </a:cubicBezTo>
-                  <a:cubicBezTo>
-                    <a:pt x="970698" y="1172492"/>
-                    <a:pt x="963324" y="1175546"/>
-                    <a:pt x="955635" y="1175546"/>
-                  </a:cubicBezTo>
-                  <a:lnTo>
-                    <a:pt x="28992" y="1175546"/>
-                  </a:lnTo>
-                  <a:cubicBezTo>
-                    <a:pt x="12980" y="1175546"/>
-                    <a:pt x="0" y="1162566"/>
-                    <a:pt x="0" y="1146554"/>
-                  </a:cubicBezTo>
-                  <a:lnTo>
-                    <a:pt x="0" y="28992"/>
-                  </a:lnTo>
-                  <a:cubicBezTo>
-                    <a:pt x="0" y="12980"/>
-                    <a:pt x="12980" y="0"/>
-                    <a:pt x="28992" y="0"/>
-                  </a:cubicBezTo>
-                  <a:close/>
-                </a:path>
-              </a:pathLst>
-            </a:custGeom>
-            <a:solidFill>
-              <a:srgbClr val="2D5986"/>
-            </a:solidFill>
-          </p:spPr>
-        </p:sp>
-        <p:sp>
-          <p:nvSpPr>
-            <p:cNvPr name="TextBox 4" id="4"/>
-            <p:cNvSpPr txBox="true"/>
-            <p:nvPr/>
-          </p:nvSpPr>
-          <p:spPr>
-            <a:xfrm>
-              <a:off x="0" y="-38100"/>
-              <a:ext cx="984627" cy="1213646"/>
-            </a:xfrm>
-            <a:prstGeom prst="rect">
-              <a:avLst/>
-            </a:prstGeom>
-          </p:spPr>
-          <p:txBody>
-            <a:bodyPr anchor="ctr" rtlCol="false" tIns="50800" lIns="50800" bIns="50800" rIns="50800"/>
-            <a:lstStyle/>
-            <a:p>
-              <a:pPr algn="ctr">
-                <a:lnSpc>
-                  <a:spcPts val="2467"/>
-                </a:lnSpc>
-              </a:pPr>
-            </a:p>
-          </p:txBody>
-        </p:sp>
-      </p:grpSp>
-      <p:grpSp>
-        <p:nvGrpSpPr>
-          <p:cNvPr name="Group 5" id="5"/>
-          <p:cNvGrpSpPr/>
-          <p:nvPr/>
-        </p:nvGrpSpPr>
-        <p:grpSpPr>
-          <a:xfrm rot="0">
-            <a:off x="5205807" y="3165513"/>
-            <a:ext cx="3738506" cy="4463401"/>
-            <a:chOff x="0" y="0"/>
-            <a:chExt cx="984627" cy="1175546"/>
-          </a:xfrm>
-        </p:grpSpPr>
-        <p:sp>
-          <p:nvSpPr>
-            <p:cNvPr name="Freeform 6" id="6"/>
-            <p:cNvSpPr/>
-            <p:nvPr/>
-          </p:nvSpPr>
-          <p:spPr>
-            <a:xfrm flipH="false" flipV="false" rot="0">
-              <a:off x="0" y="0"/>
-              <a:ext cx="984627" cy="1175546"/>
-            </a:xfrm>
-            <a:custGeom>
-              <a:avLst/>
-              <a:gdLst/>
-              <a:ahLst/>
-              <a:cxnLst/>
-              <a:rect r="r" b="b" t="t" l="l"/>
-              <a:pathLst>
-                <a:path h="1175546" w="984627">
-                  <a:moveTo>
-                    <a:pt x="28992" y="0"/>
-                  </a:moveTo>
-                  <a:lnTo>
-                    <a:pt x="955635" y="0"/>
-                  </a:lnTo>
-                  <a:cubicBezTo>
-                    <a:pt x="971647" y="0"/>
-                    <a:pt x="984627" y="12980"/>
-                    <a:pt x="984627" y="28992"/>
-                  </a:cubicBezTo>
-                  <a:lnTo>
-                    <a:pt x="984627" y="1146554"/>
-                  </a:lnTo>
-                  <a:cubicBezTo>
-                    <a:pt x="984627" y="1154243"/>
-                    <a:pt x="981573" y="1161617"/>
-                    <a:pt x="976135" y="1167054"/>
-                  </a:cubicBezTo>
-                  <a:cubicBezTo>
-                    <a:pt x="970698" y="1172492"/>
-                    <a:pt x="963324" y="1175546"/>
-                    <a:pt x="955635" y="1175546"/>
-                  </a:cubicBezTo>
-                  <a:lnTo>
-                    <a:pt x="28992" y="1175546"/>
-                  </a:lnTo>
-                  <a:cubicBezTo>
-                    <a:pt x="12980" y="1175546"/>
-                    <a:pt x="0" y="1162566"/>
-                    <a:pt x="0" y="1146554"/>
-                  </a:cubicBezTo>
-                  <a:lnTo>
-                    <a:pt x="0" y="28992"/>
-                  </a:lnTo>
-                  <a:cubicBezTo>
-                    <a:pt x="0" y="12980"/>
-                    <a:pt x="12980" y="0"/>
-                    <a:pt x="28992" y="0"/>
-                  </a:cubicBezTo>
-                  <a:close/>
-                </a:path>
-              </a:pathLst>
-            </a:custGeom>
-            <a:solidFill>
-              <a:srgbClr val="2D5986"/>
-            </a:solidFill>
-          </p:spPr>
-        </p:sp>
-        <p:sp>
-          <p:nvSpPr>
-            <p:cNvPr name="TextBox 7" id="7"/>
-            <p:cNvSpPr txBox="true"/>
-            <p:nvPr/>
-          </p:nvSpPr>
-          <p:spPr>
-            <a:xfrm>
-              <a:off x="0" y="-38100"/>
-              <a:ext cx="984627" cy="1213646"/>
-            </a:xfrm>
-            <a:prstGeom prst="rect">
-              <a:avLst/>
-            </a:prstGeom>
-          </p:spPr>
-          <p:txBody>
-            <a:bodyPr anchor="ctr" rtlCol="false" tIns="50800" lIns="50800" bIns="50800" rIns="50800"/>
-            <a:lstStyle/>
-            <a:p>
-              <a:pPr algn="ctr">
-                <a:lnSpc>
-                  <a:spcPts val="2467"/>
-                </a:lnSpc>
-              </a:pPr>
-            </a:p>
-          </p:txBody>
-        </p:sp>
-      </p:grpSp>
-      <p:sp>
-        <p:nvSpPr>
-          <p:cNvPr name="TextBox 8" id="8"/>
-          <p:cNvSpPr txBox="true"/>
-          <p:nvPr/>
-        </p:nvSpPr>
-        <p:spPr>
-          <a:xfrm rot="0">
-            <a:off x="217050" y="36820"/>
-            <a:ext cx="11910300" cy="1368424"/>
-          </a:xfrm>
-          <a:prstGeom prst="rect">
-            <a:avLst/>
-          </a:prstGeom>
-        </p:spPr>
-        <p:txBody>
-          <a:bodyPr anchor="t" rtlCol="false" tIns="0" lIns="0" bIns="0" rIns="0">
-            <a:spAutoFit/>
-          </a:bodyPr>
-          <a:lstStyle/>
-          <a:p>
-            <a:pPr algn="l">
-              <a:lnSpc>
-                <a:spcPts val="11200"/>
-              </a:lnSpc>
-              <a:spcBef>
-                <a:spcPct val="0"/>
-              </a:spcBef>
-            </a:pPr>
-            <a:r>
-              <a:rPr lang="en-US" sz="8000">
-                <a:solidFill>
-                  <a:srgbClr val="2D5986"/>
-                </a:solidFill>
-                <a:latin typeface="Anton"/>
-                <a:ea typeface="Anton"/>
-                <a:cs typeface="Anton"/>
-                <a:sym typeface="Anton"/>
-              </a:rPr>
-              <a:t>APB Agent</a:t>
-            </a:r>
-          </a:p>
-        </p:txBody>
-      </p:sp>
-      <p:sp>
-        <p:nvSpPr>
-          <p:cNvPr name="TextBox 9" id="9"/>
-          <p:cNvSpPr txBox="true"/>
-          <p:nvPr/>
-        </p:nvSpPr>
-        <p:spPr>
-          <a:xfrm rot="0">
-            <a:off x="1028700" y="1813891"/>
-            <a:ext cx="5889028" cy="838200"/>
-          </a:xfrm>
-          <a:prstGeom prst="rect">
-            <a:avLst/>
-          </a:prstGeom>
-        </p:spPr>
-        <p:txBody>
-          <a:bodyPr anchor="t" rtlCol="false" tIns="0" lIns="0" bIns="0" rIns="0">
-            <a:spAutoFit/>
-          </a:bodyPr>
-          <a:lstStyle/>
-          <a:p>
-            <a:pPr algn="l">
-              <a:lnSpc>
-                <a:spcPts val="5827"/>
-              </a:lnSpc>
-              <a:spcBef>
-                <a:spcPct val="0"/>
-              </a:spcBef>
-            </a:pPr>
-            <a:r>
-              <a:rPr lang="en-US" b="true" sz="4856">
-                <a:solidFill>
-                  <a:srgbClr val="2D5986"/>
-                </a:solidFill>
-                <a:latin typeface="Calibri (MS) Bold"/>
-                <a:ea typeface="Calibri (MS) Bold"/>
-                <a:cs typeface="Calibri (MS) Bold"/>
-                <a:sym typeface="Calibri (MS) Bold"/>
-              </a:rPr>
-              <a:t>Reactive</a:t>
-            </a:r>
-            <a:r>
-              <a:rPr lang="en-US" b="true" sz="4856">
-                <a:solidFill>
-                  <a:srgbClr val="2D5986"/>
-                </a:solidFill>
-                <a:latin typeface="Calibri (MS) Bold"/>
-                <a:ea typeface="Calibri (MS) Bold"/>
-                <a:cs typeface="Calibri (MS) Bold"/>
-                <a:sym typeface="Calibri (MS) Bold"/>
-              </a:rPr>
-              <a:t> data flow</a:t>
-            </a:r>
-          </a:p>
-        </p:txBody>
-      </p:sp>
-      <p:sp>
-        <p:nvSpPr>
-          <p:cNvPr name="TextBox 10" id="10"/>
-          <p:cNvSpPr txBox="true"/>
-          <p:nvPr/>
-        </p:nvSpPr>
-        <p:spPr>
-          <a:xfrm rot="0">
-            <a:off x="1186031" y="4391025"/>
-            <a:ext cx="2071247" cy="752475"/>
-          </a:xfrm>
-          <a:prstGeom prst="rect">
-            <a:avLst/>
-          </a:prstGeom>
-        </p:spPr>
-        <p:txBody>
-          <a:bodyPr anchor="t" rtlCol="false" tIns="0" lIns="0" bIns="0" rIns="0">
-            <a:spAutoFit/>
-          </a:bodyPr>
-          <a:lstStyle/>
-          <a:p>
-            <a:pPr algn="l">
-              <a:lnSpc>
-                <a:spcPts val="5227"/>
-              </a:lnSpc>
-              <a:spcBef>
-                <a:spcPct val="0"/>
-              </a:spcBef>
-            </a:pPr>
-            <a:r>
-              <a:rPr lang="en-US" b="true" sz="4356">
-                <a:solidFill>
-                  <a:srgbClr val="F7F5F1"/>
-                </a:solidFill>
-                <a:latin typeface="Calibri (MS) Bold"/>
-                <a:ea typeface="Calibri (MS) Bold"/>
-                <a:cs typeface="Calibri (MS) Bold"/>
-                <a:sym typeface="Calibri (MS) Bold"/>
-              </a:rPr>
-              <a:t>Moni</a:t>
-            </a:r>
-            <a:r>
-              <a:rPr lang="en-US" b="true" sz="4356">
-                <a:solidFill>
-                  <a:srgbClr val="F7F5F1"/>
-                </a:solidFill>
-                <a:latin typeface="Calibri (MS) Bold"/>
-                <a:ea typeface="Calibri (MS) Bold"/>
-                <a:cs typeface="Calibri (MS) Bold"/>
-                <a:sym typeface="Calibri (MS) Bold"/>
-              </a:rPr>
-              <a:t>tor</a:t>
-            </a:r>
-          </a:p>
-        </p:txBody>
-      </p:sp>
-      <p:sp>
-        <p:nvSpPr>
-          <p:cNvPr name="TextBox 11" id="11"/>
-          <p:cNvSpPr txBox="true"/>
-          <p:nvPr/>
-        </p:nvSpPr>
-        <p:spPr>
-          <a:xfrm rot="0">
-            <a:off x="5488163" y="4391025"/>
-            <a:ext cx="2602837" cy="752475"/>
-          </a:xfrm>
-          <a:prstGeom prst="rect">
-            <a:avLst/>
-          </a:prstGeom>
-        </p:spPr>
-        <p:txBody>
-          <a:bodyPr anchor="t" rtlCol="false" tIns="0" lIns="0" bIns="0" rIns="0">
-            <a:spAutoFit/>
-          </a:bodyPr>
-          <a:lstStyle/>
-          <a:p>
-            <a:pPr algn="l">
-              <a:lnSpc>
-                <a:spcPts val="5227"/>
-              </a:lnSpc>
-              <a:spcBef>
-                <a:spcPct val="0"/>
-              </a:spcBef>
-            </a:pPr>
-            <a:r>
-              <a:rPr lang="en-US" b="true" sz="4356">
-                <a:solidFill>
-                  <a:srgbClr val="F7F5F1"/>
-                </a:solidFill>
-                <a:latin typeface="Calibri (MS) Bold"/>
-                <a:ea typeface="Calibri (MS) Bold"/>
-                <a:cs typeface="Calibri (MS) Bold"/>
-                <a:sym typeface="Calibri (MS) Bold"/>
-              </a:rPr>
-              <a:t>Sequence</a:t>
-            </a:r>
-            <a:r>
-              <a:rPr lang="en-US" b="true" sz="4356">
-                <a:solidFill>
-                  <a:srgbClr val="F7F5F1"/>
-                </a:solidFill>
-                <a:latin typeface="Calibri (MS) Bold"/>
-                <a:ea typeface="Calibri (MS) Bold"/>
-                <a:cs typeface="Calibri (MS) Bold"/>
-                <a:sym typeface="Calibri (MS) Bold"/>
-              </a:rPr>
-              <a:t>r</a:t>
-            </a:r>
-          </a:p>
-        </p:txBody>
-      </p:sp>
-      <p:sp>
-        <p:nvSpPr>
-          <p:cNvPr name="TextBox 12" id="12"/>
-          <p:cNvSpPr txBox="true"/>
-          <p:nvPr/>
-        </p:nvSpPr>
-        <p:spPr>
-          <a:xfrm rot="0">
-            <a:off x="1186031" y="5267110"/>
-            <a:ext cx="3173794" cy="1771650"/>
-          </a:xfrm>
-          <a:prstGeom prst="rect">
-            <a:avLst/>
-          </a:prstGeom>
-        </p:spPr>
-        <p:txBody>
-          <a:bodyPr anchor="t" rtlCol="false" tIns="0" lIns="0" bIns="0" rIns="0">
-            <a:spAutoFit/>
-          </a:bodyPr>
-          <a:lstStyle/>
-          <a:p>
-            <a:pPr algn="l">
-              <a:lnSpc>
-                <a:spcPts val="2707"/>
-              </a:lnSpc>
-              <a:spcBef>
-                <a:spcPct val="0"/>
-              </a:spcBef>
-            </a:pPr>
-            <a:r>
-              <a:rPr lang="en-US" sz="2256">
-                <a:solidFill>
-                  <a:srgbClr val="F6F4EE"/>
-                </a:solidFill>
-                <a:latin typeface="Calibri (MS)"/>
-                <a:ea typeface="Calibri (MS)"/>
-                <a:cs typeface="Calibri (MS)"/>
-                <a:sym typeface="Calibri (MS)"/>
-              </a:rPr>
-              <a:t>Detects setup phase (PSEL=1, PENABLE=0) and publishes </a:t>
-            </a:r>
-            <a:r>
-              <a:rPr lang="en-US" sz="2256">
-                <a:solidFill>
-                  <a:srgbClr val="F6F4EE"/>
-                </a:solidFill>
-                <a:latin typeface="Calibri (MS)"/>
-                <a:ea typeface="Calibri (MS)"/>
-                <a:cs typeface="Calibri (MS)"/>
-                <a:sym typeface="Calibri (MS)"/>
-              </a:rPr>
-              <a:t>the request on request_aport.</a:t>
-            </a:r>
-          </a:p>
-          <a:p>
-            <a:pPr algn="l">
-              <a:lnSpc>
-                <a:spcPts val="2707"/>
-              </a:lnSpc>
-              <a:spcBef>
-                <a:spcPct val="0"/>
-              </a:spcBef>
-            </a:pPr>
-          </a:p>
-        </p:txBody>
-      </p:sp>
-      <p:sp>
-        <p:nvSpPr>
-          <p:cNvPr name="TextBox 13" id="13"/>
-          <p:cNvSpPr txBox="true"/>
-          <p:nvPr/>
-        </p:nvSpPr>
-        <p:spPr>
-          <a:xfrm rot="0">
-            <a:off x="5488163" y="5267110"/>
-            <a:ext cx="3173794" cy="1428750"/>
-          </a:xfrm>
-          <a:prstGeom prst="rect">
-            <a:avLst/>
-          </a:prstGeom>
-        </p:spPr>
-        <p:txBody>
-          <a:bodyPr anchor="t" rtlCol="false" tIns="0" lIns="0" bIns="0" rIns="0">
-            <a:spAutoFit/>
-          </a:bodyPr>
-          <a:lstStyle/>
-          <a:p>
-            <a:pPr algn="l">
-              <a:lnSpc>
-                <a:spcPts val="2707"/>
-              </a:lnSpc>
-              <a:spcBef>
-                <a:spcPct val="0"/>
-              </a:spcBef>
-            </a:pPr>
-            <a:r>
-              <a:rPr lang="en-US" sz="2256">
-                <a:solidFill>
-                  <a:srgbClr val="F6F4EE"/>
-                </a:solidFill>
-                <a:latin typeface="Calibri (MS)"/>
-                <a:ea typeface="Calibri (MS)"/>
-                <a:cs typeface="Calibri (MS)"/>
-                <a:sym typeface="Calibri (MS)"/>
-              </a:rPr>
-              <a:t>request_export feeds request_fifo inside </a:t>
-            </a:r>
-            <a:r>
-              <a:rPr lang="en-US" sz="2256">
-                <a:solidFill>
-                  <a:srgbClr val="F6F4EE"/>
-                </a:solidFill>
-                <a:latin typeface="Calibri (MS)"/>
-                <a:ea typeface="Calibri (MS)"/>
-                <a:cs typeface="Calibri (MS)"/>
-                <a:sym typeface="Calibri (MS)"/>
-              </a:rPr>
-              <a:t>the sequencer.</a:t>
-            </a:r>
-          </a:p>
-          <a:p>
-            <a:pPr algn="l">
-              <a:lnSpc>
-                <a:spcPts val="2707"/>
-              </a:lnSpc>
-              <a:spcBef>
-                <a:spcPct val="0"/>
-              </a:spcBef>
-            </a:pPr>
-          </a:p>
-        </p:txBody>
-      </p:sp>
-      <p:sp>
-        <p:nvSpPr>
-          <p:cNvPr name="TextBox 14" id="14"/>
-          <p:cNvSpPr txBox="true"/>
-          <p:nvPr/>
-        </p:nvSpPr>
-        <p:spPr>
-          <a:xfrm rot="0">
-            <a:off x="1186031" y="3485856"/>
-            <a:ext cx="2071247" cy="752475"/>
-          </a:xfrm>
-          <a:prstGeom prst="rect">
-            <a:avLst/>
-          </a:prstGeom>
-        </p:spPr>
-        <p:txBody>
-          <a:bodyPr anchor="t" rtlCol="false" tIns="0" lIns="0" bIns="0" rIns="0">
-            <a:spAutoFit/>
-          </a:bodyPr>
-          <a:lstStyle/>
-          <a:p>
-            <a:pPr algn="l">
-              <a:lnSpc>
-                <a:spcPts val="5227"/>
-              </a:lnSpc>
-              <a:spcBef>
-                <a:spcPct val="0"/>
-              </a:spcBef>
-            </a:pPr>
-            <a:r>
-              <a:rPr lang="en-US" b="true" sz="4356">
-                <a:solidFill>
-                  <a:srgbClr val="F6F4EE"/>
-                </a:solidFill>
-                <a:latin typeface="Calibri (MS) Bold"/>
-                <a:ea typeface="Calibri (MS) Bold"/>
-                <a:cs typeface="Calibri (MS) Bold"/>
-                <a:sym typeface="Calibri (MS) Bold"/>
-              </a:rPr>
-              <a:t>1</a:t>
-            </a:r>
-          </a:p>
-        </p:txBody>
-      </p:sp>
-      <p:sp>
-        <p:nvSpPr>
-          <p:cNvPr name="TextBox 15" id="15"/>
-          <p:cNvSpPr txBox="true"/>
-          <p:nvPr/>
-        </p:nvSpPr>
-        <p:spPr>
-          <a:xfrm rot="0">
-            <a:off x="5488163" y="3485856"/>
-            <a:ext cx="2071247" cy="752475"/>
-          </a:xfrm>
-          <a:prstGeom prst="rect">
-            <a:avLst/>
-          </a:prstGeom>
-        </p:spPr>
-        <p:txBody>
-          <a:bodyPr anchor="t" rtlCol="false" tIns="0" lIns="0" bIns="0" rIns="0">
-            <a:spAutoFit/>
-          </a:bodyPr>
-          <a:lstStyle/>
-          <a:p>
-            <a:pPr algn="l">
-              <a:lnSpc>
-                <a:spcPts val="5227"/>
-              </a:lnSpc>
-              <a:spcBef>
-                <a:spcPct val="0"/>
-              </a:spcBef>
-            </a:pPr>
-            <a:r>
-              <a:rPr lang="en-US" b="true" sz="4356">
-                <a:solidFill>
-                  <a:srgbClr val="F6F4EE"/>
-                </a:solidFill>
-                <a:latin typeface="Calibri (MS) Bold"/>
-                <a:ea typeface="Calibri (MS) Bold"/>
-                <a:cs typeface="Calibri (MS) Bold"/>
-                <a:sym typeface="Calibri (MS) Bold"/>
-              </a:rPr>
-              <a:t>2</a:t>
-            </a:r>
-          </a:p>
-        </p:txBody>
-      </p:sp>
-      <p:grpSp>
-        <p:nvGrpSpPr>
-          <p:cNvPr name="Group 16" id="16"/>
-          <p:cNvGrpSpPr/>
-          <p:nvPr/>
-        </p:nvGrpSpPr>
-        <p:grpSpPr>
-          <a:xfrm rot="0">
-            <a:off x="9382913" y="3165513"/>
-            <a:ext cx="3738506" cy="4463401"/>
-            <a:chOff x="0" y="0"/>
-            <a:chExt cx="984627" cy="1175546"/>
-          </a:xfrm>
-        </p:grpSpPr>
-        <p:sp>
-          <p:nvSpPr>
-            <p:cNvPr name="Freeform 17" id="17"/>
-            <p:cNvSpPr/>
-            <p:nvPr/>
-          </p:nvSpPr>
-          <p:spPr>
-            <a:xfrm flipH="false" flipV="false" rot="0">
-              <a:off x="0" y="0"/>
-              <a:ext cx="984627" cy="1175546"/>
-            </a:xfrm>
-            <a:custGeom>
-              <a:avLst/>
-              <a:gdLst/>
-              <a:ahLst/>
-              <a:cxnLst/>
-              <a:rect r="r" b="b" t="t" l="l"/>
-              <a:pathLst>
-                <a:path h="1175546" w="984627">
-                  <a:moveTo>
-                    <a:pt x="28992" y="0"/>
-                  </a:moveTo>
-                  <a:lnTo>
-                    <a:pt x="955635" y="0"/>
-                  </a:lnTo>
-                  <a:cubicBezTo>
-                    <a:pt x="971647" y="0"/>
-                    <a:pt x="984627" y="12980"/>
-                    <a:pt x="984627" y="28992"/>
-                  </a:cubicBezTo>
-                  <a:lnTo>
-                    <a:pt x="984627" y="1146554"/>
-                  </a:lnTo>
-                  <a:cubicBezTo>
-                    <a:pt x="984627" y="1154243"/>
-                    <a:pt x="981573" y="1161617"/>
-                    <a:pt x="976135" y="1167054"/>
-                  </a:cubicBezTo>
-                  <a:cubicBezTo>
-                    <a:pt x="970698" y="1172492"/>
-                    <a:pt x="963324" y="1175546"/>
-                    <a:pt x="955635" y="1175546"/>
-                  </a:cubicBezTo>
-                  <a:lnTo>
-                    <a:pt x="28992" y="1175546"/>
-                  </a:lnTo>
-                  <a:cubicBezTo>
-                    <a:pt x="12980" y="1175546"/>
-                    <a:pt x="0" y="1162566"/>
-                    <a:pt x="0" y="1146554"/>
-                  </a:cubicBezTo>
-                  <a:lnTo>
-                    <a:pt x="0" y="28992"/>
-                  </a:lnTo>
-                  <a:cubicBezTo>
-                    <a:pt x="0" y="12980"/>
-                    <a:pt x="12980" y="0"/>
-                    <a:pt x="28992" y="0"/>
-                  </a:cubicBezTo>
-                  <a:close/>
-                </a:path>
-              </a:pathLst>
-            </a:custGeom>
-            <a:solidFill>
-              <a:srgbClr val="2D5986"/>
-            </a:solidFill>
-          </p:spPr>
-        </p:sp>
-        <p:sp>
-          <p:nvSpPr>
-            <p:cNvPr name="TextBox 18" id="18"/>
-            <p:cNvSpPr txBox="true"/>
-            <p:nvPr/>
-          </p:nvSpPr>
-          <p:spPr>
-            <a:xfrm>
-              <a:off x="0" y="-38100"/>
-              <a:ext cx="984627" cy="1213646"/>
-            </a:xfrm>
-            <a:prstGeom prst="rect">
-              <a:avLst/>
-            </a:prstGeom>
-          </p:spPr>
-          <p:txBody>
-            <a:bodyPr anchor="ctr" rtlCol="false" tIns="50800" lIns="50800" bIns="50800" rIns="50800"/>
-            <a:lstStyle/>
-            <a:p>
-              <a:pPr algn="ctr">
-                <a:lnSpc>
-                  <a:spcPts val="2467"/>
-                </a:lnSpc>
-              </a:pPr>
-            </a:p>
-          </p:txBody>
-        </p:sp>
-      </p:grpSp>
-      <p:grpSp>
-        <p:nvGrpSpPr>
-          <p:cNvPr name="Group 19" id="19"/>
-          <p:cNvGrpSpPr/>
-          <p:nvPr/>
-        </p:nvGrpSpPr>
-        <p:grpSpPr>
-          <a:xfrm rot="0">
-            <a:off x="13423334" y="3165513"/>
-            <a:ext cx="3972653" cy="4463401"/>
-            <a:chOff x="0" y="0"/>
-            <a:chExt cx="1046295" cy="1175546"/>
-          </a:xfrm>
-        </p:grpSpPr>
-        <p:sp>
-          <p:nvSpPr>
-            <p:cNvPr name="Freeform 20" id="20"/>
-            <p:cNvSpPr/>
-            <p:nvPr/>
-          </p:nvSpPr>
-          <p:spPr>
-            <a:xfrm flipH="false" flipV="false" rot="0">
-              <a:off x="0" y="0"/>
-              <a:ext cx="1046295" cy="1175546"/>
-            </a:xfrm>
-            <a:custGeom>
-              <a:avLst/>
-              <a:gdLst/>
-              <a:ahLst/>
-              <a:cxnLst/>
-              <a:rect r="r" b="b" t="t" l="l"/>
-              <a:pathLst>
-                <a:path h="1175546" w="1046295">
-                  <a:moveTo>
-                    <a:pt x="27283" y="0"/>
-                  </a:moveTo>
-                  <a:lnTo>
-                    <a:pt x="1019012" y="0"/>
-                  </a:lnTo>
-                  <a:cubicBezTo>
-                    <a:pt x="1034080" y="0"/>
-                    <a:pt x="1046295" y="12215"/>
-                    <a:pt x="1046295" y="27283"/>
-                  </a:cubicBezTo>
-                  <a:lnTo>
-                    <a:pt x="1046295" y="1148263"/>
-                  </a:lnTo>
-                  <a:cubicBezTo>
-                    <a:pt x="1046295" y="1155499"/>
-                    <a:pt x="1043421" y="1162438"/>
-                    <a:pt x="1038304" y="1167555"/>
-                  </a:cubicBezTo>
-                  <a:cubicBezTo>
-                    <a:pt x="1033188" y="1172672"/>
-                    <a:pt x="1026248" y="1175546"/>
-                    <a:pt x="1019012" y="1175546"/>
-                  </a:cubicBezTo>
-                  <a:lnTo>
-                    <a:pt x="27283" y="1175546"/>
-                  </a:lnTo>
-                  <a:cubicBezTo>
-                    <a:pt x="12215" y="1175546"/>
-                    <a:pt x="0" y="1163331"/>
-                    <a:pt x="0" y="1148263"/>
-                  </a:cubicBezTo>
-                  <a:lnTo>
-                    <a:pt x="0" y="27283"/>
-                  </a:lnTo>
-                  <a:cubicBezTo>
-                    <a:pt x="0" y="12215"/>
-                    <a:pt x="12215" y="0"/>
-                    <a:pt x="27283" y="0"/>
-                  </a:cubicBezTo>
-                  <a:close/>
-                </a:path>
-              </a:pathLst>
-            </a:custGeom>
-            <a:solidFill>
-              <a:srgbClr val="2D5986"/>
-            </a:solidFill>
-          </p:spPr>
-        </p:sp>
-        <p:sp>
-          <p:nvSpPr>
-            <p:cNvPr name="TextBox 21" id="21"/>
-            <p:cNvSpPr txBox="true"/>
-            <p:nvPr/>
-          </p:nvSpPr>
-          <p:spPr>
-            <a:xfrm>
-              <a:off x="0" y="-38100"/>
-              <a:ext cx="1046295" cy="1213646"/>
-            </a:xfrm>
-            <a:prstGeom prst="rect">
-              <a:avLst/>
-            </a:prstGeom>
-          </p:spPr>
-          <p:txBody>
-            <a:bodyPr anchor="ctr" rtlCol="false" tIns="50800" lIns="50800" bIns="50800" rIns="50800"/>
-            <a:lstStyle/>
-            <a:p>
-              <a:pPr algn="ctr">
-                <a:lnSpc>
-                  <a:spcPts val="2467"/>
-                </a:lnSpc>
-              </a:pPr>
-            </a:p>
-          </p:txBody>
-        </p:sp>
-      </p:grpSp>
-      <p:sp>
-        <p:nvSpPr>
-          <p:cNvPr name="TextBox 22" id="22"/>
-          <p:cNvSpPr txBox="true"/>
-          <p:nvPr/>
-        </p:nvSpPr>
-        <p:spPr>
-          <a:xfrm rot="0">
-            <a:off x="9668212" y="4380083"/>
-            <a:ext cx="3047026" cy="716699"/>
-          </a:xfrm>
-          <a:prstGeom prst="rect">
-            <a:avLst/>
-          </a:prstGeom>
-        </p:spPr>
-        <p:txBody>
-          <a:bodyPr anchor="t" rtlCol="false" tIns="0" lIns="0" bIns="0" rIns="0">
-            <a:spAutoFit/>
-          </a:bodyPr>
-          <a:lstStyle/>
-          <a:p>
-            <a:pPr algn="l">
-              <a:lnSpc>
-                <a:spcPts val="5018"/>
-              </a:lnSpc>
-              <a:spcBef>
-                <a:spcPct val="0"/>
-              </a:spcBef>
-            </a:pPr>
-            <a:r>
-              <a:rPr lang="en-US" b="true" sz="4182">
-                <a:solidFill>
-                  <a:srgbClr val="F7F5F1"/>
-                </a:solidFill>
-                <a:latin typeface="Calibri (MS) Bold"/>
-                <a:ea typeface="Calibri (MS) Bold"/>
-                <a:cs typeface="Calibri (MS) Bold"/>
-                <a:sym typeface="Calibri (MS) Bold"/>
-              </a:rPr>
-              <a:t>Sequence</a:t>
-            </a:r>
-          </a:p>
-        </p:txBody>
-      </p:sp>
-      <p:sp>
-        <p:nvSpPr>
-          <p:cNvPr name="TextBox 23" id="23"/>
-          <p:cNvSpPr txBox="true"/>
-          <p:nvPr/>
-        </p:nvSpPr>
-        <p:spPr>
-          <a:xfrm rot="0">
-            <a:off x="9665269" y="5267110"/>
-            <a:ext cx="3173794" cy="1428750"/>
-          </a:xfrm>
-          <a:prstGeom prst="rect">
-            <a:avLst/>
-          </a:prstGeom>
-        </p:spPr>
-        <p:txBody>
-          <a:bodyPr anchor="t" rtlCol="false" tIns="0" lIns="0" bIns="0" rIns="0">
-            <a:spAutoFit/>
-          </a:bodyPr>
-          <a:lstStyle/>
-          <a:p>
-            <a:pPr algn="l">
-              <a:lnSpc>
-                <a:spcPts val="2707"/>
-              </a:lnSpc>
-              <a:spcBef>
-                <a:spcPct val="0"/>
-              </a:spcBef>
-            </a:pPr>
-            <a:r>
-              <a:rPr lang="en-US" sz="2256">
-                <a:solidFill>
-                  <a:srgbClr val="F6F4EE"/>
-                </a:solidFill>
-                <a:latin typeface="Calibri (MS)"/>
-                <a:ea typeface="Calibri (MS)"/>
-                <a:cs typeface="Calibri (MS)"/>
-                <a:sym typeface="Calibri (MS)"/>
-              </a:rPr>
-              <a:t>Gets on</a:t>
-            </a:r>
-            <a:r>
-              <a:rPr lang="en-US" sz="2256">
-                <a:solidFill>
-                  <a:srgbClr val="F6F4EE"/>
-                </a:solidFill>
-                <a:latin typeface="Calibri (MS)"/>
-                <a:ea typeface="Calibri (MS)"/>
-                <a:cs typeface="Calibri (MS)"/>
-                <a:sym typeface="Calibri (MS)"/>
-              </a:rPr>
-              <a:t>e request, creates apb_response, and randomizes it.</a:t>
-            </a:r>
-          </a:p>
-          <a:p>
-            <a:pPr algn="l">
-              <a:lnSpc>
-                <a:spcPts val="2707"/>
-              </a:lnSpc>
-              <a:spcBef>
-                <a:spcPct val="0"/>
-              </a:spcBef>
-            </a:pPr>
-          </a:p>
-        </p:txBody>
-      </p:sp>
-      <p:sp>
-        <p:nvSpPr>
-          <p:cNvPr name="TextBox 24" id="24"/>
-          <p:cNvSpPr txBox="true"/>
-          <p:nvPr/>
-        </p:nvSpPr>
-        <p:spPr>
-          <a:xfrm rot="0">
-            <a:off x="9665269" y="3485856"/>
-            <a:ext cx="2071247" cy="752475"/>
-          </a:xfrm>
-          <a:prstGeom prst="rect">
-            <a:avLst/>
-          </a:prstGeom>
-        </p:spPr>
-        <p:txBody>
-          <a:bodyPr anchor="t" rtlCol="false" tIns="0" lIns="0" bIns="0" rIns="0">
-            <a:spAutoFit/>
-          </a:bodyPr>
-          <a:lstStyle/>
-          <a:p>
-            <a:pPr algn="l">
-              <a:lnSpc>
-                <a:spcPts val="5227"/>
-              </a:lnSpc>
-              <a:spcBef>
-                <a:spcPct val="0"/>
-              </a:spcBef>
-            </a:pPr>
-            <a:r>
-              <a:rPr lang="en-US" b="true" sz="4356">
-                <a:solidFill>
-                  <a:srgbClr val="F6F4EE"/>
-                </a:solidFill>
-                <a:latin typeface="Calibri (MS) Bold"/>
-                <a:ea typeface="Calibri (MS) Bold"/>
-                <a:cs typeface="Calibri (MS) Bold"/>
-                <a:sym typeface="Calibri (MS) Bold"/>
-              </a:rPr>
-              <a:t>3</a:t>
-            </a:r>
-          </a:p>
-        </p:txBody>
-      </p:sp>
-      <p:sp>
-        <p:nvSpPr>
-          <p:cNvPr name="TextBox 25" id="25"/>
-          <p:cNvSpPr txBox="true"/>
-          <p:nvPr/>
-        </p:nvSpPr>
-        <p:spPr>
-          <a:xfrm rot="0">
-            <a:off x="13708633" y="4391025"/>
-            <a:ext cx="2071247" cy="752475"/>
-          </a:xfrm>
-          <a:prstGeom prst="rect">
-            <a:avLst/>
-          </a:prstGeom>
-        </p:spPr>
-        <p:txBody>
-          <a:bodyPr anchor="t" rtlCol="false" tIns="0" lIns="0" bIns="0" rIns="0">
-            <a:spAutoFit/>
-          </a:bodyPr>
-          <a:lstStyle/>
-          <a:p>
-            <a:pPr algn="l">
-              <a:lnSpc>
-                <a:spcPts val="5227"/>
-              </a:lnSpc>
-              <a:spcBef>
-                <a:spcPct val="0"/>
-              </a:spcBef>
-            </a:pPr>
-            <a:r>
-              <a:rPr lang="en-US" b="true" sz="4356">
-                <a:solidFill>
-                  <a:srgbClr val="F7F5F1"/>
-                </a:solidFill>
-                <a:latin typeface="Calibri (MS) Bold"/>
-                <a:ea typeface="Calibri (MS) Bold"/>
-                <a:cs typeface="Calibri (MS) Bold"/>
-                <a:sym typeface="Calibri (MS) Bold"/>
-              </a:rPr>
-              <a:t>Drive</a:t>
-            </a:r>
-            <a:r>
-              <a:rPr lang="en-US" b="true" sz="4356">
-                <a:solidFill>
-                  <a:srgbClr val="F7F5F1"/>
-                </a:solidFill>
-                <a:latin typeface="Calibri (MS) Bold"/>
-                <a:ea typeface="Calibri (MS) Bold"/>
-                <a:cs typeface="Calibri (MS) Bold"/>
-                <a:sym typeface="Calibri (MS) Bold"/>
-              </a:rPr>
-              <a:t>r</a:t>
-            </a:r>
-          </a:p>
-        </p:txBody>
-      </p:sp>
-      <p:sp>
-        <p:nvSpPr>
-          <p:cNvPr name="TextBox 26" id="26"/>
-          <p:cNvSpPr txBox="true"/>
-          <p:nvPr/>
-        </p:nvSpPr>
-        <p:spPr>
-          <a:xfrm rot="0">
-            <a:off x="13708633" y="5267110"/>
-            <a:ext cx="3550667" cy="2114550"/>
-          </a:xfrm>
-          <a:prstGeom prst="rect">
-            <a:avLst/>
-          </a:prstGeom>
-        </p:spPr>
-        <p:txBody>
-          <a:bodyPr anchor="t" rtlCol="false" tIns="0" lIns="0" bIns="0" rIns="0">
-            <a:spAutoFit/>
-          </a:bodyPr>
-          <a:lstStyle/>
-          <a:p>
-            <a:pPr algn="l">
-              <a:lnSpc>
-                <a:spcPts val="2707"/>
-              </a:lnSpc>
-              <a:spcBef>
-                <a:spcPct val="0"/>
-              </a:spcBef>
-            </a:pPr>
-            <a:r>
-              <a:rPr lang="en-US" sz="2256">
-                <a:solidFill>
-                  <a:srgbClr val="F6F4EE"/>
-                </a:solidFill>
-                <a:latin typeface="Calibri (MS)"/>
-                <a:ea typeface="Calibri (MS)"/>
-                <a:cs typeface="Calibri (MS)"/>
-                <a:sym typeface="Calibri (MS)"/>
-              </a:rPr>
-              <a:t>Takes the response access phase at(PSEL=1, PENABLE=1) with get_next_item and drives i</a:t>
-            </a:r>
-            <a:r>
-              <a:rPr lang="en-US" sz="2256">
-                <a:solidFill>
-                  <a:srgbClr val="F6F4EE"/>
-                </a:solidFill>
-                <a:latin typeface="Calibri (MS)"/>
-                <a:ea typeface="Calibri (MS)"/>
-                <a:cs typeface="Calibri (MS)"/>
-                <a:sym typeface="Calibri (MS)"/>
-              </a:rPr>
-              <a:t>t on the bus.</a:t>
-            </a:r>
-          </a:p>
-          <a:p>
-            <a:pPr algn="l">
-              <a:lnSpc>
-                <a:spcPts val="2707"/>
-              </a:lnSpc>
-              <a:spcBef>
-                <a:spcPct val="0"/>
-              </a:spcBef>
-            </a:pPr>
-          </a:p>
-          <a:p>
-            <a:pPr algn="l">
-              <a:lnSpc>
-                <a:spcPts val="2707"/>
-              </a:lnSpc>
-              <a:spcBef>
-                <a:spcPct val="0"/>
-              </a:spcBef>
-            </a:pPr>
-          </a:p>
-        </p:txBody>
-      </p:sp>
-      <p:sp>
-        <p:nvSpPr>
-          <p:cNvPr name="TextBox 27" id="27"/>
-          <p:cNvSpPr txBox="true"/>
-          <p:nvPr/>
-        </p:nvSpPr>
-        <p:spPr>
-          <a:xfrm rot="0">
-            <a:off x="13708633" y="3485856"/>
-            <a:ext cx="2071247" cy="752475"/>
-          </a:xfrm>
-          <a:prstGeom prst="rect">
-            <a:avLst/>
-          </a:prstGeom>
-        </p:spPr>
-        <p:txBody>
-          <a:bodyPr anchor="t" rtlCol="false" tIns="0" lIns="0" bIns="0" rIns="0">
-            <a:spAutoFit/>
-          </a:bodyPr>
-          <a:lstStyle/>
-          <a:p>
-            <a:pPr algn="l">
-              <a:lnSpc>
-                <a:spcPts val="5227"/>
-              </a:lnSpc>
-              <a:spcBef>
-                <a:spcPct val="0"/>
-              </a:spcBef>
-            </a:pPr>
-            <a:r>
-              <a:rPr lang="en-US" b="true" sz="4356">
-                <a:solidFill>
-                  <a:srgbClr val="F6F4EE"/>
-                </a:solidFill>
-                <a:latin typeface="Calibri (MS) Bold"/>
-                <a:ea typeface="Calibri (MS) Bold"/>
-                <a:cs typeface="Calibri (MS) Bold"/>
-                <a:sym typeface="Calibri (MS) Bold"/>
-              </a:rPr>
-              <a:t>4</a:t>
-            </a:r>
-          </a:p>
-        </p:txBody>
-      </p:sp>
-      <p:grpSp>
-        <p:nvGrpSpPr>
-          <p:cNvPr name="Group 28" id="28"/>
-          <p:cNvGrpSpPr/>
-          <p:nvPr/>
-        </p:nvGrpSpPr>
-        <p:grpSpPr>
-          <a:xfrm rot="0">
-            <a:off x="685800" y="9710928"/>
-            <a:ext cx="10972800" cy="411480"/>
-            <a:chOff x="0" y="0"/>
-            <a:chExt cx="14630400" cy="548640"/>
-          </a:xfrm>
-        </p:grpSpPr>
-        <p:sp>
-          <p:nvSpPr>
-            <p:cNvPr name="Freeform 29" id="29"/>
-            <p:cNvSpPr/>
-            <p:nvPr/>
-          </p:nvSpPr>
-          <p:spPr>
-            <a:xfrm flipH="false" flipV="false" rot="0">
-              <a:off x="0" y="0"/>
-              <a:ext cx="14630400" cy="548640"/>
-            </a:xfrm>
-            <a:custGeom>
-              <a:avLst/>
-              <a:gdLst/>
-              <a:ahLst/>
-              <a:cxnLst/>
-              <a:rect r="r" b="b" t="t" l="l"/>
-              <a:pathLst>
-                <a:path h="548640" w="14630400">
-                  <a:moveTo>
-                    <a:pt x="0" y="0"/>
-                  </a:moveTo>
-                  <a:lnTo>
-                    <a:pt x="14630400" y="0"/>
-                  </a:lnTo>
-                  <a:lnTo>
-                    <a:pt x="14630400" y="548640"/>
-                  </a:lnTo>
-                  <a:lnTo>
-                    <a:pt x="0" y="548640"/>
-                  </a:lnTo>
-                  <a:close/>
-                </a:path>
-              </a:pathLst>
-            </a:custGeom>
-            <a:blipFill>
-              <a:blip r:embed="rId2">
-                <a:alphaModFix amt="0"/>
-              </a:blip>
-              <a:stretch>
-                <a:fillRect l="0" t="-469601" r="0" b="-469601"/>
-              </a:stretch>
-            </a:blipFill>
-          </p:spPr>
-        </p:sp>
-        <p:sp>
-          <p:nvSpPr>
-            <p:cNvPr name="TextBox 30" id="30"/>
-            <p:cNvSpPr txBox="true"/>
-            <p:nvPr/>
-          </p:nvSpPr>
-          <p:spPr>
-            <a:xfrm>
-              <a:off x="0" y="-28575"/>
-              <a:ext cx="14630400" cy="577215"/>
-            </a:xfrm>
-            <a:prstGeom prst="rect">
-              <a:avLst/>
-            </a:prstGeom>
-          </p:spPr>
-          <p:txBody>
-            <a:bodyPr anchor="ctr" rtlCol="false" tIns="0" lIns="0" bIns="0" rIns="0"/>
-            <a:lstStyle/>
-            <a:p>
-              <a:pPr algn="l">
-                <a:lnSpc>
-                  <a:spcPts val="1620"/>
-                </a:lnSpc>
-              </a:pPr>
-              <a:r>
-                <a:rPr lang="en-US" sz="1350">
-                  <a:solidFill>
-                    <a:srgbClr val="5B6B82"/>
-                  </a:solidFill>
-                  <a:latin typeface="Calibri (MS)"/>
-                  <a:ea typeface="Calibri (MS)"/>
-                  <a:cs typeface="Calibri (MS)"/>
-                  <a:sym typeface="Calibri (MS)"/>
-                </a:rPr>
-                <a:t>AHB to APB Bridge UVM Project</a:t>
-              </a:r>
-            </a:p>
-          </p:txBody>
-        </p:sp>
-      </p:grpSp>
-      <p:grpSp>
-        <p:nvGrpSpPr>
-          <p:cNvPr name="Group 31" id="31"/>
-          <p:cNvGrpSpPr/>
-          <p:nvPr/>
-        </p:nvGrpSpPr>
-        <p:grpSpPr>
-          <a:xfrm rot="0">
-            <a:off x="16911828" y="9710928"/>
-            <a:ext cx="685800" cy="411480"/>
-            <a:chOff x="0" y="0"/>
-            <a:chExt cx="914400" cy="548640"/>
-          </a:xfrm>
-        </p:grpSpPr>
-        <p:sp>
-          <p:nvSpPr>
-            <p:cNvPr name="Freeform 32" id="32"/>
-            <p:cNvSpPr/>
-            <p:nvPr/>
-          </p:nvSpPr>
-          <p:spPr>
-            <a:xfrm flipH="false" flipV="false" rot="0">
-              <a:off x="0" y="0"/>
-              <a:ext cx="914400" cy="548640"/>
-            </a:xfrm>
-            <a:custGeom>
-              <a:avLst/>
-              <a:gdLst/>
-              <a:ahLst/>
-              <a:cxnLst/>
-              <a:rect r="r" b="b" t="t" l="l"/>
-              <a:pathLst>
-                <a:path h="548640" w="914400">
-                  <a:moveTo>
-                    <a:pt x="0" y="0"/>
-                  </a:moveTo>
-                  <a:lnTo>
-                    <a:pt x="914400" y="0"/>
-                  </a:lnTo>
-                  <a:lnTo>
-                    <a:pt x="914400" y="548640"/>
-                  </a:lnTo>
-                  <a:lnTo>
-                    <a:pt x="0" y="548640"/>
-                  </a:lnTo>
-                  <a:close/>
-                </a:path>
-              </a:pathLst>
-            </a:custGeom>
-            <a:blipFill>
-              <a:blip r:embed="rId2">
-                <a:alphaModFix amt="0"/>
-              </a:blip>
-              <a:stretch>
-                <a:fillRect l="-26982" t="0" r="-26982" b="0"/>
-              </a:stretch>
-            </a:blipFill>
-          </p:spPr>
-        </p:sp>
-        <p:sp>
-          <p:nvSpPr>
-            <p:cNvPr name="TextBox 33" id="33"/>
-            <p:cNvSpPr txBox="true"/>
-            <p:nvPr/>
-          </p:nvSpPr>
-          <p:spPr>
-            <a:xfrm>
-              <a:off x="0" y="-28575"/>
-              <a:ext cx="914400" cy="577215"/>
-            </a:xfrm>
-            <a:prstGeom prst="rect">
-              <a:avLst/>
-            </a:prstGeom>
-          </p:spPr>
-          <p:txBody>
-            <a:bodyPr anchor="ctr" rtlCol="false" tIns="0" lIns="0" bIns="0" rIns="0"/>
-            <a:lstStyle/>
-            <a:p>
-              <a:pPr algn="r">
-                <a:lnSpc>
-                  <a:spcPts val="1620"/>
-                </a:lnSpc>
-              </a:pPr>
-              <a:r>
-                <a:rPr lang="en-US" sz="1350">
-                  <a:solidFill>
-                    <a:srgbClr val="5B6B82"/>
-                  </a:solidFill>
-                  <a:latin typeface="Calibri (MS)"/>
-                  <a:ea typeface="Calibri (MS)"/>
-                  <a:cs typeface="Calibri (MS)"/>
-                  <a:sym typeface="Calibri (MS)"/>
-                </a:rPr>
-                <a:t>13</a:t>
-              </a:r>
-            </a:p>
-          </p:txBody>
-        </p:sp>
-      </p:grpSp>
-    </p:spTree>
-  </p:cSld>
-  <p:clrMapOvr>
-    <a:masterClrMapping/>
-  </p:clrMapOvr>
-</p:sld>
-</file>
-
-<file path=ppt/slides/slide14.xml><?xml version="1.0" encoding="utf-8"?>
-<p:sld xmlns:p="http://schemas.openxmlformats.org/presentationml/2006/main" xmlns:a="http://schemas.openxmlformats.org/drawingml/2006/main" xmlns:r="http://schemas.openxmlformats.org/officeDocument/2006/relationships">
-  <p:cSld>
-    <p:bg>
-      <p:bgPr>
-        <a:solidFill>
           <a:srgbClr val="F7F5F1"/>
         </a:solidFill>
       </p:bgPr>
@@ -8716,7 +7147,7 @@
                   <a:cs typeface="Calibri (MS)"/>
                   <a:sym typeface="Calibri (MS)"/>
                 </a:rPr>
-                <a:t>14</a:t>
+                <a:t>13</a:t>
               </a:r>
             </a:p>
           </p:txBody>
@@ -8774,7 +7205,7 @@
         </p:nvGrpSpPr>
         <p:grpSpPr>
           <a:xfrm rot="0">
-            <a:off x="862952" y="3365025"/>
+            <a:off x="862952" y="3603150"/>
             <a:ext cx="7651633" cy="2870486"/>
             <a:chOff x="0" y="0"/>
             <a:chExt cx="2015245" cy="756013"/>
@@ -8906,7 +7337,7 @@
         </p:nvGrpSpPr>
         <p:grpSpPr>
           <a:xfrm rot="0">
-            <a:off x="9189925" y="3365025"/>
+            <a:off x="9189925" y="3603150"/>
             <a:ext cx="7899056" cy="2870486"/>
             <a:chOff x="0" y="0"/>
             <a:chExt cx="2080410" cy="756013"/>
@@ -9028,7 +7459,7 @@
         </p:nvSpPr>
         <p:spPr>
           <a:xfrm rot="0">
-            <a:off x="1031924" y="3549736"/>
+            <a:off x="1031924" y="3787861"/>
             <a:ext cx="5108853" cy="619125"/>
           </a:xfrm>
           <a:prstGeom prst="rect">
@@ -9084,7 +7515,7 @@
         </p:nvSpPr>
         <p:spPr>
           <a:xfrm rot="0">
-            <a:off x="9372817" y="3549736"/>
+            <a:off x="9372817" y="3787861"/>
             <a:ext cx="4600694" cy="619125"/>
           </a:xfrm>
           <a:prstGeom prst="rect">
@@ -9128,7 +7559,7 @@
         </p:nvSpPr>
         <p:spPr>
           <a:xfrm rot="0">
-            <a:off x="1172110" y="4280080"/>
+            <a:off x="1172110" y="4518205"/>
             <a:ext cx="7342475" cy="1466850"/>
           </a:xfrm>
           <a:prstGeom prst="rect">
@@ -9235,7 +7666,7 @@
         </p:nvSpPr>
         <p:spPr>
           <a:xfrm rot="0">
-            <a:off x="9499083" y="4456293"/>
+            <a:off x="9499083" y="4694418"/>
             <a:ext cx="7246998" cy="1114425"/>
           </a:xfrm>
           <a:prstGeom prst="rect">
@@ -9301,6 +7732,1438 @@
 </p:sld>
 </file>
 
+<file path=ppt/slides/slide14.xml><?xml version="1.0" encoding="utf-8"?>
+<p:sld xmlns:p="http://schemas.openxmlformats.org/presentationml/2006/main" xmlns:a="http://schemas.openxmlformats.org/drawingml/2006/main" xmlns:r="http://schemas.openxmlformats.org/officeDocument/2006/relationships">
+  <p:cSld>
+    <p:bg>
+      <p:bgPr>
+        <a:solidFill>
+          <a:srgbClr val="F6F4EE"/>
+        </a:solidFill>
+      </p:bgPr>
+    </p:bg>
+    <p:spTree>
+      <p:nvGrpSpPr>
+        <p:cNvPr id="1" name=""/>
+        <p:cNvGrpSpPr/>
+        <p:nvPr/>
+      </p:nvGrpSpPr>
+      <p:grpSpPr>
+        <a:xfrm>
+          <a:off x="0" y="0"/>
+          <a:ext cx="0" cy="0"/>
+          <a:chOff x="0" y="0"/>
+          <a:chExt cx="0" cy="0"/>
+        </a:xfrm>
+      </p:grpSpPr>
+      <p:grpSp>
+        <p:nvGrpSpPr>
+          <p:cNvPr name="Group 2" id="2"/>
+          <p:cNvGrpSpPr/>
+          <p:nvPr/>
+        </p:nvGrpSpPr>
+        <p:grpSpPr>
+          <a:xfrm rot="0">
+            <a:off x="1028700" y="3165513"/>
+            <a:ext cx="3738506" cy="4463401"/>
+            <a:chOff x="0" y="0"/>
+            <a:chExt cx="984627" cy="1175546"/>
+          </a:xfrm>
+        </p:grpSpPr>
+        <p:sp>
+          <p:nvSpPr>
+            <p:cNvPr name="Freeform 3" id="3"/>
+            <p:cNvSpPr/>
+            <p:nvPr/>
+          </p:nvSpPr>
+          <p:spPr>
+            <a:xfrm flipH="false" flipV="false" rot="0">
+              <a:off x="0" y="0"/>
+              <a:ext cx="984627" cy="1175546"/>
+            </a:xfrm>
+            <a:custGeom>
+              <a:avLst/>
+              <a:gdLst/>
+              <a:ahLst/>
+              <a:cxnLst/>
+              <a:rect r="r" b="b" t="t" l="l"/>
+              <a:pathLst>
+                <a:path h="1175546" w="984627">
+                  <a:moveTo>
+                    <a:pt x="28992" y="0"/>
+                  </a:moveTo>
+                  <a:lnTo>
+                    <a:pt x="955635" y="0"/>
+                  </a:lnTo>
+                  <a:cubicBezTo>
+                    <a:pt x="971647" y="0"/>
+                    <a:pt x="984627" y="12980"/>
+                    <a:pt x="984627" y="28992"/>
+                  </a:cubicBezTo>
+                  <a:lnTo>
+                    <a:pt x="984627" y="1146554"/>
+                  </a:lnTo>
+                  <a:cubicBezTo>
+                    <a:pt x="984627" y="1154243"/>
+                    <a:pt x="981573" y="1161617"/>
+                    <a:pt x="976135" y="1167054"/>
+                  </a:cubicBezTo>
+                  <a:cubicBezTo>
+                    <a:pt x="970698" y="1172492"/>
+                    <a:pt x="963324" y="1175546"/>
+                    <a:pt x="955635" y="1175546"/>
+                  </a:cubicBezTo>
+                  <a:lnTo>
+                    <a:pt x="28992" y="1175546"/>
+                  </a:lnTo>
+                  <a:cubicBezTo>
+                    <a:pt x="12980" y="1175546"/>
+                    <a:pt x="0" y="1162566"/>
+                    <a:pt x="0" y="1146554"/>
+                  </a:cubicBezTo>
+                  <a:lnTo>
+                    <a:pt x="0" y="28992"/>
+                  </a:lnTo>
+                  <a:cubicBezTo>
+                    <a:pt x="0" y="12980"/>
+                    <a:pt x="12980" y="0"/>
+                    <a:pt x="28992" y="0"/>
+                  </a:cubicBezTo>
+                  <a:close/>
+                </a:path>
+              </a:pathLst>
+            </a:custGeom>
+            <a:solidFill>
+              <a:srgbClr val="2D5986"/>
+            </a:solidFill>
+          </p:spPr>
+        </p:sp>
+        <p:sp>
+          <p:nvSpPr>
+            <p:cNvPr name="TextBox 4" id="4"/>
+            <p:cNvSpPr txBox="true"/>
+            <p:nvPr/>
+          </p:nvSpPr>
+          <p:spPr>
+            <a:xfrm>
+              <a:off x="0" y="-38100"/>
+              <a:ext cx="984627" cy="1213646"/>
+            </a:xfrm>
+            <a:prstGeom prst="rect">
+              <a:avLst/>
+            </a:prstGeom>
+          </p:spPr>
+          <p:txBody>
+            <a:bodyPr anchor="ctr" rtlCol="false" tIns="50800" lIns="50800" bIns="50800" rIns="50800"/>
+            <a:lstStyle/>
+            <a:p>
+              <a:pPr algn="ctr">
+                <a:lnSpc>
+                  <a:spcPts val="2467"/>
+                </a:lnSpc>
+              </a:pPr>
+            </a:p>
+          </p:txBody>
+        </p:sp>
+      </p:grpSp>
+      <p:grpSp>
+        <p:nvGrpSpPr>
+          <p:cNvPr name="Group 5" id="5"/>
+          <p:cNvGrpSpPr/>
+          <p:nvPr/>
+        </p:nvGrpSpPr>
+        <p:grpSpPr>
+          <a:xfrm rot="0">
+            <a:off x="5205807" y="3165513"/>
+            <a:ext cx="3738506" cy="4463401"/>
+            <a:chOff x="0" y="0"/>
+            <a:chExt cx="984627" cy="1175546"/>
+          </a:xfrm>
+        </p:grpSpPr>
+        <p:sp>
+          <p:nvSpPr>
+            <p:cNvPr name="Freeform 6" id="6"/>
+            <p:cNvSpPr/>
+            <p:nvPr/>
+          </p:nvSpPr>
+          <p:spPr>
+            <a:xfrm flipH="false" flipV="false" rot="0">
+              <a:off x="0" y="0"/>
+              <a:ext cx="984627" cy="1175546"/>
+            </a:xfrm>
+            <a:custGeom>
+              <a:avLst/>
+              <a:gdLst/>
+              <a:ahLst/>
+              <a:cxnLst/>
+              <a:rect r="r" b="b" t="t" l="l"/>
+              <a:pathLst>
+                <a:path h="1175546" w="984627">
+                  <a:moveTo>
+                    <a:pt x="28992" y="0"/>
+                  </a:moveTo>
+                  <a:lnTo>
+                    <a:pt x="955635" y="0"/>
+                  </a:lnTo>
+                  <a:cubicBezTo>
+                    <a:pt x="971647" y="0"/>
+                    <a:pt x="984627" y="12980"/>
+                    <a:pt x="984627" y="28992"/>
+                  </a:cubicBezTo>
+                  <a:lnTo>
+                    <a:pt x="984627" y="1146554"/>
+                  </a:lnTo>
+                  <a:cubicBezTo>
+                    <a:pt x="984627" y="1154243"/>
+                    <a:pt x="981573" y="1161617"/>
+                    <a:pt x="976135" y="1167054"/>
+                  </a:cubicBezTo>
+                  <a:cubicBezTo>
+                    <a:pt x="970698" y="1172492"/>
+                    <a:pt x="963324" y="1175546"/>
+                    <a:pt x="955635" y="1175546"/>
+                  </a:cubicBezTo>
+                  <a:lnTo>
+                    <a:pt x="28992" y="1175546"/>
+                  </a:lnTo>
+                  <a:cubicBezTo>
+                    <a:pt x="12980" y="1175546"/>
+                    <a:pt x="0" y="1162566"/>
+                    <a:pt x="0" y="1146554"/>
+                  </a:cubicBezTo>
+                  <a:lnTo>
+                    <a:pt x="0" y="28992"/>
+                  </a:lnTo>
+                  <a:cubicBezTo>
+                    <a:pt x="0" y="12980"/>
+                    <a:pt x="12980" y="0"/>
+                    <a:pt x="28992" y="0"/>
+                  </a:cubicBezTo>
+                  <a:close/>
+                </a:path>
+              </a:pathLst>
+            </a:custGeom>
+            <a:solidFill>
+              <a:srgbClr val="2D5986"/>
+            </a:solidFill>
+          </p:spPr>
+        </p:sp>
+        <p:sp>
+          <p:nvSpPr>
+            <p:cNvPr name="TextBox 7" id="7"/>
+            <p:cNvSpPr txBox="true"/>
+            <p:nvPr/>
+          </p:nvSpPr>
+          <p:spPr>
+            <a:xfrm>
+              <a:off x="0" y="-38100"/>
+              <a:ext cx="984627" cy="1213646"/>
+            </a:xfrm>
+            <a:prstGeom prst="rect">
+              <a:avLst/>
+            </a:prstGeom>
+          </p:spPr>
+          <p:txBody>
+            <a:bodyPr anchor="ctr" rtlCol="false" tIns="50800" lIns="50800" bIns="50800" rIns="50800"/>
+            <a:lstStyle/>
+            <a:p>
+              <a:pPr algn="ctr">
+                <a:lnSpc>
+                  <a:spcPts val="2467"/>
+                </a:lnSpc>
+              </a:pPr>
+            </a:p>
+          </p:txBody>
+        </p:sp>
+      </p:grpSp>
+      <p:sp>
+        <p:nvSpPr>
+          <p:cNvPr name="TextBox 8" id="8"/>
+          <p:cNvSpPr txBox="true"/>
+          <p:nvPr/>
+        </p:nvSpPr>
+        <p:spPr>
+          <a:xfrm rot="0">
+            <a:off x="217050" y="36820"/>
+            <a:ext cx="11910300" cy="1368424"/>
+          </a:xfrm>
+          <a:prstGeom prst="rect">
+            <a:avLst/>
+          </a:prstGeom>
+        </p:spPr>
+        <p:txBody>
+          <a:bodyPr anchor="t" rtlCol="false" tIns="0" lIns="0" bIns="0" rIns="0">
+            <a:spAutoFit/>
+          </a:bodyPr>
+          <a:lstStyle/>
+          <a:p>
+            <a:pPr algn="l">
+              <a:lnSpc>
+                <a:spcPts val="11200"/>
+              </a:lnSpc>
+              <a:spcBef>
+                <a:spcPct val="0"/>
+              </a:spcBef>
+            </a:pPr>
+            <a:r>
+              <a:rPr lang="en-US" sz="8000">
+                <a:solidFill>
+                  <a:srgbClr val="2D5986"/>
+                </a:solidFill>
+                <a:latin typeface="Anton"/>
+                <a:ea typeface="Anton"/>
+                <a:cs typeface="Anton"/>
+                <a:sym typeface="Anton"/>
+              </a:rPr>
+              <a:t>APB Agent</a:t>
+            </a:r>
+          </a:p>
+        </p:txBody>
+      </p:sp>
+      <p:sp>
+        <p:nvSpPr>
+          <p:cNvPr name="TextBox 9" id="9"/>
+          <p:cNvSpPr txBox="true"/>
+          <p:nvPr/>
+        </p:nvSpPr>
+        <p:spPr>
+          <a:xfrm rot="0">
+            <a:off x="1028700" y="1813891"/>
+            <a:ext cx="5889028" cy="838200"/>
+          </a:xfrm>
+          <a:prstGeom prst="rect">
+            <a:avLst/>
+          </a:prstGeom>
+        </p:spPr>
+        <p:txBody>
+          <a:bodyPr anchor="t" rtlCol="false" tIns="0" lIns="0" bIns="0" rIns="0">
+            <a:spAutoFit/>
+          </a:bodyPr>
+          <a:lstStyle/>
+          <a:p>
+            <a:pPr algn="l">
+              <a:lnSpc>
+                <a:spcPts val="5827"/>
+              </a:lnSpc>
+              <a:spcBef>
+                <a:spcPct val="0"/>
+              </a:spcBef>
+            </a:pPr>
+            <a:r>
+              <a:rPr lang="en-US" b="true" sz="4856">
+                <a:solidFill>
+                  <a:srgbClr val="2D5986"/>
+                </a:solidFill>
+                <a:latin typeface="Calibri (MS) Bold"/>
+                <a:ea typeface="Calibri (MS) Bold"/>
+                <a:cs typeface="Calibri (MS) Bold"/>
+                <a:sym typeface="Calibri (MS) Bold"/>
+              </a:rPr>
+              <a:t>Reactive</a:t>
+            </a:r>
+            <a:r>
+              <a:rPr lang="en-US" b="true" sz="4856">
+                <a:solidFill>
+                  <a:srgbClr val="2D5986"/>
+                </a:solidFill>
+                <a:latin typeface="Calibri (MS) Bold"/>
+                <a:ea typeface="Calibri (MS) Bold"/>
+                <a:cs typeface="Calibri (MS) Bold"/>
+                <a:sym typeface="Calibri (MS) Bold"/>
+              </a:rPr>
+              <a:t> data flow</a:t>
+            </a:r>
+          </a:p>
+        </p:txBody>
+      </p:sp>
+      <p:sp>
+        <p:nvSpPr>
+          <p:cNvPr name="TextBox 10" id="10"/>
+          <p:cNvSpPr txBox="true"/>
+          <p:nvPr/>
+        </p:nvSpPr>
+        <p:spPr>
+          <a:xfrm rot="0">
+            <a:off x="1186031" y="4391025"/>
+            <a:ext cx="2071247" cy="752475"/>
+          </a:xfrm>
+          <a:prstGeom prst="rect">
+            <a:avLst/>
+          </a:prstGeom>
+        </p:spPr>
+        <p:txBody>
+          <a:bodyPr anchor="t" rtlCol="false" tIns="0" lIns="0" bIns="0" rIns="0">
+            <a:spAutoFit/>
+          </a:bodyPr>
+          <a:lstStyle/>
+          <a:p>
+            <a:pPr algn="l">
+              <a:lnSpc>
+                <a:spcPts val="5227"/>
+              </a:lnSpc>
+              <a:spcBef>
+                <a:spcPct val="0"/>
+              </a:spcBef>
+            </a:pPr>
+            <a:r>
+              <a:rPr lang="en-US" b="true" sz="4356">
+                <a:solidFill>
+                  <a:srgbClr val="F7F5F1"/>
+                </a:solidFill>
+                <a:latin typeface="Calibri (MS) Bold"/>
+                <a:ea typeface="Calibri (MS) Bold"/>
+                <a:cs typeface="Calibri (MS) Bold"/>
+                <a:sym typeface="Calibri (MS) Bold"/>
+              </a:rPr>
+              <a:t>Moni</a:t>
+            </a:r>
+            <a:r>
+              <a:rPr lang="en-US" b="true" sz="4356">
+                <a:solidFill>
+                  <a:srgbClr val="F7F5F1"/>
+                </a:solidFill>
+                <a:latin typeface="Calibri (MS) Bold"/>
+                <a:ea typeface="Calibri (MS) Bold"/>
+                <a:cs typeface="Calibri (MS) Bold"/>
+                <a:sym typeface="Calibri (MS) Bold"/>
+              </a:rPr>
+              <a:t>tor</a:t>
+            </a:r>
+          </a:p>
+        </p:txBody>
+      </p:sp>
+      <p:sp>
+        <p:nvSpPr>
+          <p:cNvPr name="TextBox 11" id="11"/>
+          <p:cNvSpPr txBox="true"/>
+          <p:nvPr/>
+        </p:nvSpPr>
+        <p:spPr>
+          <a:xfrm rot="0">
+            <a:off x="5488163" y="4391025"/>
+            <a:ext cx="2602837" cy="752475"/>
+          </a:xfrm>
+          <a:prstGeom prst="rect">
+            <a:avLst/>
+          </a:prstGeom>
+        </p:spPr>
+        <p:txBody>
+          <a:bodyPr anchor="t" rtlCol="false" tIns="0" lIns="0" bIns="0" rIns="0">
+            <a:spAutoFit/>
+          </a:bodyPr>
+          <a:lstStyle/>
+          <a:p>
+            <a:pPr algn="l">
+              <a:lnSpc>
+                <a:spcPts val="5227"/>
+              </a:lnSpc>
+              <a:spcBef>
+                <a:spcPct val="0"/>
+              </a:spcBef>
+            </a:pPr>
+            <a:r>
+              <a:rPr lang="en-US" b="true" sz="4356">
+                <a:solidFill>
+                  <a:srgbClr val="F7F5F1"/>
+                </a:solidFill>
+                <a:latin typeface="Calibri (MS) Bold"/>
+                <a:ea typeface="Calibri (MS) Bold"/>
+                <a:cs typeface="Calibri (MS) Bold"/>
+                <a:sym typeface="Calibri (MS) Bold"/>
+              </a:rPr>
+              <a:t>Sequence</a:t>
+            </a:r>
+            <a:r>
+              <a:rPr lang="en-US" b="true" sz="4356">
+                <a:solidFill>
+                  <a:srgbClr val="F7F5F1"/>
+                </a:solidFill>
+                <a:latin typeface="Calibri (MS) Bold"/>
+                <a:ea typeface="Calibri (MS) Bold"/>
+                <a:cs typeface="Calibri (MS) Bold"/>
+                <a:sym typeface="Calibri (MS) Bold"/>
+              </a:rPr>
+              <a:t>r</a:t>
+            </a:r>
+          </a:p>
+        </p:txBody>
+      </p:sp>
+      <p:sp>
+        <p:nvSpPr>
+          <p:cNvPr name="TextBox 12" id="12"/>
+          <p:cNvSpPr txBox="true"/>
+          <p:nvPr/>
+        </p:nvSpPr>
+        <p:spPr>
+          <a:xfrm rot="0">
+            <a:off x="1186031" y="5267110"/>
+            <a:ext cx="3173794" cy="1771650"/>
+          </a:xfrm>
+          <a:prstGeom prst="rect">
+            <a:avLst/>
+          </a:prstGeom>
+        </p:spPr>
+        <p:txBody>
+          <a:bodyPr anchor="t" rtlCol="false" tIns="0" lIns="0" bIns="0" rIns="0">
+            <a:spAutoFit/>
+          </a:bodyPr>
+          <a:lstStyle/>
+          <a:p>
+            <a:pPr algn="l">
+              <a:lnSpc>
+                <a:spcPts val="2707"/>
+              </a:lnSpc>
+              <a:spcBef>
+                <a:spcPct val="0"/>
+              </a:spcBef>
+            </a:pPr>
+            <a:r>
+              <a:rPr lang="en-US" sz="2256">
+                <a:solidFill>
+                  <a:srgbClr val="F6F4EE"/>
+                </a:solidFill>
+                <a:latin typeface="Calibri (MS)"/>
+                <a:ea typeface="Calibri (MS)"/>
+                <a:cs typeface="Calibri (MS)"/>
+                <a:sym typeface="Calibri (MS)"/>
+              </a:rPr>
+              <a:t>Detects setup phase (PSEL=1, PENABLE=0) and publishes </a:t>
+            </a:r>
+            <a:r>
+              <a:rPr lang="en-US" sz="2256">
+                <a:solidFill>
+                  <a:srgbClr val="F6F4EE"/>
+                </a:solidFill>
+                <a:latin typeface="Calibri (MS)"/>
+                <a:ea typeface="Calibri (MS)"/>
+                <a:cs typeface="Calibri (MS)"/>
+                <a:sym typeface="Calibri (MS)"/>
+              </a:rPr>
+              <a:t>the request on request_aport.</a:t>
+            </a:r>
+          </a:p>
+          <a:p>
+            <a:pPr algn="l">
+              <a:lnSpc>
+                <a:spcPts val="2707"/>
+              </a:lnSpc>
+              <a:spcBef>
+                <a:spcPct val="0"/>
+              </a:spcBef>
+            </a:pPr>
+          </a:p>
+        </p:txBody>
+      </p:sp>
+      <p:sp>
+        <p:nvSpPr>
+          <p:cNvPr name="TextBox 13" id="13"/>
+          <p:cNvSpPr txBox="true"/>
+          <p:nvPr/>
+        </p:nvSpPr>
+        <p:spPr>
+          <a:xfrm rot="0">
+            <a:off x="5488163" y="5267110"/>
+            <a:ext cx="3173794" cy="1428750"/>
+          </a:xfrm>
+          <a:prstGeom prst="rect">
+            <a:avLst/>
+          </a:prstGeom>
+        </p:spPr>
+        <p:txBody>
+          <a:bodyPr anchor="t" rtlCol="false" tIns="0" lIns="0" bIns="0" rIns="0">
+            <a:spAutoFit/>
+          </a:bodyPr>
+          <a:lstStyle/>
+          <a:p>
+            <a:pPr algn="l">
+              <a:lnSpc>
+                <a:spcPts val="2707"/>
+              </a:lnSpc>
+              <a:spcBef>
+                <a:spcPct val="0"/>
+              </a:spcBef>
+            </a:pPr>
+            <a:r>
+              <a:rPr lang="en-US" sz="2256">
+                <a:solidFill>
+                  <a:srgbClr val="F6F4EE"/>
+                </a:solidFill>
+                <a:latin typeface="Calibri (MS)"/>
+                <a:ea typeface="Calibri (MS)"/>
+                <a:cs typeface="Calibri (MS)"/>
+                <a:sym typeface="Calibri (MS)"/>
+              </a:rPr>
+              <a:t>request_export feeds request_fifo inside </a:t>
+            </a:r>
+            <a:r>
+              <a:rPr lang="en-US" sz="2256">
+                <a:solidFill>
+                  <a:srgbClr val="F6F4EE"/>
+                </a:solidFill>
+                <a:latin typeface="Calibri (MS)"/>
+                <a:ea typeface="Calibri (MS)"/>
+                <a:cs typeface="Calibri (MS)"/>
+                <a:sym typeface="Calibri (MS)"/>
+              </a:rPr>
+              <a:t>the sequencer.</a:t>
+            </a:r>
+          </a:p>
+          <a:p>
+            <a:pPr algn="l">
+              <a:lnSpc>
+                <a:spcPts val="2707"/>
+              </a:lnSpc>
+              <a:spcBef>
+                <a:spcPct val="0"/>
+              </a:spcBef>
+            </a:pPr>
+          </a:p>
+        </p:txBody>
+      </p:sp>
+      <p:sp>
+        <p:nvSpPr>
+          <p:cNvPr name="TextBox 14" id="14"/>
+          <p:cNvSpPr txBox="true"/>
+          <p:nvPr/>
+        </p:nvSpPr>
+        <p:spPr>
+          <a:xfrm rot="0">
+            <a:off x="1186031" y="3485856"/>
+            <a:ext cx="2071247" cy="752475"/>
+          </a:xfrm>
+          <a:prstGeom prst="rect">
+            <a:avLst/>
+          </a:prstGeom>
+        </p:spPr>
+        <p:txBody>
+          <a:bodyPr anchor="t" rtlCol="false" tIns="0" lIns="0" bIns="0" rIns="0">
+            <a:spAutoFit/>
+          </a:bodyPr>
+          <a:lstStyle/>
+          <a:p>
+            <a:pPr algn="l">
+              <a:lnSpc>
+                <a:spcPts val="5227"/>
+              </a:lnSpc>
+              <a:spcBef>
+                <a:spcPct val="0"/>
+              </a:spcBef>
+            </a:pPr>
+            <a:r>
+              <a:rPr lang="en-US" b="true" sz="4356">
+                <a:solidFill>
+                  <a:srgbClr val="F6F4EE"/>
+                </a:solidFill>
+                <a:latin typeface="Calibri (MS) Bold"/>
+                <a:ea typeface="Calibri (MS) Bold"/>
+                <a:cs typeface="Calibri (MS) Bold"/>
+                <a:sym typeface="Calibri (MS) Bold"/>
+              </a:rPr>
+              <a:t>1</a:t>
+            </a:r>
+          </a:p>
+        </p:txBody>
+      </p:sp>
+      <p:sp>
+        <p:nvSpPr>
+          <p:cNvPr name="TextBox 15" id="15"/>
+          <p:cNvSpPr txBox="true"/>
+          <p:nvPr/>
+        </p:nvSpPr>
+        <p:spPr>
+          <a:xfrm rot="0">
+            <a:off x="5488163" y="3485856"/>
+            <a:ext cx="2071247" cy="752475"/>
+          </a:xfrm>
+          <a:prstGeom prst="rect">
+            <a:avLst/>
+          </a:prstGeom>
+        </p:spPr>
+        <p:txBody>
+          <a:bodyPr anchor="t" rtlCol="false" tIns="0" lIns="0" bIns="0" rIns="0">
+            <a:spAutoFit/>
+          </a:bodyPr>
+          <a:lstStyle/>
+          <a:p>
+            <a:pPr algn="l">
+              <a:lnSpc>
+                <a:spcPts val="5227"/>
+              </a:lnSpc>
+              <a:spcBef>
+                <a:spcPct val="0"/>
+              </a:spcBef>
+            </a:pPr>
+            <a:r>
+              <a:rPr lang="en-US" b="true" sz="4356">
+                <a:solidFill>
+                  <a:srgbClr val="F6F4EE"/>
+                </a:solidFill>
+                <a:latin typeface="Calibri (MS) Bold"/>
+                <a:ea typeface="Calibri (MS) Bold"/>
+                <a:cs typeface="Calibri (MS) Bold"/>
+                <a:sym typeface="Calibri (MS) Bold"/>
+              </a:rPr>
+              <a:t>2</a:t>
+            </a:r>
+          </a:p>
+        </p:txBody>
+      </p:sp>
+      <p:grpSp>
+        <p:nvGrpSpPr>
+          <p:cNvPr name="Group 16" id="16"/>
+          <p:cNvGrpSpPr/>
+          <p:nvPr/>
+        </p:nvGrpSpPr>
+        <p:grpSpPr>
+          <a:xfrm rot="0">
+            <a:off x="9382913" y="3165513"/>
+            <a:ext cx="3738506" cy="4463401"/>
+            <a:chOff x="0" y="0"/>
+            <a:chExt cx="984627" cy="1175546"/>
+          </a:xfrm>
+        </p:grpSpPr>
+        <p:sp>
+          <p:nvSpPr>
+            <p:cNvPr name="Freeform 17" id="17"/>
+            <p:cNvSpPr/>
+            <p:nvPr/>
+          </p:nvSpPr>
+          <p:spPr>
+            <a:xfrm flipH="false" flipV="false" rot="0">
+              <a:off x="0" y="0"/>
+              <a:ext cx="984627" cy="1175546"/>
+            </a:xfrm>
+            <a:custGeom>
+              <a:avLst/>
+              <a:gdLst/>
+              <a:ahLst/>
+              <a:cxnLst/>
+              <a:rect r="r" b="b" t="t" l="l"/>
+              <a:pathLst>
+                <a:path h="1175546" w="984627">
+                  <a:moveTo>
+                    <a:pt x="28992" y="0"/>
+                  </a:moveTo>
+                  <a:lnTo>
+                    <a:pt x="955635" y="0"/>
+                  </a:lnTo>
+                  <a:cubicBezTo>
+                    <a:pt x="971647" y="0"/>
+                    <a:pt x="984627" y="12980"/>
+                    <a:pt x="984627" y="28992"/>
+                  </a:cubicBezTo>
+                  <a:lnTo>
+                    <a:pt x="984627" y="1146554"/>
+                  </a:lnTo>
+                  <a:cubicBezTo>
+                    <a:pt x="984627" y="1154243"/>
+                    <a:pt x="981573" y="1161617"/>
+                    <a:pt x="976135" y="1167054"/>
+                  </a:cubicBezTo>
+                  <a:cubicBezTo>
+                    <a:pt x="970698" y="1172492"/>
+                    <a:pt x="963324" y="1175546"/>
+                    <a:pt x="955635" y="1175546"/>
+                  </a:cubicBezTo>
+                  <a:lnTo>
+                    <a:pt x="28992" y="1175546"/>
+                  </a:lnTo>
+                  <a:cubicBezTo>
+                    <a:pt x="12980" y="1175546"/>
+                    <a:pt x="0" y="1162566"/>
+                    <a:pt x="0" y="1146554"/>
+                  </a:cubicBezTo>
+                  <a:lnTo>
+                    <a:pt x="0" y="28992"/>
+                  </a:lnTo>
+                  <a:cubicBezTo>
+                    <a:pt x="0" y="12980"/>
+                    <a:pt x="12980" y="0"/>
+                    <a:pt x="28992" y="0"/>
+                  </a:cubicBezTo>
+                  <a:close/>
+                </a:path>
+              </a:pathLst>
+            </a:custGeom>
+            <a:solidFill>
+              <a:srgbClr val="2D5986"/>
+            </a:solidFill>
+          </p:spPr>
+        </p:sp>
+        <p:sp>
+          <p:nvSpPr>
+            <p:cNvPr name="TextBox 18" id="18"/>
+            <p:cNvSpPr txBox="true"/>
+            <p:nvPr/>
+          </p:nvSpPr>
+          <p:spPr>
+            <a:xfrm>
+              <a:off x="0" y="-38100"/>
+              <a:ext cx="984627" cy="1213646"/>
+            </a:xfrm>
+            <a:prstGeom prst="rect">
+              <a:avLst/>
+            </a:prstGeom>
+          </p:spPr>
+          <p:txBody>
+            <a:bodyPr anchor="ctr" rtlCol="false" tIns="50800" lIns="50800" bIns="50800" rIns="50800"/>
+            <a:lstStyle/>
+            <a:p>
+              <a:pPr algn="ctr">
+                <a:lnSpc>
+                  <a:spcPts val="2467"/>
+                </a:lnSpc>
+              </a:pPr>
+            </a:p>
+          </p:txBody>
+        </p:sp>
+      </p:grpSp>
+      <p:grpSp>
+        <p:nvGrpSpPr>
+          <p:cNvPr name="Group 19" id="19"/>
+          <p:cNvGrpSpPr/>
+          <p:nvPr/>
+        </p:nvGrpSpPr>
+        <p:grpSpPr>
+          <a:xfrm rot="0">
+            <a:off x="13423334" y="3165513"/>
+            <a:ext cx="3972653" cy="4463401"/>
+            <a:chOff x="0" y="0"/>
+            <a:chExt cx="1046295" cy="1175546"/>
+          </a:xfrm>
+        </p:grpSpPr>
+        <p:sp>
+          <p:nvSpPr>
+            <p:cNvPr name="Freeform 20" id="20"/>
+            <p:cNvSpPr/>
+            <p:nvPr/>
+          </p:nvSpPr>
+          <p:spPr>
+            <a:xfrm flipH="false" flipV="false" rot="0">
+              <a:off x="0" y="0"/>
+              <a:ext cx="1046295" cy="1175546"/>
+            </a:xfrm>
+            <a:custGeom>
+              <a:avLst/>
+              <a:gdLst/>
+              <a:ahLst/>
+              <a:cxnLst/>
+              <a:rect r="r" b="b" t="t" l="l"/>
+              <a:pathLst>
+                <a:path h="1175546" w="1046295">
+                  <a:moveTo>
+                    <a:pt x="27283" y="0"/>
+                  </a:moveTo>
+                  <a:lnTo>
+                    <a:pt x="1019012" y="0"/>
+                  </a:lnTo>
+                  <a:cubicBezTo>
+                    <a:pt x="1034080" y="0"/>
+                    <a:pt x="1046295" y="12215"/>
+                    <a:pt x="1046295" y="27283"/>
+                  </a:cubicBezTo>
+                  <a:lnTo>
+                    <a:pt x="1046295" y="1148263"/>
+                  </a:lnTo>
+                  <a:cubicBezTo>
+                    <a:pt x="1046295" y="1155499"/>
+                    <a:pt x="1043421" y="1162438"/>
+                    <a:pt x="1038304" y="1167555"/>
+                  </a:cubicBezTo>
+                  <a:cubicBezTo>
+                    <a:pt x="1033188" y="1172672"/>
+                    <a:pt x="1026248" y="1175546"/>
+                    <a:pt x="1019012" y="1175546"/>
+                  </a:cubicBezTo>
+                  <a:lnTo>
+                    <a:pt x="27283" y="1175546"/>
+                  </a:lnTo>
+                  <a:cubicBezTo>
+                    <a:pt x="12215" y="1175546"/>
+                    <a:pt x="0" y="1163331"/>
+                    <a:pt x="0" y="1148263"/>
+                  </a:cubicBezTo>
+                  <a:lnTo>
+                    <a:pt x="0" y="27283"/>
+                  </a:lnTo>
+                  <a:cubicBezTo>
+                    <a:pt x="0" y="12215"/>
+                    <a:pt x="12215" y="0"/>
+                    <a:pt x="27283" y="0"/>
+                  </a:cubicBezTo>
+                  <a:close/>
+                </a:path>
+              </a:pathLst>
+            </a:custGeom>
+            <a:solidFill>
+              <a:srgbClr val="2D5986"/>
+            </a:solidFill>
+          </p:spPr>
+        </p:sp>
+        <p:sp>
+          <p:nvSpPr>
+            <p:cNvPr name="TextBox 21" id="21"/>
+            <p:cNvSpPr txBox="true"/>
+            <p:nvPr/>
+          </p:nvSpPr>
+          <p:spPr>
+            <a:xfrm>
+              <a:off x="0" y="-38100"/>
+              <a:ext cx="1046295" cy="1213646"/>
+            </a:xfrm>
+            <a:prstGeom prst="rect">
+              <a:avLst/>
+            </a:prstGeom>
+          </p:spPr>
+          <p:txBody>
+            <a:bodyPr anchor="ctr" rtlCol="false" tIns="50800" lIns="50800" bIns="50800" rIns="50800"/>
+            <a:lstStyle/>
+            <a:p>
+              <a:pPr algn="ctr">
+                <a:lnSpc>
+                  <a:spcPts val="2467"/>
+                </a:lnSpc>
+              </a:pPr>
+            </a:p>
+          </p:txBody>
+        </p:sp>
+      </p:grpSp>
+      <p:sp>
+        <p:nvSpPr>
+          <p:cNvPr name="TextBox 22" id="22"/>
+          <p:cNvSpPr txBox="true"/>
+          <p:nvPr/>
+        </p:nvSpPr>
+        <p:spPr>
+          <a:xfrm rot="0">
+            <a:off x="9668212" y="4380083"/>
+            <a:ext cx="3047026" cy="716699"/>
+          </a:xfrm>
+          <a:prstGeom prst="rect">
+            <a:avLst/>
+          </a:prstGeom>
+        </p:spPr>
+        <p:txBody>
+          <a:bodyPr anchor="t" rtlCol="false" tIns="0" lIns="0" bIns="0" rIns="0">
+            <a:spAutoFit/>
+          </a:bodyPr>
+          <a:lstStyle/>
+          <a:p>
+            <a:pPr algn="l">
+              <a:lnSpc>
+                <a:spcPts val="5018"/>
+              </a:lnSpc>
+              <a:spcBef>
+                <a:spcPct val="0"/>
+              </a:spcBef>
+            </a:pPr>
+            <a:r>
+              <a:rPr lang="en-US" b="true" sz="4182">
+                <a:solidFill>
+                  <a:srgbClr val="F7F5F1"/>
+                </a:solidFill>
+                <a:latin typeface="Calibri (MS) Bold"/>
+                <a:ea typeface="Calibri (MS) Bold"/>
+                <a:cs typeface="Calibri (MS) Bold"/>
+                <a:sym typeface="Calibri (MS) Bold"/>
+              </a:rPr>
+              <a:t>Sequence</a:t>
+            </a:r>
+          </a:p>
+        </p:txBody>
+      </p:sp>
+      <p:sp>
+        <p:nvSpPr>
+          <p:cNvPr name="TextBox 23" id="23"/>
+          <p:cNvSpPr txBox="true"/>
+          <p:nvPr/>
+        </p:nvSpPr>
+        <p:spPr>
+          <a:xfrm rot="0">
+            <a:off x="9665269" y="5267110"/>
+            <a:ext cx="3173794" cy="1428750"/>
+          </a:xfrm>
+          <a:prstGeom prst="rect">
+            <a:avLst/>
+          </a:prstGeom>
+        </p:spPr>
+        <p:txBody>
+          <a:bodyPr anchor="t" rtlCol="false" tIns="0" lIns="0" bIns="0" rIns="0">
+            <a:spAutoFit/>
+          </a:bodyPr>
+          <a:lstStyle/>
+          <a:p>
+            <a:pPr algn="l">
+              <a:lnSpc>
+                <a:spcPts val="2707"/>
+              </a:lnSpc>
+              <a:spcBef>
+                <a:spcPct val="0"/>
+              </a:spcBef>
+            </a:pPr>
+            <a:r>
+              <a:rPr lang="en-US" sz="2256">
+                <a:solidFill>
+                  <a:srgbClr val="F6F4EE"/>
+                </a:solidFill>
+                <a:latin typeface="Calibri (MS)"/>
+                <a:ea typeface="Calibri (MS)"/>
+                <a:cs typeface="Calibri (MS)"/>
+                <a:sym typeface="Calibri (MS)"/>
+              </a:rPr>
+              <a:t>Gets on</a:t>
+            </a:r>
+            <a:r>
+              <a:rPr lang="en-US" sz="2256">
+                <a:solidFill>
+                  <a:srgbClr val="F6F4EE"/>
+                </a:solidFill>
+                <a:latin typeface="Calibri (MS)"/>
+                <a:ea typeface="Calibri (MS)"/>
+                <a:cs typeface="Calibri (MS)"/>
+                <a:sym typeface="Calibri (MS)"/>
+              </a:rPr>
+              <a:t>e request, creates apb_response, and randomizes it.</a:t>
+            </a:r>
+          </a:p>
+          <a:p>
+            <a:pPr algn="l">
+              <a:lnSpc>
+                <a:spcPts val="2707"/>
+              </a:lnSpc>
+              <a:spcBef>
+                <a:spcPct val="0"/>
+              </a:spcBef>
+            </a:pPr>
+          </a:p>
+        </p:txBody>
+      </p:sp>
+      <p:sp>
+        <p:nvSpPr>
+          <p:cNvPr name="TextBox 24" id="24"/>
+          <p:cNvSpPr txBox="true"/>
+          <p:nvPr/>
+        </p:nvSpPr>
+        <p:spPr>
+          <a:xfrm rot="0">
+            <a:off x="9665269" y="3485856"/>
+            <a:ext cx="2071247" cy="752475"/>
+          </a:xfrm>
+          <a:prstGeom prst="rect">
+            <a:avLst/>
+          </a:prstGeom>
+        </p:spPr>
+        <p:txBody>
+          <a:bodyPr anchor="t" rtlCol="false" tIns="0" lIns="0" bIns="0" rIns="0">
+            <a:spAutoFit/>
+          </a:bodyPr>
+          <a:lstStyle/>
+          <a:p>
+            <a:pPr algn="l">
+              <a:lnSpc>
+                <a:spcPts val="5227"/>
+              </a:lnSpc>
+              <a:spcBef>
+                <a:spcPct val="0"/>
+              </a:spcBef>
+            </a:pPr>
+            <a:r>
+              <a:rPr lang="en-US" b="true" sz="4356">
+                <a:solidFill>
+                  <a:srgbClr val="F6F4EE"/>
+                </a:solidFill>
+                <a:latin typeface="Calibri (MS) Bold"/>
+                <a:ea typeface="Calibri (MS) Bold"/>
+                <a:cs typeface="Calibri (MS) Bold"/>
+                <a:sym typeface="Calibri (MS) Bold"/>
+              </a:rPr>
+              <a:t>3</a:t>
+            </a:r>
+          </a:p>
+        </p:txBody>
+      </p:sp>
+      <p:sp>
+        <p:nvSpPr>
+          <p:cNvPr name="TextBox 25" id="25"/>
+          <p:cNvSpPr txBox="true"/>
+          <p:nvPr/>
+        </p:nvSpPr>
+        <p:spPr>
+          <a:xfrm rot="0">
+            <a:off x="13708633" y="4391025"/>
+            <a:ext cx="2071247" cy="752475"/>
+          </a:xfrm>
+          <a:prstGeom prst="rect">
+            <a:avLst/>
+          </a:prstGeom>
+        </p:spPr>
+        <p:txBody>
+          <a:bodyPr anchor="t" rtlCol="false" tIns="0" lIns="0" bIns="0" rIns="0">
+            <a:spAutoFit/>
+          </a:bodyPr>
+          <a:lstStyle/>
+          <a:p>
+            <a:pPr algn="l">
+              <a:lnSpc>
+                <a:spcPts val="5227"/>
+              </a:lnSpc>
+              <a:spcBef>
+                <a:spcPct val="0"/>
+              </a:spcBef>
+            </a:pPr>
+            <a:r>
+              <a:rPr lang="en-US" b="true" sz="4356">
+                <a:solidFill>
+                  <a:srgbClr val="F7F5F1"/>
+                </a:solidFill>
+                <a:latin typeface="Calibri (MS) Bold"/>
+                <a:ea typeface="Calibri (MS) Bold"/>
+                <a:cs typeface="Calibri (MS) Bold"/>
+                <a:sym typeface="Calibri (MS) Bold"/>
+              </a:rPr>
+              <a:t>Drive</a:t>
+            </a:r>
+            <a:r>
+              <a:rPr lang="en-US" b="true" sz="4356">
+                <a:solidFill>
+                  <a:srgbClr val="F7F5F1"/>
+                </a:solidFill>
+                <a:latin typeface="Calibri (MS) Bold"/>
+                <a:ea typeface="Calibri (MS) Bold"/>
+                <a:cs typeface="Calibri (MS) Bold"/>
+                <a:sym typeface="Calibri (MS) Bold"/>
+              </a:rPr>
+              <a:t>r</a:t>
+            </a:r>
+          </a:p>
+        </p:txBody>
+      </p:sp>
+      <p:sp>
+        <p:nvSpPr>
+          <p:cNvPr name="TextBox 26" id="26"/>
+          <p:cNvSpPr txBox="true"/>
+          <p:nvPr/>
+        </p:nvSpPr>
+        <p:spPr>
+          <a:xfrm rot="0">
+            <a:off x="13708633" y="5267110"/>
+            <a:ext cx="3550667" cy="2114550"/>
+          </a:xfrm>
+          <a:prstGeom prst="rect">
+            <a:avLst/>
+          </a:prstGeom>
+        </p:spPr>
+        <p:txBody>
+          <a:bodyPr anchor="t" rtlCol="false" tIns="0" lIns="0" bIns="0" rIns="0">
+            <a:spAutoFit/>
+          </a:bodyPr>
+          <a:lstStyle/>
+          <a:p>
+            <a:pPr algn="l">
+              <a:lnSpc>
+                <a:spcPts val="2707"/>
+              </a:lnSpc>
+              <a:spcBef>
+                <a:spcPct val="0"/>
+              </a:spcBef>
+            </a:pPr>
+            <a:r>
+              <a:rPr lang="en-US" sz="2256">
+                <a:solidFill>
+                  <a:srgbClr val="F6F4EE"/>
+                </a:solidFill>
+                <a:latin typeface="Calibri (MS)"/>
+                <a:ea typeface="Calibri (MS)"/>
+                <a:cs typeface="Calibri (MS)"/>
+                <a:sym typeface="Calibri (MS)"/>
+              </a:rPr>
+              <a:t>Takes the response access phase at(PSEL=1, PENABLE=1) with get_next_item and drives i</a:t>
+            </a:r>
+            <a:r>
+              <a:rPr lang="en-US" sz="2256">
+                <a:solidFill>
+                  <a:srgbClr val="F6F4EE"/>
+                </a:solidFill>
+                <a:latin typeface="Calibri (MS)"/>
+                <a:ea typeface="Calibri (MS)"/>
+                <a:cs typeface="Calibri (MS)"/>
+                <a:sym typeface="Calibri (MS)"/>
+              </a:rPr>
+              <a:t>t on the bus.</a:t>
+            </a:r>
+          </a:p>
+          <a:p>
+            <a:pPr algn="l">
+              <a:lnSpc>
+                <a:spcPts val="2707"/>
+              </a:lnSpc>
+              <a:spcBef>
+                <a:spcPct val="0"/>
+              </a:spcBef>
+            </a:pPr>
+          </a:p>
+          <a:p>
+            <a:pPr algn="l">
+              <a:lnSpc>
+                <a:spcPts val="2707"/>
+              </a:lnSpc>
+              <a:spcBef>
+                <a:spcPct val="0"/>
+              </a:spcBef>
+            </a:pPr>
+          </a:p>
+        </p:txBody>
+      </p:sp>
+      <p:sp>
+        <p:nvSpPr>
+          <p:cNvPr name="TextBox 27" id="27"/>
+          <p:cNvSpPr txBox="true"/>
+          <p:nvPr/>
+        </p:nvSpPr>
+        <p:spPr>
+          <a:xfrm rot="0">
+            <a:off x="13708633" y="3485856"/>
+            <a:ext cx="2071247" cy="752475"/>
+          </a:xfrm>
+          <a:prstGeom prst="rect">
+            <a:avLst/>
+          </a:prstGeom>
+        </p:spPr>
+        <p:txBody>
+          <a:bodyPr anchor="t" rtlCol="false" tIns="0" lIns="0" bIns="0" rIns="0">
+            <a:spAutoFit/>
+          </a:bodyPr>
+          <a:lstStyle/>
+          <a:p>
+            <a:pPr algn="l">
+              <a:lnSpc>
+                <a:spcPts val="5227"/>
+              </a:lnSpc>
+              <a:spcBef>
+                <a:spcPct val="0"/>
+              </a:spcBef>
+            </a:pPr>
+            <a:r>
+              <a:rPr lang="en-US" b="true" sz="4356">
+                <a:solidFill>
+                  <a:srgbClr val="F6F4EE"/>
+                </a:solidFill>
+                <a:latin typeface="Calibri (MS) Bold"/>
+                <a:ea typeface="Calibri (MS) Bold"/>
+                <a:cs typeface="Calibri (MS) Bold"/>
+                <a:sym typeface="Calibri (MS) Bold"/>
+              </a:rPr>
+              <a:t>4</a:t>
+            </a:r>
+          </a:p>
+        </p:txBody>
+      </p:sp>
+      <p:grpSp>
+        <p:nvGrpSpPr>
+          <p:cNvPr name="Group 28" id="28"/>
+          <p:cNvGrpSpPr/>
+          <p:nvPr/>
+        </p:nvGrpSpPr>
+        <p:grpSpPr>
+          <a:xfrm rot="0">
+            <a:off x="685800" y="9710928"/>
+            <a:ext cx="10972800" cy="411480"/>
+            <a:chOff x="0" y="0"/>
+            <a:chExt cx="14630400" cy="548640"/>
+          </a:xfrm>
+        </p:grpSpPr>
+        <p:sp>
+          <p:nvSpPr>
+            <p:cNvPr name="Freeform 29" id="29"/>
+            <p:cNvSpPr/>
+            <p:nvPr/>
+          </p:nvSpPr>
+          <p:spPr>
+            <a:xfrm flipH="false" flipV="false" rot="0">
+              <a:off x="0" y="0"/>
+              <a:ext cx="14630400" cy="548640"/>
+            </a:xfrm>
+            <a:custGeom>
+              <a:avLst/>
+              <a:gdLst/>
+              <a:ahLst/>
+              <a:cxnLst/>
+              <a:rect r="r" b="b" t="t" l="l"/>
+              <a:pathLst>
+                <a:path h="548640" w="14630400">
+                  <a:moveTo>
+                    <a:pt x="0" y="0"/>
+                  </a:moveTo>
+                  <a:lnTo>
+                    <a:pt x="14630400" y="0"/>
+                  </a:lnTo>
+                  <a:lnTo>
+                    <a:pt x="14630400" y="548640"/>
+                  </a:lnTo>
+                  <a:lnTo>
+                    <a:pt x="0" y="548640"/>
+                  </a:lnTo>
+                  <a:close/>
+                </a:path>
+              </a:pathLst>
+            </a:custGeom>
+            <a:blipFill>
+              <a:blip r:embed="rId2">
+                <a:alphaModFix amt="0"/>
+              </a:blip>
+              <a:stretch>
+                <a:fillRect l="0" t="-469601" r="0" b="-469601"/>
+              </a:stretch>
+            </a:blipFill>
+          </p:spPr>
+        </p:sp>
+        <p:sp>
+          <p:nvSpPr>
+            <p:cNvPr name="TextBox 30" id="30"/>
+            <p:cNvSpPr txBox="true"/>
+            <p:nvPr/>
+          </p:nvSpPr>
+          <p:spPr>
+            <a:xfrm>
+              <a:off x="0" y="-28575"/>
+              <a:ext cx="14630400" cy="577215"/>
+            </a:xfrm>
+            <a:prstGeom prst="rect">
+              <a:avLst/>
+            </a:prstGeom>
+          </p:spPr>
+          <p:txBody>
+            <a:bodyPr anchor="ctr" rtlCol="false" tIns="0" lIns="0" bIns="0" rIns="0"/>
+            <a:lstStyle/>
+            <a:p>
+              <a:pPr algn="l">
+                <a:lnSpc>
+                  <a:spcPts val="1620"/>
+                </a:lnSpc>
+              </a:pPr>
+              <a:r>
+                <a:rPr lang="en-US" sz="1350">
+                  <a:solidFill>
+                    <a:srgbClr val="5B6B82"/>
+                  </a:solidFill>
+                  <a:latin typeface="Calibri (MS)"/>
+                  <a:ea typeface="Calibri (MS)"/>
+                  <a:cs typeface="Calibri (MS)"/>
+                  <a:sym typeface="Calibri (MS)"/>
+                </a:rPr>
+                <a:t>AHB to APB Bridge UVM Project</a:t>
+              </a:r>
+            </a:p>
+          </p:txBody>
+        </p:sp>
+      </p:grpSp>
+      <p:grpSp>
+        <p:nvGrpSpPr>
+          <p:cNvPr name="Group 31" id="31"/>
+          <p:cNvGrpSpPr/>
+          <p:nvPr/>
+        </p:nvGrpSpPr>
+        <p:grpSpPr>
+          <a:xfrm rot="0">
+            <a:off x="16911828" y="9710928"/>
+            <a:ext cx="685800" cy="411480"/>
+            <a:chOff x="0" y="0"/>
+            <a:chExt cx="914400" cy="548640"/>
+          </a:xfrm>
+        </p:grpSpPr>
+        <p:sp>
+          <p:nvSpPr>
+            <p:cNvPr name="Freeform 32" id="32"/>
+            <p:cNvSpPr/>
+            <p:nvPr/>
+          </p:nvSpPr>
+          <p:spPr>
+            <a:xfrm flipH="false" flipV="false" rot="0">
+              <a:off x="0" y="0"/>
+              <a:ext cx="914400" cy="548640"/>
+            </a:xfrm>
+            <a:custGeom>
+              <a:avLst/>
+              <a:gdLst/>
+              <a:ahLst/>
+              <a:cxnLst/>
+              <a:rect r="r" b="b" t="t" l="l"/>
+              <a:pathLst>
+                <a:path h="548640" w="914400">
+                  <a:moveTo>
+                    <a:pt x="0" y="0"/>
+                  </a:moveTo>
+                  <a:lnTo>
+                    <a:pt x="914400" y="0"/>
+                  </a:lnTo>
+                  <a:lnTo>
+                    <a:pt x="914400" y="548640"/>
+                  </a:lnTo>
+                  <a:lnTo>
+                    <a:pt x="0" y="548640"/>
+                  </a:lnTo>
+                  <a:close/>
+                </a:path>
+              </a:pathLst>
+            </a:custGeom>
+            <a:blipFill>
+              <a:blip r:embed="rId2">
+                <a:alphaModFix amt="0"/>
+              </a:blip>
+              <a:stretch>
+                <a:fillRect l="-26982" t="0" r="-26982" b="0"/>
+              </a:stretch>
+            </a:blipFill>
+          </p:spPr>
+        </p:sp>
+        <p:sp>
+          <p:nvSpPr>
+            <p:cNvPr name="TextBox 33" id="33"/>
+            <p:cNvSpPr txBox="true"/>
+            <p:nvPr/>
+          </p:nvSpPr>
+          <p:spPr>
+            <a:xfrm>
+              <a:off x="0" y="-28575"/>
+              <a:ext cx="914400" cy="577215"/>
+            </a:xfrm>
+            <a:prstGeom prst="rect">
+              <a:avLst/>
+            </a:prstGeom>
+          </p:spPr>
+          <p:txBody>
+            <a:bodyPr anchor="ctr" rtlCol="false" tIns="0" lIns="0" bIns="0" rIns="0"/>
+            <a:lstStyle/>
+            <a:p>
+              <a:pPr algn="r">
+                <a:lnSpc>
+                  <a:spcPts val="1620"/>
+                </a:lnSpc>
+              </a:pPr>
+              <a:r>
+                <a:rPr lang="en-US" sz="1350">
+                  <a:solidFill>
+                    <a:srgbClr val="5B6B82"/>
+                  </a:solidFill>
+                  <a:latin typeface="Calibri (MS)"/>
+                  <a:ea typeface="Calibri (MS)"/>
+                  <a:cs typeface="Calibri (MS)"/>
+                  <a:sym typeface="Calibri (MS)"/>
+                </a:rPr>
+                <a:t>14</a:t>
+              </a:r>
+            </a:p>
+          </p:txBody>
+        </p:sp>
+      </p:grpSp>
+    </p:spTree>
+  </p:cSld>
+  <p:clrMapOvr>
+    <a:masterClrMapping/>
+  </p:clrMapOvr>
+</p:sld>
+</file>
+
 <file path=ppt/slides/slide15.xml><?xml version="1.0" encoding="utf-8"?>
 <p:sld xmlns:p="http://schemas.openxmlformats.org/presentationml/2006/main" xmlns:a="http://schemas.openxmlformats.org/drawingml/2006/main" xmlns:r="http://schemas.openxmlformats.org/officeDocument/2006/relationships">
   <p:cSld>
@@ -9525,864 +9388,13 @@
       </p:grpSp>
       <p:sp>
         <p:nvSpPr>
-          <p:cNvPr name="TextBox 8" id="8"/>
-          <p:cNvSpPr txBox="true"/>
-          <p:nvPr/>
-        </p:nvSpPr>
-        <p:spPr>
-          <a:xfrm rot="0">
-            <a:off x="434504" y="296454"/>
-            <a:ext cx="8400935" cy="923925"/>
-          </a:xfrm>
-          <a:prstGeom prst="rect">
-            <a:avLst/>
-          </a:prstGeom>
-        </p:spPr>
-        <p:txBody>
-          <a:bodyPr anchor="t" rtlCol="false" tIns="0" lIns="0" bIns="0" rIns="0">
-            <a:spAutoFit/>
-          </a:bodyPr>
-          <a:lstStyle/>
-          <a:p>
-            <a:pPr algn="l">
-              <a:lnSpc>
-                <a:spcPts val="7267"/>
-              </a:lnSpc>
-              <a:spcBef>
-                <a:spcPct val="0"/>
-              </a:spcBef>
-            </a:pPr>
-            <a:r>
-              <a:rPr lang="en-US" sz="6056">
-                <a:solidFill>
-                  <a:srgbClr val="2D5986"/>
-                </a:solidFill>
-                <a:latin typeface="Anton"/>
-                <a:ea typeface="Anton"/>
-                <a:cs typeface="Anton"/>
-                <a:sym typeface="Anton"/>
-              </a:rPr>
-              <a:t>Driver and monitor</a:t>
-            </a:r>
-            <a:r>
-              <a:rPr lang="en-US" sz="6056">
-                <a:solidFill>
-                  <a:srgbClr val="2D5986"/>
-                </a:solidFill>
-                <a:latin typeface="Anton"/>
-                <a:ea typeface="Anton"/>
-                <a:cs typeface="Anton"/>
-                <a:sym typeface="Anton"/>
-              </a:rPr>
-              <a:t> timing</a:t>
-            </a:r>
-          </a:p>
-        </p:txBody>
-      </p:sp>
-      <p:grpSp>
-        <p:nvGrpSpPr>
-          <p:cNvPr name="Group 9" id="9"/>
-          <p:cNvGrpSpPr/>
-          <p:nvPr/>
-        </p:nvGrpSpPr>
-        <p:grpSpPr>
-          <a:xfrm rot="0">
-            <a:off x="1028700" y="1959784"/>
-            <a:ext cx="11935123" cy="1080034"/>
-            <a:chOff x="0" y="0"/>
-            <a:chExt cx="3661620" cy="331347"/>
-          </a:xfrm>
-        </p:grpSpPr>
-        <p:sp>
-          <p:nvSpPr>
-            <p:cNvPr name="Freeform 10" id="10"/>
-            <p:cNvSpPr/>
-            <p:nvPr/>
-          </p:nvSpPr>
-          <p:spPr>
-            <a:xfrm flipH="false" flipV="false" rot="0">
-              <a:off x="0" y="0"/>
-              <a:ext cx="3661620" cy="331347"/>
-            </a:xfrm>
-            <a:custGeom>
-              <a:avLst/>
-              <a:gdLst/>
-              <a:ahLst/>
-              <a:cxnLst/>
-              <a:rect r="r" b="b" t="t" l="l"/>
-              <a:pathLst>
-                <a:path h="331347" w="3661620">
-                  <a:moveTo>
-                    <a:pt x="3458420" y="0"/>
-                  </a:moveTo>
-                  <a:cubicBezTo>
-                    <a:pt x="3570644" y="0"/>
-                    <a:pt x="3661620" y="74175"/>
-                    <a:pt x="3661620" y="165674"/>
-                  </a:cubicBezTo>
-                  <a:cubicBezTo>
-                    <a:pt x="3661620" y="257173"/>
-                    <a:pt x="3570644" y="331347"/>
-                    <a:pt x="3458420" y="331347"/>
-                  </a:cubicBezTo>
-                  <a:lnTo>
-                    <a:pt x="203200" y="331347"/>
-                  </a:lnTo>
-                  <a:cubicBezTo>
-                    <a:pt x="90976" y="331347"/>
-                    <a:pt x="0" y="257173"/>
-                    <a:pt x="0" y="165674"/>
-                  </a:cubicBezTo>
-                  <a:cubicBezTo>
-                    <a:pt x="0" y="74175"/>
-                    <a:pt x="90976" y="0"/>
-                    <a:pt x="203200" y="0"/>
-                  </a:cubicBezTo>
-                  <a:close/>
-                </a:path>
-              </a:pathLst>
-            </a:custGeom>
-            <a:solidFill>
-              <a:srgbClr val="23496D"/>
-            </a:solidFill>
-          </p:spPr>
-        </p:sp>
-        <p:sp>
-          <p:nvSpPr>
-            <p:cNvPr name="TextBox 11" id="11"/>
-            <p:cNvSpPr txBox="true"/>
-            <p:nvPr/>
-          </p:nvSpPr>
-          <p:spPr>
-            <a:xfrm>
-              <a:off x="0" y="-47625"/>
-              <a:ext cx="3661620" cy="378972"/>
-            </a:xfrm>
-            <a:prstGeom prst="rect">
-              <a:avLst/>
-            </a:prstGeom>
-          </p:spPr>
-          <p:txBody>
-            <a:bodyPr anchor="ctr" rtlCol="false" tIns="50800" lIns="50800" bIns="50800" rIns="50800"/>
-            <a:lstStyle/>
-            <a:p>
-              <a:pPr algn="l" marL="539748" indent="-269874" lvl="1">
-                <a:lnSpc>
-                  <a:spcPts val="2999"/>
-                </a:lnSpc>
-                <a:buAutoNum type="arabicPeriod" startAt="1"/>
-              </a:pPr>
-              <a:r>
-                <a:rPr lang="en-US" b="true" sz="2499">
-                  <a:solidFill>
-                    <a:srgbClr val="F7F5F1"/>
-                  </a:solidFill>
-                  <a:latin typeface="Calibri (MS) Bold"/>
-                  <a:ea typeface="Calibri (MS) Bold"/>
-                  <a:cs typeface="Calibri (MS) Bold"/>
-                  <a:sym typeface="Calibri (MS) Bold"/>
-                </a:rPr>
-                <a:t> Driver waits on posedge PCLK until PSEL and PENABLE are both high (access phase).</a:t>
-              </a:r>
-            </a:p>
-          </p:txBody>
-        </p:sp>
-      </p:grpSp>
-      <p:grpSp>
-        <p:nvGrpSpPr>
-          <p:cNvPr name="Group 12" id="12"/>
-          <p:cNvGrpSpPr/>
-          <p:nvPr/>
-        </p:nvGrpSpPr>
-        <p:grpSpPr>
-          <a:xfrm rot="0">
-            <a:off x="1028700" y="3230317"/>
-            <a:ext cx="12532923" cy="1148535"/>
-            <a:chOff x="0" y="0"/>
-            <a:chExt cx="3300852" cy="302495"/>
-          </a:xfrm>
-        </p:grpSpPr>
-        <p:sp>
-          <p:nvSpPr>
-            <p:cNvPr name="Freeform 13" id="13"/>
-            <p:cNvSpPr/>
-            <p:nvPr/>
-          </p:nvSpPr>
-          <p:spPr>
-            <a:xfrm flipH="false" flipV="false" rot="0">
-              <a:off x="0" y="0"/>
-              <a:ext cx="3300852" cy="302495"/>
-            </a:xfrm>
-            <a:custGeom>
-              <a:avLst/>
-              <a:gdLst/>
-              <a:ahLst/>
-              <a:cxnLst/>
-              <a:rect r="r" b="b" t="t" l="l"/>
-              <a:pathLst>
-                <a:path h="302495" w="3300852">
-                  <a:moveTo>
-                    <a:pt x="3097652" y="0"/>
-                  </a:moveTo>
-                  <a:cubicBezTo>
-                    <a:pt x="3209876" y="0"/>
-                    <a:pt x="3300852" y="67716"/>
-                    <a:pt x="3300852" y="151247"/>
-                  </a:cubicBezTo>
-                  <a:cubicBezTo>
-                    <a:pt x="3300852" y="234779"/>
-                    <a:pt x="3209876" y="302495"/>
-                    <a:pt x="3097652" y="302495"/>
-                  </a:cubicBezTo>
-                  <a:lnTo>
-                    <a:pt x="203200" y="302495"/>
-                  </a:lnTo>
-                  <a:cubicBezTo>
-                    <a:pt x="90976" y="302495"/>
-                    <a:pt x="0" y="234779"/>
-                    <a:pt x="0" y="151247"/>
-                  </a:cubicBezTo>
-                  <a:cubicBezTo>
-                    <a:pt x="0" y="67716"/>
-                    <a:pt x="90976" y="0"/>
-                    <a:pt x="203200" y="0"/>
-                  </a:cubicBezTo>
-                  <a:close/>
-                </a:path>
-              </a:pathLst>
-            </a:custGeom>
-            <a:solidFill>
-              <a:srgbClr val="DCE3EC"/>
-            </a:solidFill>
-          </p:spPr>
-        </p:sp>
-        <p:sp>
-          <p:nvSpPr>
-            <p:cNvPr name="TextBox 14" id="14"/>
-            <p:cNvSpPr txBox="true"/>
-            <p:nvPr/>
-          </p:nvSpPr>
-          <p:spPr>
-            <a:xfrm>
-              <a:off x="0" y="-47625"/>
-              <a:ext cx="3300852" cy="350120"/>
-            </a:xfrm>
-            <a:prstGeom prst="rect">
-              <a:avLst/>
-            </a:prstGeom>
-          </p:spPr>
-          <p:txBody>
-            <a:bodyPr anchor="ctr" rtlCol="false" tIns="50800" lIns="50800" bIns="50800" rIns="50800"/>
-            <a:lstStyle/>
-            <a:p>
-              <a:pPr algn="l">
-                <a:lnSpc>
-                  <a:spcPts val="2999"/>
-                </a:lnSpc>
-              </a:pPr>
-              <a:r>
-                <a:rPr lang="en-US" sz="2499" b="true">
-                  <a:solidFill>
-                    <a:srgbClr val="23496D"/>
-                  </a:solidFill>
-                  <a:latin typeface="Calibri (MS) Bold"/>
-                  <a:ea typeface="Calibri (MS) Bold"/>
-                  <a:cs typeface="Calibri (MS) Bold"/>
-                  <a:sym typeface="Calibri (MS) Bold"/>
-                </a:rPr>
-                <a:t>   2. It holds PREADY low for wait_cycles clock cycles.</a:t>
-              </a:r>
-            </a:p>
-          </p:txBody>
-        </p:sp>
-      </p:grpSp>
-      <p:grpSp>
-        <p:nvGrpSpPr>
-          <p:cNvPr name="Group 15" id="15"/>
-          <p:cNvGrpSpPr/>
-          <p:nvPr/>
-        </p:nvGrpSpPr>
-        <p:grpSpPr>
-          <a:xfrm rot="0">
-            <a:off x="1028700" y="4588905"/>
-            <a:ext cx="13255264" cy="1080034"/>
-            <a:chOff x="0" y="0"/>
-            <a:chExt cx="4066631" cy="331347"/>
-          </a:xfrm>
-        </p:grpSpPr>
-        <p:sp>
-          <p:nvSpPr>
-            <p:cNvPr name="Freeform 16" id="16"/>
-            <p:cNvSpPr/>
-            <p:nvPr/>
-          </p:nvSpPr>
-          <p:spPr>
-            <a:xfrm flipH="false" flipV="false" rot="0">
-              <a:off x="0" y="0"/>
-              <a:ext cx="4066631" cy="331347"/>
-            </a:xfrm>
-            <a:custGeom>
-              <a:avLst/>
-              <a:gdLst/>
-              <a:ahLst/>
-              <a:cxnLst/>
-              <a:rect r="r" b="b" t="t" l="l"/>
-              <a:pathLst>
-                <a:path h="331347" w="4066631">
-                  <a:moveTo>
-                    <a:pt x="3863431" y="0"/>
-                  </a:moveTo>
-                  <a:cubicBezTo>
-                    <a:pt x="3975655" y="0"/>
-                    <a:pt x="4066631" y="74175"/>
-                    <a:pt x="4066631" y="165674"/>
-                  </a:cubicBezTo>
-                  <a:cubicBezTo>
-                    <a:pt x="4066631" y="257173"/>
-                    <a:pt x="3975655" y="331347"/>
-                    <a:pt x="3863431" y="331347"/>
-                  </a:cubicBezTo>
-                  <a:lnTo>
-                    <a:pt x="203200" y="331347"/>
-                  </a:lnTo>
-                  <a:cubicBezTo>
-                    <a:pt x="90976" y="331347"/>
-                    <a:pt x="0" y="257173"/>
-                    <a:pt x="0" y="165674"/>
-                  </a:cubicBezTo>
-                  <a:cubicBezTo>
-                    <a:pt x="0" y="74175"/>
-                    <a:pt x="90976" y="0"/>
-                    <a:pt x="203200" y="0"/>
-                  </a:cubicBezTo>
-                  <a:close/>
-                </a:path>
-              </a:pathLst>
-            </a:custGeom>
-            <a:solidFill>
-              <a:srgbClr val="23496D"/>
-            </a:solidFill>
-          </p:spPr>
-        </p:sp>
-        <p:sp>
-          <p:nvSpPr>
-            <p:cNvPr name="TextBox 17" id="17"/>
-            <p:cNvSpPr txBox="true"/>
-            <p:nvPr/>
-          </p:nvSpPr>
-          <p:spPr>
-            <a:xfrm>
-              <a:off x="0" y="-47625"/>
-              <a:ext cx="4066631" cy="378972"/>
-            </a:xfrm>
-            <a:prstGeom prst="rect">
-              <a:avLst/>
-            </a:prstGeom>
-          </p:spPr>
-          <p:txBody>
-            <a:bodyPr anchor="ctr" rtlCol="false" tIns="50800" lIns="50800" bIns="50800" rIns="50800"/>
-            <a:lstStyle/>
-            <a:p>
-              <a:pPr algn="l">
-                <a:lnSpc>
-                  <a:spcPts val="2999"/>
-                </a:lnSpc>
-              </a:pPr>
-              <a:r>
-                <a:rPr lang="en-US" b="true" sz="2499">
-                  <a:solidFill>
-                    <a:srgbClr val="F7F5F1"/>
-                  </a:solidFill>
-                  <a:latin typeface="Calibri (MS) Bold"/>
-                  <a:ea typeface="Calibri (MS) Bold"/>
-                  <a:cs typeface="Calibri (MS) Bold"/>
-                  <a:sym typeface="Calibri (MS) Bold"/>
-                </a:rPr>
-                <a:t>   3. It sets PREADY=1 with PRDATA and PSLVERR for one cycle, then clears them.</a:t>
-              </a:r>
-            </a:p>
-          </p:txBody>
-        </p:sp>
-      </p:grpSp>
-      <p:grpSp>
-        <p:nvGrpSpPr>
-          <p:cNvPr name="Group 18" id="18"/>
-          <p:cNvGrpSpPr/>
-          <p:nvPr/>
-        </p:nvGrpSpPr>
-        <p:grpSpPr>
-          <a:xfrm rot="0">
-            <a:off x="1028700" y="5878488"/>
-            <a:ext cx="13952697" cy="1148535"/>
-            <a:chOff x="0" y="0"/>
-            <a:chExt cx="3674784" cy="302495"/>
-          </a:xfrm>
-        </p:grpSpPr>
-        <p:sp>
-          <p:nvSpPr>
-            <p:cNvPr name="Freeform 19" id="19"/>
-            <p:cNvSpPr/>
-            <p:nvPr/>
-          </p:nvSpPr>
-          <p:spPr>
-            <a:xfrm flipH="false" flipV="false" rot="0">
-              <a:off x="0" y="0"/>
-              <a:ext cx="3674784" cy="302495"/>
-            </a:xfrm>
-            <a:custGeom>
-              <a:avLst/>
-              <a:gdLst/>
-              <a:ahLst/>
-              <a:cxnLst/>
-              <a:rect r="r" b="b" t="t" l="l"/>
-              <a:pathLst>
-                <a:path h="302495" w="3674784">
-                  <a:moveTo>
-                    <a:pt x="3471584" y="0"/>
-                  </a:moveTo>
-                  <a:cubicBezTo>
-                    <a:pt x="3583809" y="0"/>
-                    <a:pt x="3674784" y="67716"/>
-                    <a:pt x="3674784" y="151247"/>
-                  </a:cubicBezTo>
-                  <a:cubicBezTo>
-                    <a:pt x="3674784" y="234779"/>
-                    <a:pt x="3583809" y="302495"/>
-                    <a:pt x="3471584" y="302495"/>
-                  </a:cubicBezTo>
-                  <a:lnTo>
-                    <a:pt x="203200" y="302495"/>
-                  </a:lnTo>
-                  <a:cubicBezTo>
-                    <a:pt x="90976" y="302495"/>
-                    <a:pt x="0" y="234779"/>
-                    <a:pt x="0" y="151247"/>
-                  </a:cubicBezTo>
-                  <a:cubicBezTo>
-                    <a:pt x="0" y="67716"/>
-                    <a:pt x="90976" y="0"/>
-                    <a:pt x="203200" y="0"/>
-                  </a:cubicBezTo>
-                  <a:close/>
-                </a:path>
-              </a:pathLst>
-            </a:custGeom>
-            <a:solidFill>
-              <a:srgbClr val="DCE3EC"/>
-            </a:solidFill>
-          </p:spPr>
-        </p:sp>
-        <p:sp>
-          <p:nvSpPr>
-            <p:cNvPr name="TextBox 20" id="20"/>
-            <p:cNvSpPr txBox="true"/>
-            <p:nvPr/>
-          </p:nvSpPr>
-          <p:spPr>
-            <a:xfrm>
-              <a:off x="0" y="-47625"/>
-              <a:ext cx="3674784" cy="350120"/>
-            </a:xfrm>
-            <a:prstGeom prst="rect">
-              <a:avLst/>
-            </a:prstGeom>
-          </p:spPr>
-          <p:txBody>
-            <a:bodyPr anchor="ctr" rtlCol="false" tIns="50800" lIns="50800" bIns="50800" rIns="50800"/>
-            <a:lstStyle/>
-            <a:p>
-              <a:pPr algn="l">
-                <a:lnSpc>
-                  <a:spcPts val="2999"/>
-                </a:lnSpc>
-              </a:pPr>
-              <a:r>
-                <a:rPr lang="en-US" sz="2499" b="true">
-                  <a:solidFill>
-                    <a:srgbClr val="23496D"/>
-                  </a:solidFill>
-                  <a:latin typeface="Calibri (MS) Bold"/>
-                  <a:ea typeface="Calibri (MS) Bold"/>
-                  <a:cs typeface="Calibri (MS) Bold"/>
-                  <a:sym typeface="Calibri (MS) Bold"/>
-                </a:rPr>
-                <a:t>   4. The monitor counts cycles with PREADY low, then publishes the finished item on transaction_aport.</a:t>
-              </a:r>
-            </a:p>
-          </p:txBody>
-        </p:sp>
-      </p:grpSp>
-      <p:grpSp>
-        <p:nvGrpSpPr>
-          <p:cNvPr name="Group 21" id="21"/>
-          <p:cNvGrpSpPr/>
-          <p:nvPr/>
-        </p:nvGrpSpPr>
-        <p:grpSpPr>
-          <a:xfrm rot="0">
-            <a:off x="1028700" y="7247183"/>
-            <a:ext cx="14839589" cy="1428750"/>
-            <a:chOff x="0" y="0"/>
-            <a:chExt cx="4552692" cy="438331"/>
-          </a:xfrm>
-        </p:grpSpPr>
-        <p:sp>
-          <p:nvSpPr>
-            <p:cNvPr name="Freeform 22" id="22"/>
-            <p:cNvSpPr/>
-            <p:nvPr/>
-          </p:nvSpPr>
-          <p:spPr>
-            <a:xfrm flipH="false" flipV="false" rot="0">
-              <a:off x="0" y="0"/>
-              <a:ext cx="4552692" cy="438331"/>
-            </a:xfrm>
-            <a:custGeom>
-              <a:avLst/>
-              <a:gdLst/>
-              <a:ahLst/>
-              <a:cxnLst/>
-              <a:rect r="r" b="b" t="t" l="l"/>
-              <a:pathLst>
-                <a:path h="438331" w="4552692">
-                  <a:moveTo>
-                    <a:pt x="4349492" y="0"/>
-                  </a:moveTo>
-                  <a:cubicBezTo>
-                    <a:pt x="4461716" y="0"/>
-                    <a:pt x="4552692" y="98124"/>
-                    <a:pt x="4552692" y="219166"/>
-                  </a:cubicBezTo>
-                  <a:cubicBezTo>
-                    <a:pt x="4552692" y="340208"/>
-                    <a:pt x="4461716" y="438331"/>
-                    <a:pt x="4349492" y="438331"/>
-                  </a:cubicBezTo>
-                  <a:lnTo>
-                    <a:pt x="203200" y="438331"/>
-                  </a:lnTo>
-                  <a:cubicBezTo>
-                    <a:pt x="90976" y="438331"/>
-                    <a:pt x="0" y="340208"/>
-                    <a:pt x="0" y="219166"/>
-                  </a:cubicBezTo>
-                  <a:cubicBezTo>
-                    <a:pt x="0" y="98124"/>
-                    <a:pt x="90976" y="0"/>
-                    <a:pt x="203200" y="0"/>
-                  </a:cubicBezTo>
-                  <a:close/>
-                </a:path>
-              </a:pathLst>
-            </a:custGeom>
-            <a:solidFill>
-              <a:srgbClr val="23496D"/>
-            </a:solidFill>
-          </p:spPr>
-        </p:sp>
-        <p:sp>
-          <p:nvSpPr>
-            <p:cNvPr name="TextBox 23" id="23"/>
-            <p:cNvSpPr txBox="true"/>
-            <p:nvPr/>
-          </p:nvSpPr>
-          <p:spPr>
-            <a:xfrm>
-              <a:off x="0" y="-47625"/>
-              <a:ext cx="4552692" cy="485956"/>
-            </a:xfrm>
-            <a:prstGeom prst="rect">
-              <a:avLst/>
-            </a:prstGeom>
-          </p:spPr>
-          <p:txBody>
-            <a:bodyPr anchor="ctr" rtlCol="false" tIns="50800" lIns="50800" bIns="50800" rIns="50800"/>
-            <a:lstStyle/>
-            <a:p>
-              <a:pPr algn="l">
-                <a:lnSpc>
-                  <a:spcPts val="2999"/>
-                </a:lnSpc>
-              </a:pPr>
-              <a:r>
-                <a:rPr lang="en-US" b="true" sz="2499">
-                  <a:solidFill>
-                    <a:srgbClr val="F7F5F1"/>
-                  </a:solidFill>
-                  <a:latin typeface="Calibri (MS) Bold"/>
-                  <a:ea typeface="Calibri (MS) Bold"/>
-                  <a:cs typeface="Calibri (MS) Bold"/>
-                  <a:sym typeface="Calibri (MS) Bold"/>
-                </a:rPr>
-                <a:t>   5. A clocking block in apb_if times all sampling and driving to the clock, which removes the race between the             </a:t>
-              </a:r>
-              <a:r>
-                <a:rPr lang="en-US" b="true" sz="2499">
-                  <a:solidFill>
-                    <a:srgbClr val="23496D"/>
-                  </a:solidFill>
-                  <a:latin typeface="Calibri (MS) Bold"/>
-                  <a:ea typeface="Calibri (MS) Bold"/>
-                  <a:cs typeface="Calibri (MS) Bold"/>
-                  <a:sym typeface="Calibri (MS) Bold"/>
-                </a:rPr>
-                <a:t>..</a:t>
-              </a:r>
-              <a:r>
-                <a:rPr lang="en-US" b="true" sz="2499">
-                  <a:solidFill>
-                    <a:srgbClr val="F7F5F1"/>
-                  </a:solidFill>
-                  <a:latin typeface="Calibri (MS) Bold"/>
-                  <a:ea typeface="Calibri (MS) Bold"/>
-                  <a:cs typeface="Calibri (MS) Bold"/>
-                  <a:sym typeface="Calibri (MS) Bold"/>
-                </a:rPr>
-                <a:t>     testbench and the DUT.</a:t>
-              </a:r>
-            </a:p>
-          </p:txBody>
-        </p:sp>
-      </p:grpSp>
-    </p:spTree>
-  </p:cSld>
-  <p:clrMapOvr>
-    <a:masterClrMapping/>
-  </p:clrMapOvr>
-</p:sld>
-</file>
-
-<file path=ppt/slides/slide16.xml><?xml version="1.0" encoding="utf-8"?>
-<p:sld xmlns:p="http://schemas.openxmlformats.org/presentationml/2006/main" xmlns:a="http://schemas.openxmlformats.org/drawingml/2006/main" xmlns:r="http://schemas.openxmlformats.org/officeDocument/2006/relationships">
-  <p:cSld>
-    <p:bg>
-      <p:bgPr>
-        <a:solidFill>
-          <a:srgbClr val="F7F5F1"/>
-        </a:solidFill>
-      </p:bgPr>
-    </p:bg>
-    <p:spTree>
-      <p:nvGrpSpPr>
-        <p:cNvPr id="1" name=""/>
-        <p:cNvGrpSpPr/>
-        <p:nvPr/>
-      </p:nvGrpSpPr>
-      <p:grpSpPr>
-        <a:xfrm>
-          <a:off x="0" y="0"/>
-          <a:ext cx="0" cy="0"/>
-          <a:chOff x="0" y="0"/>
-          <a:chExt cx="0" cy="0"/>
-        </a:xfrm>
-      </p:grpSpPr>
-      <p:grpSp>
-        <p:nvGrpSpPr>
-          <p:cNvPr name="Group 2" id="2"/>
-          <p:cNvGrpSpPr/>
-          <p:nvPr/>
-        </p:nvGrpSpPr>
-        <p:grpSpPr>
-          <a:xfrm rot="0">
-            <a:off x="685800" y="9710928"/>
-            <a:ext cx="10972800" cy="411480"/>
-            <a:chOff x="0" y="0"/>
-            <a:chExt cx="14630400" cy="548640"/>
-          </a:xfrm>
-        </p:grpSpPr>
-        <p:sp>
-          <p:nvSpPr>
-            <p:cNvPr name="Freeform 3" id="3"/>
-            <p:cNvSpPr/>
-            <p:nvPr/>
-          </p:nvSpPr>
-          <p:spPr>
-            <a:xfrm flipH="false" flipV="false" rot="0">
-              <a:off x="0" y="0"/>
-              <a:ext cx="14630400" cy="548640"/>
-            </a:xfrm>
-            <a:custGeom>
-              <a:avLst/>
-              <a:gdLst/>
-              <a:ahLst/>
-              <a:cxnLst/>
-              <a:rect r="r" b="b" t="t" l="l"/>
-              <a:pathLst>
-                <a:path h="548640" w="14630400">
-                  <a:moveTo>
-                    <a:pt x="0" y="0"/>
-                  </a:moveTo>
-                  <a:lnTo>
-                    <a:pt x="14630400" y="0"/>
-                  </a:lnTo>
-                  <a:lnTo>
-                    <a:pt x="14630400" y="548640"/>
-                  </a:lnTo>
-                  <a:lnTo>
-                    <a:pt x="0" y="548640"/>
-                  </a:lnTo>
-                  <a:close/>
-                </a:path>
-              </a:pathLst>
-            </a:custGeom>
-            <a:blipFill>
-              <a:blip r:embed="rId2">
-                <a:alphaModFix amt="0"/>
-              </a:blip>
-              <a:stretch>
-                <a:fillRect l="0" t="-469601" r="0" b="-469601"/>
-              </a:stretch>
-            </a:blipFill>
-          </p:spPr>
-        </p:sp>
-        <p:sp>
-          <p:nvSpPr>
-            <p:cNvPr name="TextBox 4" id="4"/>
-            <p:cNvSpPr txBox="true"/>
-            <p:nvPr/>
-          </p:nvSpPr>
-          <p:spPr>
-            <a:xfrm>
-              <a:off x="0" y="-28575"/>
-              <a:ext cx="14630400" cy="577215"/>
-            </a:xfrm>
-            <a:prstGeom prst="rect">
-              <a:avLst/>
-            </a:prstGeom>
-          </p:spPr>
-          <p:txBody>
-            <a:bodyPr anchor="ctr" rtlCol="false" tIns="0" lIns="0" bIns="0" rIns="0"/>
-            <a:lstStyle/>
-            <a:p>
-              <a:pPr algn="l">
-                <a:lnSpc>
-                  <a:spcPts val="1620"/>
-                </a:lnSpc>
-              </a:pPr>
-              <a:r>
-                <a:rPr lang="en-US" sz="1350">
-                  <a:solidFill>
-                    <a:srgbClr val="5B6B82"/>
-                  </a:solidFill>
-                  <a:latin typeface="Calibri (MS)"/>
-                  <a:ea typeface="Calibri (MS)"/>
-                  <a:cs typeface="Calibri (MS)"/>
-                  <a:sym typeface="Calibri (MS)"/>
-                </a:rPr>
-                <a:t>AHB to APB Bridge UVM Project</a:t>
-              </a:r>
-            </a:p>
-          </p:txBody>
-        </p:sp>
-      </p:grpSp>
-      <p:grpSp>
-        <p:nvGrpSpPr>
-          <p:cNvPr name="Group 5" id="5"/>
-          <p:cNvGrpSpPr/>
-          <p:nvPr/>
-        </p:nvGrpSpPr>
-        <p:grpSpPr>
-          <a:xfrm rot="0">
-            <a:off x="16911828" y="9710928"/>
-            <a:ext cx="685800" cy="411480"/>
-            <a:chOff x="0" y="0"/>
-            <a:chExt cx="914400" cy="548640"/>
-          </a:xfrm>
-        </p:grpSpPr>
-        <p:sp>
-          <p:nvSpPr>
-            <p:cNvPr name="Freeform 6" id="6"/>
-            <p:cNvSpPr/>
-            <p:nvPr/>
-          </p:nvSpPr>
-          <p:spPr>
-            <a:xfrm flipH="false" flipV="false" rot="0">
-              <a:off x="0" y="0"/>
-              <a:ext cx="914400" cy="548640"/>
-            </a:xfrm>
-            <a:custGeom>
-              <a:avLst/>
-              <a:gdLst/>
-              <a:ahLst/>
-              <a:cxnLst/>
-              <a:rect r="r" b="b" t="t" l="l"/>
-              <a:pathLst>
-                <a:path h="548640" w="914400">
-                  <a:moveTo>
-                    <a:pt x="0" y="0"/>
-                  </a:moveTo>
-                  <a:lnTo>
-                    <a:pt x="914400" y="0"/>
-                  </a:lnTo>
-                  <a:lnTo>
-                    <a:pt x="914400" y="548640"/>
-                  </a:lnTo>
-                  <a:lnTo>
-                    <a:pt x="0" y="548640"/>
-                  </a:lnTo>
-                  <a:close/>
-                </a:path>
-              </a:pathLst>
-            </a:custGeom>
-            <a:blipFill>
-              <a:blip r:embed="rId2">
-                <a:alphaModFix amt="0"/>
-              </a:blip>
-              <a:stretch>
-                <a:fillRect l="-26982" t="0" r="-26982" b="0"/>
-              </a:stretch>
-            </a:blipFill>
-          </p:spPr>
-        </p:sp>
-        <p:sp>
-          <p:nvSpPr>
-            <p:cNvPr name="TextBox 7" id="7"/>
-            <p:cNvSpPr txBox="true"/>
-            <p:nvPr/>
-          </p:nvSpPr>
-          <p:spPr>
-            <a:xfrm>
-              <a:off x="0" y="-28575"/>
-              <a:ext cx="914400" cy="577215"/>
-            </a:xfrm>
-            <a:prstGeom prst="rect">
-              <a:avLst/>
-            </a:prstGeom>
-          </p:spPr>
-          <p:txBody>
-            <a:bodyPr anchor="ctr" rtlCol="false" tIns="0" lIns="0" bIns="0" rIns="0"/>
-            <a:lstStyle/>
-            <a:p>
-              <a:pPr algn="r">
-                <a:lnSpc>
-                  <a:spcPts val="1620"/>
-                </a:lnSpc>
-              </a:pPr>
-              <a:r>
-                <a:rPr lang="en-US" sz="1350">
-                  <a:solidFill>
-                    <a:srgbClr val="5B6B82"/>
-                  </a:solidFill>
-                  <a:latin typeface="Calibri (MS)"/>
-                  <a:ea typeface="Calibri (MS)"/>
-                  <a:cs typeface="Calibri (MS)"/>
-                  <a:sym typeface="Calibri (MS)"/>
-                </a:rPr>
-                <a:t>16</a:t>
-              </a:r>
-            </a:p>
-          </p:txBody>
-        </p:sp>
-      </p:grpSp>
-      <p:sp>
-        <p:nvSpPr>
           <p:cNvPr name="Freeform 8" id="8"/>
           <p:cNvSpPr/>
           <p:nvPr/>
         </p:nvSpPr>
         <p:spPr>
           <a:xfrm flipH="false" flipV="false" rot="0">
-            <a:off x="15714277" y="0"/>
+            <a:off x="16446298" y="-514507"/>
             <a:ext cx="4407982" cy="1407455"/>
           </a:xfrm>
           <a:custGeom>
@@ -10434,8 +9446,8 @@
         </p:nvSpPr>
         <p:spPr>
           <a:xfrm flipH="false" flipV="false" rot="0">
-            <a:off x="2149726" y="1859660"/>
-            <a:ext cx="14254692" cy="7399063"/>
+            <a:off x="1841702" y="1145826"/>
+            <a:ext cx="14604596" cy="8565102"/>
           </a:xfrm>
           <a:custGeom>
             <a:avLst/>
@@ -10444,18 +9456,18 @@
             <a:cxnLst/>
             <a:rect r="r" b="b" t="t" l="l"/>
             <a:pathLst>
-              <a:path h="7399063" w="14254692">
+              <a:path h="8565102" w="14604596">
                 <a:moveTo>
                   <a:pt x="0" y="0"/>
                 </a:moveTo>
                 <a:lnTo>
-                  <a:pt x="14254692" y="0"/>
+                  <a:pt x="14604596" y="0"/>
                 </a:lnTo>
                 <a:lnTo>
-                  <a:pt x="14254692" y="7399063"/>
+                  <a:pt x="14604596" y="8565102"/>
                 </a:lnTo>
                 <a:lnTo>
-                  <a:pt x="0" y="7399063"/>
+                  <a:pt x="0" y="8565102"/>
                 </a:lnTo>
                 <a:lnTo>
                   <a:pt x="0" y="0"/>
@@ -10524,7 +9536,7 @@
 </p:sld>
 </file>
 
-<file path=ppt/slides/slide17.xml><?xml version="1.0" encoding="utf-8"?>
+<file path=ppt/slides/slide16.xml><?xml version="1.0" encoding="utf-8"?>
 <p:sld xmlns:p="http://schemas.openxmlformats.org/presentationml/2006/main" xmlns:a="http://schemas.openxmlformats.org/drawingml/2006/main" xmlns:r="http://schemas.openxmlformats.org/officeDocument/2006/relationships">
   <p:cSld>
     <p:bg>
@@ -11276,7 +10288,7 @@
                   <a:cs typeface="Calibri (MS)"/>
                   <a:sym typeface="Calibri (MS)"/>
                 </a:rPr>
-                <a:t>17</a:t>
+                <a:t>16</a:t>
               </a:r>
             </a:p>
           </p:txBody>
@@ -11290,7 +10302,7 @@
 </p:sld>
 </file>
 
-<file path=ppt/slides/slide18.xml><?xml version="1.0" encoding="utf-8"?>
+<file path=ppt/slides/slide17.xml><?xml version="1.0" encoding="utf-8"?>
 <p:sld xmlns:p="http://schemas.openxmlformats.org/presentationml/2006/main" xmlns:a="http://schemas.openxmlformats.org/drawingml/2006/main" xmlns:r="http://schemas.openxmlformats.org/officeDocument/2006/relationships">
   <p:cSld>
     <p:bg>
@@ -11324,7 +10336,7 @@
         </p:nvGraphicFramePr>
         <p:xfrm>
           <a:off x="3512538" y="3034387"/>
-          <a:ext cx="11262925" cy="3542503"/>
+          <a:ext cx="11262925" cy="2660052"/>
         </p:xfrm>
         <a:graphic>
           <a:graphicData uri="http://schemas.openxmlformats.org/drawingml/2006/table">
@@ -11334,7 +10346,7 @@
                 <a:gridCol w="5631462"/>
                 <a:gridCol w="5631462"/>
               </a:tblGrid>
-              <a:tr h="885626">
+              <a:tr h="886684">
                 <a:tc>
                   <a:txBody>
                     <a:bodyPr anchor="t" rtlCol="false"/>
@@ -11472,139 +10484,7 @@
                   </a:tcPr>
                 </a:tc>
               </a:tr>
-              <a:tr h="885626">
-                <a:tc>
-                  <a:txBody>
-                    <a:bodyPr anchor="t" rtlCol="false"/>
-                    <a:lstStyle/>
-                    <a:p>
-                      <a:pPr algn="l">
-                        <a:lnSpc>
-                          <a:spcPts val="3569"/>
-                        </a:lnSpc>
-                        <a:defRPr/>
-                      </a:pPr>
-                      <a:r>
-                        <a:rPr lang="en-US" sz="2550">
-                          <a:solidFill>
-                            <a:srgbClr val="101828"/>
-                          </a:solidFill>
-                          <a:latin typeface="Helvetica World"/>
-                          <a:ea typeface="Helvetica World"/>
-                          <a:cs typeface="Helvetica World"/>
-                          <a:sym typeface="Helvetica World"/>
-                        </a:rPr>
-                        <a:t>HREADYOUT</a:t>
-                      </a:r>
-                      <a:endParaRPr lang="en-US" sz="1100"/>
-                    </a:p>
-                  </a:txBody>
-                  <a:tcPr marL="75565" marR="75565" marT="75565" marB="75565" anchor="t">
-                    <a:lnL cmpd="sng" algn="ctr" cap="flat" w="12700">
-                      <a:solidFill>
-                        <a:srgbClr val="2D5986"/>
-                      </a:solidFill>
-                      <a:prstDash val="solid"/>
-                      <a:round/>
-                      <a:headEnd type="none" w="med" len="med"/>
-                      <a:tailEnd type="none" w="med" len="med"/>
-                    </a:lnL>
-                    <a:lnR cmpd="sng" algn="ctr" cap="flat" w="12700">
-                      <a:solidFill>
-                        <a:srgbClr val="C4C3BE"/>
-                      </a:solidFill>
-                      <a:prstDash val="solid"/>
-                      <a:round/>
-                      <a:headEnd type="none" w="med" len="med"/>
-                      <a:tailEnd type="none" w="med" len="med"/>
-                    </a:lnR>
-                    <a:lnT cmpd="sng" algn="ctr" cap="flat" w="12700">
-                      <a:solidFill>
-                        <a:srgbClr val="B6B5B0"/>
-                      </a:solidFill>
-                      <a:prstDash val="solid"/>
-                      <a:round/>
-                      <a:headEnd type="none" w="med" len="med"/>
-                      <a:tailEnd type="none" w="med" len="med"/>
-                    </a:lnT>
-                    <a:lnB cmpd="sng" algn="ctr" cap="flat" w="12700">
-                      <a:solidFill>
-                        <a:srgbClr val="C4C3BE"/>
-                      </a:solidFill>
-                      <a:prstDash val="solid"/>
-                      <a:round/>
-                      <a:headEnd type="none" w="med" len="med"/>
-                      <a:tailEnd type="none" w="med" len="med"/>
-                    </a:lnB>
-                  </a:tcPr>
-                </a:tc>
-                <a:tc>
-                  <a:txBody>
-                    <a:bodyPr anchor="t" rtlCol="false"/>
-                    <a:lstStyle/>
-                    <a:p>
-                      <a:pPr algn="l">
-                        <a:lnSpc>
-                          <a:spcPts val="3569"/>
-                        </a:lnSpc>
-                        <a:defRPr/>
-                      </a:pPr>
-                      <a:r>
-                        <a:rPr lang="en-US" sz="2550">
-                          <a:solidFill>
-                            <a:srgbClr val="101828"/>
-                          </a:solidFill>
-                          <a:latin typeface="Helvetica World"/>
-                          <a:ea typeface="Helvetica World"/>
-                          <a:cs typeface="Helvetica World"/>
-                          <a:sym typeface="Helvetica World"/>
-                        </a:rPr>
-                        <a:t>PREADY</a:t>
-                      </a:r>
-                      <a:endParaRPr lang="en-US" sz="1100"/>
-                    </a:p>
-                  </a:txBody>
-                  <a:tcPr marL="75565" marR="75565" marT="75565" marB="75565" anchor="t">
-                    <a:lnL cmpd="sng" algn="ctr" cap="flat" w="12700">
-                      <a:solidFill>
-                        <a:srgbClr val="C4C3BE"/>
-                      </a:solidFill>
-                      <a:prstDash val="solid"/>
-                      <a:round/>
-                      <a:headEnd type="none" w="med" len="med"/>
-                      <a:tailEnd type="none" w="med" len="med"/>
-                    </a:lnL>
-                    <a:lnR cmpd="sng" algn="ctr" cap="flat" w="12700">
-                      <a:solidFill>
-                        <a:srgbClr val="2D5986"/>
-                      </a:solidFill>
-                      <a:prstDash val="solid"/>
-                      <a:round/>
-                      <a:headEnd type="none" w="med" len="med"/>
-                      <a:tailEnd type="none" w="med" len="med"/>
-                    </a:lnR>
-                    <a:lnT cmpd="sng" algn="ctr" cap="flat" w="12700">
-                      <a:solidFill>
-                        <a:srgbClr val="B6B5B0"/>
-                      </a:solidFill>
-                      <a:prstDash val="solid"/>
-                      <a:round/>
-                      <a:headEnd type="none" w="med" len="med"/>
-                      <a:tailEnd type="none" w="med" len="med"/>
-                    </a:lnT>
-                    <a:lnB cmpd="sng" algn="ctr" cap="flat" w="12700">
-                      <a:solidFill>
-                        <a:srgbClr val="C4C3BE"/>
-                      </a:solidFill>
-                      <a:prstDash val="solid"/>
-                      <a:round/>
-                      <a:headEnd type="none" w="med" len="med"/>
-                      <a:tailEnd type="none" w="med" len="med"/>
-                    </a:lnB>
-                  </a:tcPr>
-                </a:tc>
-              </a:tr>
-              <a:tr h="885626">
+              <a:tr h="886684">
                 <a:tc>
                   <a:txBody>
                     <a:bodyPr anchor="t" rtlCol="false"/>
@@ -11736,7 +10616,7 @@
                   </a:tcPr>
                 </a:tc>
               </a:tr>
-              <a:tr h="885626">
+              <a:tr h="886684">
                 <a:tc>
                   <a:txBody>
                     <a:bodyPr anchor="t" rtlCol="false"/>
@@ -12151,7 +11031,7 @@
                   <a:cs typeface="Calibri (MS)"/>
                   <a:sym typeface="Calibri (MS)"/>
                 </a:rPr>
-                <a:t>18</a:t>
+                <a:t>17</a:t>
               </a:r>
             </a:p>
           </p:txBody>
@@ -12165,7 +11045,7 @@
 </p:sld>
 </file>
 
-<file path=ppt/slides/slide19.xml><?xml version="1.0" encoding="utf-8"?>
+<file path=ppt/slides/slide18.xml><?xml version="1.0" encoding="utf-8"?>
 <p:sld xmlns:p="http://schemas.openxmlformats.org/presentationml/2006/main" xmlns:a="http://schemas.openxmlformats.org/drawingml/2006/main" xmlns:r="http://schemas.openxmlformats.org/officeDocument/2006/relationships">
   <p:cSld>
     <p:bg>
@@ -13290,6 +12170,850 @@
                   <a:cs typeface="Calibri (MS)"/>
                   <a:sym typeface="Calibri (MS)"/>
                 </a:rPr>
+                <a:t>18</a:t>
+              </a:r>
+            </a:p>
+          </p:txBody>
+        </p:sp>
+      </p:grpSp>
+    </p:spTree>
+  </p:cSld>
+  <p:clrMapOvr>
+    <a:masterClrMapping/>
+  </p:clrMapOvr>
+</p:sld>
+</file>
+
+<file path=ppt/slides/slide19.xml><?xml version="1.0" encoding="utf-8"?>
+<p:sld xmlns:p="http://schemas.openxmlformats.org/presentationml/2006/main" xmlns:a="http://schemas.openxmlformats.org/drawingml/2006/main" xmlns:r="http://schemas.openxmlformats.org/officeDocument/2006/relationships">
+  <p:cSld>
+    <p:bg>
+      <p:bgPr>
+        <a:solidFill>
+          <a:srgbClr val="F6F4EE"/>
+        </a:solidFill>
+      </p:bgPr>
+    </p:bg>
+    <p:spTree>
+      <p:nvGrpSpPr>
+        <p:cNvPr id="1" name=""/>
+        <p:cNvGrpSpPr/>
+        <p:nvPr/>
+      </p:nvGrpSpPr>
+      <p:grpSpPr>
+        <a:xfrm>
+          <a:off x="0" y="0"/>
+          <a:ext cx="0" cy="0"/>
+          <a:chOff x="0" y="0"/>
+          <a:chExt cx="0" cy="0"/>
+        </a:xfrm>
+      </p:grpSpPr>
+      <p:grpSp>
+        <p:nvGrpSpPr>
+          <p:cNvPr name="Group 2" id="2"/>
+          <p:cNvGrpSpPr/>
+          <p:nvPr/>
+        </p:nvGrpSpPr>
+        <p:grpSpPr>
+          <a:xfrm rot="0">
+            <a:off x="395675" y="2998470"/>
+            <a:ext cx="5903445" cy="2935534"/>
+            <a:chOff x="0" y="0"/>
+            <a:chExt cx="6773228" cy="3368040"/>
+          </a:xfrm>
+        </p:grpSpPr>
+        <p:sp>
+          <p:nvSpPr>
+            <p:cNvPr name="Freeform 3" id="3"/>
+            <p:cNvSpPr/>
+            <p:nvPr/>
+          </p:nvSpPr>
+          <p:spPr>
+            <a:xfrm flipH="false" flipV="false" rot="0">
+              <a:off x="0" y="0"/>
+              <a:ext cx="6773291" cy="3368040"/>
+            </a:xfrm>
+            <a:custGeom>
+              <a:avLst/>
+              <a:gdLst/>
+              <a:ahLst/>
+              <a:cxnLst/>
+              <a:rect r="r" b="b" t="t" l="l"/>
+              <a:pathLst>
+                <a:path h="3368040" w="6773291">
+                  <a:moveTo>
+                    <a:pt x="0" y="203200"/>
+                  </a:moveTo>
+                  <a:cubicBezTo>
+                    <a:pt x="0" y="90932"/>
+                    <a:pt x="90932" y="0"/>
+                    <a:pt x="203200" y="0"/>
+                  </a:cubicBezTo>
+                  <a:lnTo>
+                    <a:pt x="6570091" y="0"/>
+                  </a:lnTo>
+                  <a:cubicBezTo>
+                    <a:pt x="6682360" y="0"/>
+                    <a:pt x="6773291" y="90932"/>
+                    <a:pt x="6773291" y="203200"/>
+                  </a:cubicBezTo>
+                  <a:lnTo>
+                    <a:pt x="6773291" y="3164840"/>
+                  </a:lnTo>
+                  <a:cubicBezTo>
+                    <a:pt x="6773291" y="3277108"/>
+                    <a:pt x="6682360" y="3368040"/>
+                    <a:pt x="6570091" y="3368040"/>
+                  </a:cubicBezTo>
+                  <a:lnTo>
+                    <a:pt x="203200" y="3368040"/>
+                  </a:lnTo>
+                  <a:cubicBezTo>
+                    <a:pt x="90932" y="3368040"/>
+                    <a:pt x="0" y="3277108"/>
+                    <a:pt x="0" y="3164840"/>
+                  </a:cubicBezTo>
+                  <a:close/>
+                </a:path>
+              </a:pathLst>
+            </a:custGeom>
+            <a:solidFill>
+              <a:srgbClr val="2D5986"/>
+            </a:solidFill>
+          </p:spPr>
+        </p:sp>
+      </p:grpSp>
+      <p:sp>
+        <p:nvSpPr>
+          <p:cNvPr name="TextBox 4" id="4"/>
+          <p:cNvSpPr txBox="true"/>
+          <p:nvPr/>
+        </p:nvSpPr>
+        <p:spPr>
+          <a:xfrm rot="0">
+            <a:off x="763171" y="3148410"/>
+            <a:ext cx="5168455" cy="550545"/>
+          </a:xfrm>
+          <a:prstGeom prst="rect">
+            <a:avLst/>
+          </a:prstGeom>
+        </p:spPr>
+        <p:txBody>
+          <a:bodyPr anchor="t" rtlCol="false" tIns="0" lIns="0" bIns="0" rIns="0">
+            <a:spAutoFit/>
+          </a:bodyPr>
+          <a:lstStyle/>
+          <a:p>
+            <a:pPr algn="l">
+              <a:lnSpc>
+                <a:spcPts val="4005"/>
+              </a:lnSpc>
+            </a:pPr>
+            <a:r>
+              <a:rPr lang="en-US" sz="3337" b="true">
+                <a:solidFill>
+                  <a:srgbClr val="F6F4EE"/>
+                </a:solidFill>
+                <a:latin typeface="Helvetica World Bold"/>
+                <a:ea typeface="Helvetica World Bold"/>
+                <a:cs typeface="Helvetica World Bold"/>
+                <a:sym typeface="Helvetica World Bold"/>
+              </a:rPr>
+              <a:t>Collect</a:t>
+            </a:r>
+          </a:p>
+        </p:txBody>
+      </p:sp>
+      <p:sp>
+        <p:nvSpPr>
+          <p:cNvPr name="TextBox 5" id="5"/>
+          <p:cNvSpPr txBox="true"/>
+          <p:nvPr/>
+        </p:nvSpPr>
+        <p:spPr>
+          <a:xfrm rot="0">
+            <a:off x="838441" y="4039378"/>
+            <a:ext cx="5168455" cy="1031234"/>
+          </a:xfrm>
+          <a:prstGeom prst="rect">
+            <a:avLst/>
+          </a:prstGeom>
+        </p:spPr>
+        <p:txBody>
+          <a:bodyPr anchor="t" rtlCol="false" tIns="0" lIns="0" bIns="0" rIns="0">
+            <a:spAutoFit/>
+          </a:bodyPr>
+          <a:lstStyle/>
+          <a:p>
+            <a:pPr algn="l">
+              <a:lnSpc>
+                <a:spcPts val="3660"/>
+              </a:lnSpc>
+            </a:pPr>
+            <a:r>
+              <a:rPr lang="en-US" sz="2614">
+                <a:solidFill>
+                  <a:srgbClr val="F6F4EE"/>
+                </a:solidFill>
+                <a:latin typeface="Helvetica World"/>
+                <a:ea typeface="Helvetica World"/>
+                <a:cs typeface="Helvetica World"/>
+                <a:sym typeface="Helvetica World"/>
+              </a:rPr>
+              <a:t>Four analysis FIFOs: expected and actual, for AHB and for APB</a:t>
+            </a:r>
+          </a:p>
+        </p:txBody>
+      </p:sp>
+      <p:grpSp>
+        <p:nvGrpSpPr>
+          <p:cNvPr name="Group 6" id="6"/>
+          <p:cNvGrpSpPr/>
+          <p:nvPr/>
+        </p:nvGrpSpPr>
+        <p:grpSpPr>
+          <a:xfrm rot="0">
+            <a:off x="6457813" y="2998470"/>
+            <a:ext cx="5669537" cy="2819158"/>
+            <a:chOff x="0" y="0"/>
+            <a:chExt cx="6773380" cy="3368040"/>
+          </a:xfrm>
+        </p:grpSpPr>
+        <p:sp>
+          <p:nvSpPr>
+            <p:cNvPr name="Freeform 7" id="7"/>
+            <p:cNvSpPr/>
+            <p:nvPr/>
+          </p:nvSpPr>
+          <p:spPr>
+            <a:xfrm flipH="false" flipV="false" rot="0">
+              <a:off x="0" y="0"/>
+              <a:ext cx="6773418" cy="3368040"/>
+            </a:xfrm>
+            <a:custGeom>
+              <a:avLst/>
+              <a:gdLst/>
+              <a:ahLst/>
+              <a:cxnLst/>
+              <a:rect r="r" b="b" t="t" l="l"/>
+              <a:pathLst>
+                <a:path h="3368040" w="6773418">
+                  <a:moveTo>
+                    <a:pt x="0" y="203200"/>
+                  </a:moveTo>
+                  <a:cubicBezTo>
+                    <a:pt x="0" y="90932"/>
+                    <a:pt x="90932" y="0"/>
+                    <a:pt x="203200" y="0"/>
+                  </a:cubicBezTo>
+                  <a:lnTo>
+                    <a:pt x="6570218" y="0"/>
+                  </a:lnTo>
+                  <a:cubicBezTo>
+                    <a:pt x="6682487" y="0"/>
+                    <a:pt x="6773418" y="90932"/>
+                    <a:pt x="6773418" y="203200"/>
+                  </a:cubicBezTo>
+                  <a:lnTo>
+                    <a:pt x="6773418" y="3164840"/>
+                  </a:lnTo>
+                  <a:cubicBezTo>
+                    <a:pt x="6773418" y="3277108"/>
+                    <a:pt x="6682487" y="3368040"/>
+                    <a:pt x="6570218" y="3368040"/>
+                  </a:cubicBezTo>
+                  <a:lnTo>
+                    <a:pt x="203200" y="3368040"/>
+                  </a:lnTo>
+                  <a:cubicBezTo>
+                    <a:pt x="90932" y="3368040"/>
+                    <a:pt x="0" y="3277108"/>
+                    <a:pt x="0" y="3164840"/>
+                  </a:cubicBezTo>
+                  <a:close/>
+                </a:path>
+              </a:pathLst>
+            </a:custGeom>
+            <a:solidFill>
+              <a:srgbClr val="2D5986"/>
+            </a:solidFill>
+          </p:spPr>
+        </p:sp>
+      </p:grpSp>
+      <p:sp>
+        <p:nvSpPr>
+          <p:cNvPr name="TextBox 8" id="8"/>
+          <p:cNvSpPr txBox="true"/>
+          <p:nvPr/>
+        </p:nvSpPr>
+        <p:spPr>
+          <a:xfrm rot="0">
+            <a:off x="6883025" y="3172807"/>
+            <a:ext cx="4963695" cy="501751"/>
+          </a:xfrm>
+          <a:prstGeom prst="rect">
+            <a:avLst/>
+          </a:prstGeom>
+        </p:spPr>
+        <p:txBody>
+          <a:bodyPr anchor="t" rtlCol="false" tIns="0" lIns="0" bIns="0" rIns="0">
+            <a:spAutoFit/>
+          </a:bodyPr>
+          <a:lstStyle/>
+          <a:p>
+            <a:pPr algn="l">
+              <a:lnSpc>
+                <a:spcPts val="3615"/>
+              </a:lnSpc>
+            </a:pPr>
+            <a:r>
+              <a:rPr lang="en-US" sz="3013" b="true">
+                <a:solidFill>
+                  <a:srgbClr val="F6F4EE"/>
+                </a:solidFill>
+                <a:latin typeface="Helvetica World Bold"/>
+                <a:ea typeface="Helvetica World Bold"/>
+                <a:cs typeface="Helvetica World Bold"/>
+                <a:sym typeface="Helvetica World Bold"/>
+              </a:rPr>
+              <a:t>Compare</a:t>
+            </a:r>
+          </a:p>
+        </p:txBody>
+      </p:sp>
+      <p:sp>
+        <p:nvSpPr>
+          <p:cNvPr name="TextBox 9" id="9"/>
+          <p:cNvSpPr txBox="true"/>
+          <p:nvPr/>
+        </p:nvSpPr>
+        <p:spPr>
+          <a:xfrm rot="0">
+            <a:off x="6883025" y="4005372"/>
+            <a:ext cx="4963695" cy="1429565"/>
+          </a:xfrm>
+          <a:prstGeom prst="rect">
+            <a:avLst/>
+          </a:prstGeom>
+        </p:spPr>
+        <p:txBody>
+          <a:bodyPr anchor="t" rtlCol="false" tIns="0" lIns="0" bIns="0" rIns="0">
+            <a:spAutoFit/>
+          </a:bodyPr>
+          <a:lstStyle/>
+          <a:p>
+            <a:pPr algn="l">
+              <a:lnSpc>
+                <a:spcPts val="3515"/>
+              </a:lnSpc>
+            </a:pPr>
+            <a:r>
+              <a:rPr lang="en-US" sz="2511">
+                <a:solidFill>
+                  <a:srgbClr val="F6F4EE"/>
+                </a:solidFill>
+                <a:latin typeface="Helvetica World"/>
+                <a:ea typeface="Helvetica World"/>
+                <a:cs typeface="Helvetica World"/>
+                <a:sym typeface="Helvetica World"/>
+              </a:rPr>
+              <a:t>run_phase takes one item from each FIFO and calls compare on each pair</a:t>
+            </a:r>
+          </a:p>
+        </p:txBody>
+      </p:sp>
+      <p:grpSp>
+        <p:nvGrpSpPr>
+          <p:cNvPr name="Group 10" id="10"/>
+          <p:cNvGrpSpPr/>
+          <p:nvPr/>
+        </p:nvGrpSpPr>
+        <p:grpSpPr>
+          <a:xfrm rot="0">
+            <a:off x="12289275" y="2998470"/>
+            <a:ext cx="5669537" cy="2819158"/>
+            <a:chOff x="0" y="0"/>
+            <a:chExt cx="6773380" cy="3368040"/>
+          </a:xfrm>
+        </p:grpSpPr>
+        <p:sp>
+          <p:nvSpPr>
+            <p:cNvPr name="Freeform 11" id="11"/>
+            <p:cNvSpPr/>
+            <p:nvPr/>
+          </p:nvSpPr>
+          <p:spPr>
+            <a:xfrm flipH="false" flipV="false" rot="0">
+              <a:off x="0" y="0"/>
+              <a:ext cx="6773418" cy="3368040"/>
+            </a:xfrm>
+            <a:custGeom>
+              <a:avLst/>
+              <a:gdLst/>
+              <a:ahLst/>
+              <a:cxnLst/>
+              <a:rect r="r" b="b" t="t" l="l"/>
+              <a:pathLst>
+                <a:path h="3368040" w="6773418">
+                  <a:moveTo>
+                    <a:pt x="0" y="203200"/>
+                  </a:moveTo>
+                  <a:cubicBezTo>
+                    <a:pt x="0" y="90932"/>
+                    <a:pt x="90932" y="0"/>
+                    <a:pt x="203200" y="0"/>
+                  </a:cubicBezTo>
+                  <a:lnTo>
+                    <a:pt x="6570218" y="0"/>
+                  </a:lnTo>
+                  <a:cubicBezTo>
+                    <a:pt x="6682487" y="0"/>
+                    <a:pt x="6773418" y="90932"/>
+                    <a:pt x="6773418" y="203200"/>
+                  </a:cubicBezTo>
+                  <a:lnTo>
+                    <a:pt x="6773418" y="3164840"/>
+                  </a:lnTo>
+                  <a:cubicBezTo>
+                    <a:pt x="6773418" y="3277108"/>
+                    <a:pt x="6682487" y="3368040"/>
+                    <a:pt x="6570218" y="3368040"/>
+                  </a:cubicBezTo>
+                  <a:lnTo>
+                    <a:pt x="203200" y="3368040"/>
+                  </a:lnTo>
+                  <a:cubicBezTo>
+                    <a:pt x="90932" y="3368040"/>
+                    <a:pt x="0" y="3277108"/>
+                    <a:pt x="0" y="3164840"/>
+                  </a:cubicBezTo>
+                  <a:close/>
+                </a:path>
+              </a:pathLst>
+            </a:custGeom>
+            <a:solidFill>
+              <a:srgbClr val="2D5986"/>
+            </a:solidFill>
+          </p:spPr>
+        </p:sp>
+      </p:grpSp>
+      <p:sp>
+        <p:nvSpPr>
+          <p:cNvPr name="TextBox 12" id="12"/>
+          <p:cNvSpPr txBox="true"/>
+          <p:nvPr/>
+        </p:nvSpPr>
+        <p:spPr>
+          <a:xfrm rot="0">
+            <a:off x="12642196" y="3172807"/>
+            <a:ext cx="4963695" cy="501751"/>
+          </a:xfrm>
+          <a:prstGeom prst="rect">
+            <a:avLst/>
+          </a:prstGeom>
+        </p:spPr>
+        <p:txBody>
+          <a:bodyPr anchor="t" rtlCol="false" tIns="0" lIns="0" bIns="0" rIns="0">
+            <a:spAutoFit/>
+          </a:bodyPr>
+          <a:lstStyle/>
+          <a:p>
+            <a:pPr algn="l">
+              <a:lnSpc>
+                <a:spcPts val="3615"/>
+              </a:lnSpc>
+            </a:pPr>
+            <a:r>
+              <a:rPr lang="en-US" sz="3013" b="true">
+                <a:solidFill>
+                  <a:srgbClr val="F6F4EE"/>
+                </a:solidFill>
+                <a:latin typeface="Helvetica World Bold"/>
+                <a:ea typeface="Helvetica World Bold"/>
+                <a:cs typeface="Helvetica World Bold"/>
+                <a:sym typeface="Helvetica World Bold"/>
+              </a:rPr>
+              <a:t>Report</a:t>
+            </a:r>
+          </a:p>
+        </p:txBody>
+      </p:sp>
+      <p:sp>
+        <p:nvSpPr>
+          <p:cNvPr name="TextBox 13" id="13"/>
+          <p:cNvSpPr txBox="true"/>
+          <p:nvPr/>
+        </p:nvSpPr>
+        <p:spPr>
+          <a:xfrm rot="0">
+            <a:off x="12714487" y="4005372"/>
+            <a:ext cx="4963695" cy="1429565"/>
+          </a:xfrm>
+          <a:prstGeom prst="rect">
+            <a:avLst/>
+          </a:prstGeom>
+        </p:spPr>
+        <p:txBody>
+          <a:bodyPr anchor="t" rtlCol="false" tIns="0" lIns="0" bIns="0" rIns="0">
+            <a:spAutoFit/>
+          </a:bodyPr>
+          <a:lstStyle/>
+          <a:p>
+            <a:pPr algn="l">
+              <a:lnSpc>
+                <a:spcPts val="3515"/>
+              </a:lnSpc>
+            </a:pPr>
+            <a:r>
+              <a:rPr lang="en-US" sz="2511">
+                <a:solidFill>
+                  <a:srgbClr val="F6F4EE"/>
+                </a:solidFill>
+                <a:latin typeface="Helvetica World"/>
+                <a:ea typeface="Helvetica World"/>
+                <a:cs typeface="Helvetica World"/>
+                <a:sym typeface="Helvetica World"/>
+              </a:rPr>
+              <a:t>Pass and fail counts with pass rate per bus, then an overall verdict</a:t>
+            </a:r>
+          </a:p>
+        </p:txBody>
+      </p:sp>
+      <p:sp>
+        <p:nvSpPr>
+          <p:cNvPr name="TextBox 14" id="14"/>
+          <p:cNvSpPr txBox="true"/>
+          <p:nvPr/>
+        </p:nvSpPr>
+        <p:spPr>
+          <a:xfrm rot="0">
+            <a:off x="217050" y="36820"/>
+            <a:ext cx="11910300" cy="1368424"/>
+          </a:xfrm>
+          <a:prstGeom prst="rect">
+            <a:avLst/>
+          </a:prstGeom>
+        </p:spPr>
+        <p:txBody>
+          <a:bodyPr anchor="t" rtlCol="false" tIns="0" lIns="0" bIns="0" rIns="0">
+            <a:spAutoFit/>
+          </a:bodyPr>
+          <a:lstStyle/>
+          <a:p>
+            <a:pPr algn="l">
+              <a:lnSpc>
+                <a:spcPts val="11200"/>
+              </a:lnSpc>
+              <a:spcBef>
+                <a:spcPct val="0"/>
+              </a:spcBef>
+            </a:pPr>
+            <a:r>
+              <a:rPr lang="en-US" sz="8000">
+                <a:solidFill>
+                  <a:srgbClr val="2D5986"/>
+                </a:solidFill>
+                <a:latin typeface="Anton"/>
+                <a:ea typeface="Anton"/>
+                <a:cs typeface="Anton"/>
+                <a:sym typeface="Anton"/>
+              </a:rPr>
+              <a:t>Comparator</a:t>
+            </a:r>
+          </a:p>
+        </p:txBody>
+      </p:sp>
+      <p:grpSp>
+        <p:nvGrpSpPr>
+          <p:cNvPr name="Group 15" id="15"/>
+          <p:cNvGrpSpPr/>
+          <p:nvPr/>
+        </p:nvGrpSpPr>
+        <p:grpSpPr>
+          <a:xfrm rot="0">
+            <a:off x="16911828" y="9710928"/>
+            <a:ext cx="685800" cy="411480"/>
+            <a:chOff x="0" y="0"/>
+            <a:chExt cx="914400" cy="548640"/>
+          </a:xfrm>
+        </p:grpSpPr>
+        <p:sp>
+          <p:nvSpPr>
+            <p:cNvPr name="Freeform 16" id="16"/>
+            <p:cNvSpPr/>
+            <p:nvPr/>
+          </p:nvSpPr>
+          <p:spPr>
+            <a:xfrm flipH="false" flipV="false" rot="0">
+              <a:off x="0" y="0"/>
+              <a:ext cx="914400" cy="548640"/>
+            </a:xfrm>
+            <a:custGeom>
+              <a:avLst/>
+              <a:gdLst/>
+              <a:ahLst/>
+              <a:cxnLst/>
+              <a:rect r="r" b="b" t="t" l="l"/>
+              <a:pathLst>
+                <a:path h="548640" w="914400">
+                  <a:moveTo>
+                    <a:pt x="0" y="0"/>
+                  </a:moveTo>
+                  <a:lnTo>
+                    <a:pt x="914400" y="0"/>
+                  </a:lnTo>
+                  <a:lnTo>
+                    <a:pt x="914400" y="548640"/>
+                  </a:lnTo>
+                  <a:lnTo>
+                    <a:pt x="0" y="548640"/>
+                  </a:lnTo>
+                  <a:close/>
+                </a:path>
+              </a:pathLst>
+            </a:custGeom>
+            <a:blipFill>
+              <a:blip r:embed="rId2">
+                <a:alphaModFix amt="0"/>
+              </a:blip>
+              <a:stretch>
+                <a:fillRect l="-26982" t="0" r="-26982" b="0"/>
+              </a:stretch>
+            </a:blipFill>
+          </p:spPr>
+        </p:sp>
+        <p:sp>
+          <p:nvSpPr>
+            <p:cNvPr name="TextBox 17" id="17"/>
+            <p:cNvSpPr txBox="true"/>
+            <p:nvPr/>
+          </p:nvSpPr>
+          <p:spPr>
+            <a:xfrm>
+              <a:off x="0" y="-28575"/>
+              <a:ext cx="914400" cy="577215"/>
+            </a:xfrm>
+            <a:prstGeom prst="rect">
+              <a:avLst/>
+            </a:prstGeom>
+          </p:spPr>
+          <p:txBody>
+            <a:bodyPr anchor="ctr" rtlCol="false" tIns="0" lIns="0" bIns="0" rIns="0"/>
+            <a:lstStyle/>
+            <a:p>
+              <a:pPr algn="r">
+                <a:lnSpc>
+                  <a:spcPts val="1620"/>
+                </a:lnSpc>
+              </a:pPr>
+              <a:r>
+                <a:rPr lang="en-US" sz="1350">
+                  <a:solidFill>
+                    <a:srgbClr val="F6F4EE"/>
+                  </a:solidFill>
+                  <a:latin typeface="Calibri (MS)"/>
+                  <a:ea typeface="Calibri (MS)"/>
+                  <a:cs typeface="Calibri (MS)"/>
+                  <a:sym typeface="Calibri (MS)"/>
+                </a:rPr>
+                <a:t>19</a:t>
+              </a:r>
+            </a:p>
+          </p:txBody>
+        </p:sp>
+      </p:grpSp>
+      <p:grpSp>
+        <p:nvGrpSpPr>
+          <p:cNvPr name="Group 18" id="18"/>
+          <p:cNvGrpSpPr/>
+          <p:nvPr/>
+        </p:nvGrpSpPr>
+        <p:grpSpPr>
+          <a:xfrm rot="0">
+            <a:off x="309486" y="9897618"/>
+            <a:ext cx="10972800" cy="411480"/>
+            <a:chOff x="0" y="0"/>
+            <a:chExt cx="14630400" cy="548640"/>
+          </a:xfrm>
+        </p:grpSpPr>
+        <p:sp>
+          <p:nvSpPr>
+            <p:cNvPr name="Freeform 19" id="19"/>
+            <p:cNvSpPr/>
+            <p:nvPr/>
+          </p:nvSpPr>
+          <p:spPr>
+            <a:xfrm flipH="false" flipV="false" rot="0">
+              <a:off x="0" y="0"/>
+              <a:ext cx="14630400" cy="548640"/>
+            </a:xfrm>
+            <a:custGeom>
+              <a:avLst/>
+              <a:gdLst/>
+              <a:ahLst/>
+              <a:cxnLst/>
+              <a:rect r="r" b="b" t="t" l="l"/>
+              <a:pathLst>
+                <a:path h="548640" w="14630400">
+                  <a:moveTo>
+                    <a:pt x="0" y="0"/>
+                  </a:moveTo>
+                  <a:lnTo>
+                    <a:pt x="14630400" y="0"/>
+                  </a:lnTo>
+                  <a:lnTo>
+                    <a:pt x="14630400" y="548640"/>
+                  </a:lnTo>
+                  <a:lnTo>
+                    <a:pt x="0" y="548640"/>
+                  </a:lnTo>
+                  <a:close/>
+                </a:path>
+              </a:pathLst>
+            </a:custGeom>
+            <a:blipFill>
+              <a:blip r:embed="rId2">
+                <a:alphaModFix amt="0"/>
+              </a:blip>
+              <a:stretch>
+                <a:fillRect l="0" t="-469601" r="0" b="-469601"/>
+              </a:stretch>
+            </a:blipFill>
+          </p:spPr>
+        </p:sp>
+        <p:sp>
+          <p:nvSpPr>
+            <p:cNvPr name="TextBox 20" id="20"/>
+            <p:cNvSpPr txBox="true"/>
+            <p:nvPr/>
+          </p:nvSpPr>
+          <p:spPr>
+            <a:xfrm>
+              <a:off x="0" y="-28575"/>
+              <a:ext cx="14630400" cy="577215"/>
+            </a:xfrm>
+            <a:prstGeom prst="rect">
+              <a:avLst/>
+            </a:prstGeom>
+          </p:spPr>
+          <p:txBody>
+            <a:bodyPr anchor="ctr" rtlCol="false" tIns="0" lIns="0" bIns="0" rIns="0"/>
+            <a:lstStyle/>
+            <a:p>
+              <a:pPr algn="l">
+                <a:lnSpc>
+                  <a:spcPts val="1620"/>
+                </a:lnSpc>
+              </a:pPr>
+              <a:r>
+                <a:rPr lang="en-US" sz="1350">
+                  <a:solidFill>
+                    <a:srgbClr val="5B6B82"/>
+                  </a:solidFill>
+                  <a:latin typeface="Calibri (MS)"/>
+                  <a:ea typeface="Calibri (MS)"/>
+                  <a:cs typeface="Calibri (MS)"/>
+                  <a:sym typeface="Calibri (MS)"/>
+                </a:rPr>
+                <a:t>AHB to APB Bridge UVM Project</a:t>
+              </a:r>
+            </a:p>
+          </p:txBody>
+        </p:sp>
+      </p:grpSp>
+      <p:grpSp>
+        <p:nvGrpSpPr>
+          <p:cNvPr name="Group 21" id="21"/>
+          <p:cNvGrpSpPr/>
+          <p:nvPr/>
+        </p:nvGrpSpPr>
+        <p:grpSpPr>
+          <a:xfrm rot="0">
+            <a:off x="17064228" y="9863328"/>
+            <a:ext cx="685800" cy="411480"/>
+            <a:chOff x="0" y="0"/>
+            <a:chExt cx="914400" cy="548640"/>
+          </a:xfrm>
+        </p:grpSpPr>
+        <p:sp>
+          <p:nvSpPr>
+            <p:cNvPr name="Freeform 22" id="22"/>
+            <p:cNvSpPr/>
+            <p:nvPr/>
+          </p:nvSpPr>
+          <p:spPr>
+            <a:xfrm flipH="false" flipV="false" rot="0">
+              <a:off x="0" y="0"/>
+              <a:ext cx="914400" cy="548640"/>
+            </a:xfrm>
+            <a:custGeom>
+              <a:avLst/>
+              <a:gdLst/>
+              <a:ahLst/>
+              <a:cxnLst/>
+              <a:rect r="r" b="b" t="t" l="l"/>
+              <a:pathLst>
+                <a:path h="548640" w="914400">
+                  <a:moveTo>
+                    <a:pt x="0" y="0"/>
+                  </a:moveTo>
+                  <a:lnTo>
+                    <a:pt x="914400" y="0"/>
+                  </a:lnTo>
+                  <a:lnTo>
+                    <a:pt x="914400" y="548640"/>
+                  </a:lnTo>
+                  <a:lnTo>
+                    <a:pt x="0" y="548640"/>
+                  </a:lnTo>
+                  <a:close/>
+                </a:path>
+              </a:pathLst>
+            </a:custGeom>
+            <a:blipFill>
+              <a:blip r:embed="rId2">
+                <a:alphaModFix amt="0"/>
+              </a:blip>
+              <a:stretch>
+                <a:fillRect l="-26982" t="0" r="-26982" b="0"/>
+              </a:stretch>
+            </a:blipFill>
+          </p:spPr>
+        </p:sp>
+        <p:sp>
+          <p:nvSpPr>
+            <p:cNvPr name="TextBox 23" id="23"/>
+            <p:cNvSpPr txBox="true"/>
+            <p:nvPr/>
+          </p:nvSpPr>
+          <p:spPr>
+            <a:xfrm>
+              <a:off x="0" y="-28575"/>
+              <a:ext cx="914400" cy="577215"/>
+            </a:xfrm>
+            <a:prstGeom prst="rect">
+              <a:avLst/>
+            </a:prstGeom>
+          </p:spPr>
+          <p:txBody>
+            <a:bodyPr anchor="ctr" rtlCol="false" tIns="0" lIns="0" bIns="0" rIns="0"/>
+            <a:lstStyle/>
+            <a:p>
+              <a:pPr algn="r">
+                <a:lnSpc>
+                  <a:spcPts val="1620"/>
+                </a:lnSpc>
+              </a:pPr>
+              <a:r>
+                <a:rPr lang="en-US" sz="1350">
+                  <a:solidFill>
+                    <a:srgbClr val="5B6B82"/>
+                  </a:solidFill>
+                  <a:latin typeface="Calibri (MS)"/>
+                  <a:ea typeface="Calibri (MS)"/>
+                  <a:cs typeface="Calibri (MS)"/>
+                  <a:sym typeface="Calibri (MS)"/>
+                </a:rPr>
                 <a:t>19</a:t>
               </a:r>
             </a:p>
@@ -13761,850 +13485,6 @@
     <p:bg>
       <p:bgPr>
         <a:solidFill>
-          <a:srgbClr val="F6F4EE"/>
-        </a:solidFill>
-      </p:bgPr>
-    </p:bg>
-    <p:spTree>
-      <p:nvGrpSpPr>
-        <p:cNvPr id="1" name=""/>
-        <p:cNvGrpSpPr/>
-        <p:nvPr/>
-      </p:nvGrpSpPr>
-      <p:grpSpPr>
-        <a:xfrm>
-          <a:off x="0" y="0"/>
-          <a:ext cx="0" cy="0"/>
-          <a:chOff x="0" y="0"/>
-          <a:chExt cx="0" cy="0"/>
-        </a:xfrm>
-      </p:grpSpPr>
-      <p:grpSp>
-        <p:nvGrpSpPr>
-          <p:cNvPr name="Group 2" id="2"/>
-          <p:cNvGrpSpPr/>
-          <p:nvPr/>
-        </p:nvGrpSpPr>
-        <p:grpSpPr>
-          <a:xfrm rot="0">
-            <a:off x="395675" y="2998470"/>
-            <a:ext cx="5903445" cy="2935534"/>
-            <a:chOff x="0" y="0"/>
-            <a:chExt cx="6773228" cy="3368040"/>
-          </a:xfrm>
-        </p:grpSpPr>
-        <p:sp>
-          <p:nvSpPr>
-            <p:cNvPr name="Freeform 3" id="3"/>
-            <p:cNvSpPr/>
-            <p:nvPr/>
-          </p:nvSpPr>
-          <p:spPr>
-            <a:xfrm flipH="false" flipV="false" rot="0">
-              <a:off x="0" y="0"/>
-              <a:ext cx="6773291" cy="3368040"/>
-            </a:xfrm>
-            <a:custGeom>
-              <a:avLst/>
-              <a:gdLst/>
-              <a:ahLst/>
-              <a:cxnLst/>
-              <a:rect r="r" b="b" t="t" l="l"/>
-              <a:pathLst>
-                <a:path h="3368040" w="6773291">
-                  <a:moveTo>
-                    <a:pt x="0" y="203200"/>
-                  </a:moveTo>
-                  <a:cubicBezTo>
-                    <a:pt x="0" y="90932"/>
-                    <a:pt x="90932" y="0"/>
-                    <a:pt x="203200" y="0"/>
-                  </a:cubicBezTo>
-                  <a:lnTo>
-                    <a:pt x="6570091" y="0"/>
-                  </a:lnTo>
-                  <a:cubicBezTo>
-                    <a:pt x="6682360" y="0"/>
-                    <a:pt x="6773291" y="90932"/>
-                    <a:pt x="6773291" y="203200"/>
-                  </a:cubicBezTo>
-                  <a:lnTo>
-                    <a:pt x="6773291" y="3164840"/>
-                  </a:lnTo>
-                  <a:cubicBezTo>
-                    <a:pt x="6773291" y="3277108"/>
-                    <a:pt x="6682360" y="3368040"/>
-                    <a:pt x="6570091" y="3368040"/>
-                  </a:cubicBezTo>
-                  <a:lnTo>
-                    <a:pt x="203200" y="3368040"/>
-                  </a:lnTo>
-                  <a:cubicBezTo>
-                    <a:pt x="90932" y="3368040"/>
-                    <a:pt x="0" y="3277108"/>
-                    <a:pt x="0" y="3164840"/>
-                  </a:cubicBezTo>
-                  <a:close/>
-                </a:path>
-              </a:pathLst>
-            </a:custGeom>
-            <a:solidFill>
-              <a:srgbClr val="2D5986"/>
-            </a:solidFill>
-          </p:spPr>
-        </p:sp>
-      </p:grpSp>
-      <p:sp>
-        <p:nvSpPr>
-          <p:cNvPr name="TextBox 4" id="4"/>
-          <p:cNvSpPr txBox="true"/>
-          <p:nvPr/>
-        </p:nvSpPr>
-        <p:spPr>
-          <a:xfrm rot="0">
-            <a:off x="763171" y="3148410"/>
-            <a:ext cx="5168455" cy="550545"/>
-          </a:xfrm>
-          <a:prstGeom prst="rect">
-            <a:avLst/>
-          </a:prstGeom>
-        </p:spPr>
-        <p:txBody>
-          <a:bodyPr anchor="t" rtlCol="false" tIns="0" lIns="0" bIns="0" rIns="0">
-            <a:spAutoFit/>
-          </a:bodyPr>
-          <a:lstStyle/>
-          <a:p>
-            <a:pPr algn="l">
-              <a:lnSpc>
-                <a:spcPts val="4005"/>
-              </a:lnSpc>
-            </a:pPr>
-            <a:r>
-              <a:rPr lang="en-US" sz="3337" b="true">
-                <a:solidFill>
-                  <a:srgbClr val="F6F4EE"/>
-                </a:solidFill>
-                <a:latin typeface="Helvetica World Bold"/>
-                <a:ea typeface="Helvetica World Bold"/>
-                <a:cs typeface="Helvetica World Bold"/>
-                <a:sym typeface="Helvetica World Bold"/>
-              </a:rPr>
-              <a:t>Collect</a:t>
-            </a:r>
-          </a:p>
-        </p:txBody>
-      </p:sp>
-      <p:sp>
-        <p:nvSpPr>
-          <p:cNvPr name="TextBox 5" id="5"/>
-          <p:cNvSpPr txBox="true"/>
-          <p:nvPr/>
-        </p:nvSpPr>
-        <p:spPr>
-          <a:xfrm rot="0">
-            <a:off x="838441" y="4039378"/>
-            <a:ext cx="5168455" cy="1031234"/>
-          </a:xfrm>
-          <a:prstGeom prst="rect">
-            <a:avLst/>
-          </a:prstGeom>
-        </p:spPr>
-        <p:txBody>
-          <a:bodyPr anchor="t" rtlCol="false" tIns="0" lIns="0" bIns="0" rIns="0">
-            <a:spAutoFit/>
-          </a:bodyPr>
-          <a:lstStyle/>
-          <a:p>
-            <a:pPr algn="l">
-              <a:lnSpc>
-                <a:spcPts val="3660"/>
-              </a:lnSpc>
-            </a:pPr>
-            <a:r>
-              <a:rPr lang="en-US" sz="2614">
-                <a:solidFill>
-                  <a:srgbClr val="F6F4EE"/>
-                </a:solidFill>
-                <a:latin typeface="Helvetica World"/>
-                <a:ea typeface="Helvetica World"/>
-                <a:cs typeface="Helvetica World"/>
-                <a:sym typeface="Helvetica World"/>
-              </a:rPr>
-              <a:t>Four analysis FIFOs: expected and actual, for AHB and for APB</a:t>
-            </a:r>
-          </a:p>
-        </p:txBody>
-      </p:sp>
-      <p:grpSp>
-        <p:nvGrpSpPr>
-          <p:cNvPr name="Group 6" id="6"/>
-          <p:cNvGrpSpPr/>
-          <p:nvPr/>
-        </p:nvGrpSpPr>
-        <p:grpSpPr>
-          <a:xfrm rot="0">
-            <a:off x="6457813" y="2998470"/>
-            <a:ext cx="5669537" cy="2819158"/>
-            <a:chOff x="0" y="0"/>
-            <a:chExt cx="6773380" cy="3368040"/>
-          </a:xfrm>
-        </p:grpSpPr>
-        <p:sp>
-          <p:nvSpPr>
-            <p:cNvPr name="Freeform 7" id="7"/>
-            <p:cNvSpPr/>
-            <p:nvPr/>
-          </p:nvSpPr>
-          <p:spPr>
-            <a:xfrm flipH="false" flipV="false" rot="0">
-              <a:off x="0" y="0"/>
-              <a:ext cx="6773418" cy="3368040"/>
-            </a:xfrm>
-            <a:custGeom>
-              <a:avLst/>
-              <a:gdLst/>
-              <a:ahLst/>
-              <a:cxnLst/>
-              <a:rect r="r" b="b" t="t" l="l"/>
-              <a:pathLst>
-                <a:path h="3368040" w="6773418">
-                  <a:moveTo>
-                    <a:pt x="0" y="203200"/>
-                  </a:moveTo>
-                  <a:cubicBezTo>
-                    <a:pt x="0" y="90932"/>
-                    <a:pt x="90932" y="0"/>
-                    <a:pt x="203200" y="0"/>
-                  </a:cubicBezTo>
-                  <a:lnTo>
-                    <a:pt x="6570218" y="0"/>
-                  </a:lnTo>
-                  <a:cubicBezTo>
-                    <a:pt x="6682487" y="0"/>
-                    <a:pt x="6773418" y="90932"/>
-                    <a:pt x="6773418" y="203200"/>
-                  </a:cubicBezTo>
-                  <a:lnTo>
-                    <a:pt x="6773418" y="3164840"/>
-                  </a:lnTo>
-                  <a:cubicBezTo>
-                    <a:pt x="6773418" y="3277108"/>
-                    <a:pt x="6682487" y="3368040"/>
-                    <a:pt x="6570218" y="3368040"/>
-                  </a:cubicBezTo>
-                  <a:lnTo>
-                    <a:pt x="203200" y="3368040"/>
-                  </a:lnTo>
-                  <a:cubicBezTo>
-                    <a:pt x="90932" y="3368040"/>
-                    <a:pt x="0" y="3277108"/>
-                    <a:pt x="0" y="3164840"/>
-                  </a:cubicBezTo>
-                  <a:close/>
-                </a:path>
-              </a:pathLst>
-            </a:custGeom>
-            <a:solidFill>
-              <a:srgbClr val="2D5986"/>
-            </a:solidFill>
-          </p:spPr>
-        </p:sp>
-      </p:grpSp>
-      <p:sp>
-        <p:nvSpPr>
-          <p:cNvPr name="TextBox 8" id="8"/>
-          <p:cNvSpPr txBox="true"/>
-          <p:nvPr/>
-        </p:nvSpPr>
-        <p:spPr>
-          <a:xfrm rot="0">
-            <a:off x="6883025" y="3172807"/>
-            <a:ext cx="4963695" cy="501751"/>
-          </a:xfrm>
-          <a:prstGeom prst="rect">
-            <a:avLst/>
-          </a:prstGeom>
-        </p:spPr>
-        <p:txBody>
-          <a:bodyPr anchor="t" rtlCol="false" tIns="0" lIns="0" bIns="0" rIns="0">
-            <a:spAutoFit/>
-          </a:bodyPr>
-          <a:lstStyle/>
-          <a:p>
-            <a:pPr algn="l">
-              <a:lnSpc>
-                <a:spcPts val="3615"/>
-              </a:lnSpc>
-            </a:pPr>
-            <a:r>
-              <a:rPr lang="en-US" sz="3013" b="true">
-                <a:solidFill>
-                  <a:srgbClr val="F6F4EE"/>
-                </a:solidFill>
-                <a:latin typeface="Helvetica World Bold"/>
-                <a:ea typeface="Helvetica World Bold"/>
-                <a:cs typeface="Helvetica World Bold"/>
-                <a:sym typeface="Helvetica World Bold"/>
-              </a:rPr>
-              <a:t>Compare</a:t>
-            </a:r>
-          </a:p>
-        </p:txBody>
-      </p:sp>
-      <p:sp>
-        <p:nvSpPr>
-          <p:cNvPr name="TextBox 9" id="9"/>
-          <p:cNvSpPr txBox="true"/>
-          <p:nvPr/>
-        </p:nvSpPr>
-        <p:spPr>
-          <a:xfrm rot="0">
-            <a:off x="6883025" y="4005372"/>
-            <a:ext cx="4963695" cy="1429565"/>
-          </a:xfrm>
-          <a:prstGeom prst="rect">
-            <a:avLst/>
-          </a:prstGeom>
-        </p:spPr>
-        <p:txBody>
-          <a:bodyPr anchor="t" rtlCol="false" tIns="0" lIns="0" bIns="0" rIns="0">
-            <a:spAutoFit/>
-          </a:bodyPr>
-          <a:lstStyle/>
-          <a:p>
-            <a:pPr algn="l">
-              <a:lnSpc>
-                <a:spcPts val="3515"/>
-              </a:lnSpc>
-            </a:pPr>
-            <a:r>
-              <a:rPr lang="en-US" sz="2511">
-                <a:solidFill>
-                  <a:srgbClr val="F6F4EE"/>
-                </a:solidFill>
-                <a:latin typeface="Helvetica World"/>
-                <a:ea typeface="Helvetica World"/>
-                <a:cs typeface="Helvetica World"/>
-                <a:sym typeface="Helvetica World"/>
-              </a:rPr>
-              <a:t>run_phase takes one item from each FIFO and calls compare on each pair</a:t>
-            </a:r>
-          </a:p>
-        </p:txBody>
-      </p:sp>
-      <p:grpSp>
-        <p:nvGrpSpPr>
-          <p:cNvPr name="Group 10" id="10"/>
-          <p:cNvGrpSpPr/>
-          <p:nvPr/>
-        </p:nvGrpSpPr>
-        <p:grpSpPr>
-          <a:xfrm rot="0">
-            <a:off x="12289275" y="2998470"/>
-            <a:ext cx="5669537" cy="2819158"/>
-            <a:chOff x="0" y="0"/>
-            <a:chExt cx="6773380" cy="3368040"/>
-          </a:xfrm>
-        </p:grpSpPr>
-        <p:sp>
-          <p:nvSpPr>
-            <p:cNvPr name="Freeform 11" id="11"/>
-            <p:cNvSpPr/>
-            <p:nvPr/>
-          </p:nvSpPr>
-          <p:spPr>
-            <a:xfrm flipH="false" flipV="false" rot="0">
-              <a:off x="0" y="0"/>
-              <a:ext cx="6773418" cy="3368040"/>
-            </a:xfrm>
-            <a:custGeom>
-              <a:avLst/>
-              <a:gdLst/>
-              <a:ahLst/>
-              <a:cxnLst/>
-              <a:rect r="r" b="b" t="t" l="l"/>
-              <a:pathLst>
-                <a:path h="3368040" w="6773418">
-                  <a:moveTo>
-                    <a:pt x="0" y="203200"/>
-                  </a:moveTo>
-                  <a:cubicBezTo>
-                    <a:pt x="0" y="90932"/>
-                    <a:pt x="90932" y="0"/>
-                    <a:pt x="203200" y="0"/>
-                  </a:cubicBezTo>
-                  <a:lnTo>
-                    <a:pt x="6570218" y="0"/>
-                  </a:lnTo>
-                  <a:cubicBezTo>
-                    <a:pt x="6682487" y="0"/>
-                    <a:pt x="6773418" y="90932"/>
-                    <a:pt x="6773418" y="203200"/>
-                  </a:cubicBezTo>
-                  <a:lnTo>
-                    <a:pt x="6773418" y="3164840"/>
-                  </a:lnTo>
-                  <a:cubicBezTo>
-                    <a:pt x="6773418" y="3277108"/>
-                    <a:pt x="6682487" y="3368040"/>
-                    <a:pt x="6570218" y="3368040"/>
-                  </a:cubicBezTo>
-                  <a:lnTo>
-                    <a:pt x="203200" y="3368040"/>
-                  </a:lnTo>
-                  <a:cubicBezTo>
-                    <a:pt x="90932" y="3368040"/>
-                    <a:pt x="0" y="3277108"/>
-                    <a:pt x="0" y="3164840"/>
-                  </a:cubicBezTo>
-                  <a:close/>
-                </a:path>
-              </a:pathLst>
-            </a:custGeom>
-            <a:solidFill>
-              <a:srgbClr val="2D5986"/>
-            </a:solidFill>
-          </p:spPr>
-        </p:sp>
-      </p:grpSp>
-      <p:sp>
-        <p:nvSpPr>
-          <p:cNvPr name="TextBox 12" id="12"/>
-          <p:cNvSpPr txBox="true"/>
-          <p:nvPr/>
-        </p:nvSpPr>
-        <p:spPr>
-          <a:xfrm rot="0">
-            <a:off x="12642196" y="3172807"/>
-            <a:ext cx="4963695" cy="501751"/>
-          </a:xfrm>
-          <a:prstGeom prst="rect">
-            <a:avLst/>
-          </a:prstGeom>
-        </p:spPr>
-        <p:txBody>
-          <a:bodyPr anchor="t" rtlCol="false" tIns="0" lIns="0" bIns="0" rIns="0">
-            <a:spAutoFit/>
-          </a:bodyPr>
-          <a:lstStyle/>
-          <a:p>
-            <a:pPr algn="l">
-              <a:lnSpc>
-                <a:spcPts val="3615"/>
-              </a:lnSpc>
-            </a:pPr>
-            <a:r>
-              <a:rPr lang="en-US" sz="3013" b="true">
-                <a:solidFill>
-                  <a:srgbClr val="F6F4EE"/>
-                </a:solidFill>
-                <a:latin typeface="Helvetica World Bold"/>
-                <a:ea typeface="Helvetica World Bold"/>
-                <a:cs typeface="Helvetica World Bold"/>
-                <a:sym typeface="Helvetica World Bold"/>
-              </a:rPr>
-              <a:t>Report</a:t>
-            </a:r>
-          </a:p>
-        </p:txBody>
-      </p:sp>
-      <p:sp>
-        <p:nvSpPr>
-          <p:cNvPr name="TextBox 13" id="13"/>
-          <p:cNvSpPr txBox="true"/>
-          <p:nvPr/>
-        </p:nvSpPr>
-        <p:spPr>
-          <a:xfrm rot="0">
-            <a:off x="12714487" y="4005372"/>
-            <a:ext cx="4963695" cy="1429565"/>
-          </a:xfrm>
-          <a:prstGeom prst="rect">
-            <a:avLst/>
-          </a:prstGeom>
-        </p:spPr>
-        <p:txBody>
-          <a:bodyPr anchor="t" rtlCol="false" tIns="0" lIns="0" bIns="0" rIns="0">
-            <a:spAutoFit/>
-          </a:bodyPr>
-          <a:lstStyle/>
-          <a:p>
-            <a:pPr algn="l">
-              <a:lnSpc>
-                <a:spcPts val="3515"/>
-              </a:lnSpc>
-            </a:pPr>
-            <a:r>
-              <a:rPr lang="en-US" sz="2511">
-                <a:solidFill>
-                  <a:srgbClr val="F6F4EE"/>
-                </a:solidFill>
-                <a:latin typeface="Helvetica World"/>
-                <a:ea typeface="Helvetica World"/>
-                <a:cs typeface="Helvetica World"/>
-                <a:sym typeface="Helvetica World"/>
-              </a:rPr>
-              <a:t>Pass and fail counts with pass rate per bus, then an overall verdict</a:t>
-            </a:r>
-          </a:p>
-        </p:txBody>
-      </p:sp>
-      <p:sp>
-        <p:nvSpPr>
-          <p:cNvPr name="TextBox 14" id="14"/>
-          <p:cNvSpPr txBox="true"/>
-          <p:nvPr/>
-        </p:nvSpPr>
-        <p:spPr>
-          <a:xfrm rot="0">
-            <a:off x="217050" y="36820"/>
-            <a:ext cx="11910300" cy="1368424"/>
-          </a:xfrm>
-          <a:prstGeom prst="rect">
-            <a:avLst/>
-          </a:prstGeom>
-        </p:spPr>
-        <p:txBody>
-          <a:bodyPr anchor="t" rtlCol="false" tIns="0" lIns="0" bIns="0" rIns="0">
-            <a:spAutoFit/>
-          </a:bodyPr>
-          <a:lstStyle/>
-          <a:p>
-            <a:pPr algn="l">
-              <a:lnSpc>
-                <a:spcPts val="11200"/>
-              </a:lnSpc>
-              <a:spcBef>
-                <a:spcPct val="0"/>
-              </a:spcBef>
-            </a:pPr>
-            <a:r>
-              <a:rPr lang="en-US" sz="8000">
-                <a:solidFill>
-                  <a:srgbClr val="2D5986"/>
-                </a:solidFill>
-                <a:latin typeface="Anton"/>
-                <a:ea typeface="Anton"/>
-                <a:cs typeface="Anton"/>
-                <a:sym typeface="Anton"/>
-              </a:rPr>
-              <a:t>Comparator</a:t>
-            </a:r>
-          </a:p>
-        </p:txBody>
-      </p:sp>
-      <p:grpSp>
-        <p:nvGrpSpPr>
-          <p:cNvPr name="Group 15" id="15"/>
-          <p:cNvGrpSpPr/>
-          <p:nvPr/>
-        </p:nvGrpSpPr>
-        <p:grpSpPr>
-          <a:xfrm rot="0">
-            <a:off x="16911828" y="9710928"/>
-            <a:ext cx="685800" cy="411480"/>
-            <a:chOff x="0" y="0"/>
-            <a:chExt cx="914400" cy="548640"/>
-          </a:xfrm>
-        </p:grpSpPr>
-        <p:sp>
-          <p:nvSpPr>
-            <p:cNvPr name="Freeform 16" id="16"/>
-            <p:cNvSpPr/>
-            <p:nvPr/>
-          </p:nvSpPr>
-          <p:spPr>
-            <a:xfrm flipH="false" flipV="false" rot="0">
-              <a:off x="0" y="0"/>
-              <a:ext cx="914400" cy="548640"/>
-            </a:xfrm>
-            <a:custGeom>
-              <a:avLst/>
-              <a:gdLst/>
-              <a:ahLst/>
-              <a:cxnLst/>
-              <a:rect r="r" b="b" t="t" l="l"/>
-              <a:pathLst>
-                <a:path h="548640" w="914400">
-                  <a:moveTo>
-                    <a:pt x="0" y="0"/>
-                  </a:moveTo>
-                  <a:lnTo>
-                    <a:pt x="914400" y="0"/>
-                  </a:lnTo>
-                  <a:lnTo>
-                    <a:pt x="914400" y="548640"/>
-                  </a:lnTo>
-                  <a:lnTo>
-                    <a:pt x="0" y="548640"/>
-                  </a:lnTo>
-                  <a:close/>
-                </a:path>
-              </a:pathLst>
-            </a:custGeom>
-            <a:blipFill>
-              <a:blip r:embed="rId2">
-                <a:alphaModFix amt="0"/>
-              </a:blip>
-              <a:stretch>
-                <a:fillRect l="-26982" t="0" r="-26982" b="0"/>
-              </a:stretch>
-            </a:blipFill>
-          </p:spPr>
-        </p:sp>
-        <p:sp>
-          <p:nvSpPr>
-            <p:cNvPr name="TextBox 17" id="17"/>
-            <p:cNvSpPr txBox="true"/>
-            <p:nvPr/>
-          </p:nvSpPr>
-          <p:spPr>
-            <a:xfrm>
-              <a:off x="0" y="-28575"/>
-              <a:ext cx="914400" cy="577215"/>
-            </a:xfrm>
-            <a:prstGeom prst="rect">
-              <a:avLst/>
-            </a:prstGeom>
-          </p:spPr>
-          <p:txBody>
-            <a:bodyPr anchor="ctr" rtlCol="false" tIns="0" lIns="0" bIns="0" rIns="0"/>
-            <a:lstStyle/>
-            <a:p>
-              <a:pPr algn="r">
-                <a:lnSpc>
-                  <a:spcPts val="1620"/>
-                </a:lnSpc>
-              </a:pPr>
-              <a:r>
-                <a:rPr lang="en-US" sz="1350">
-                  <a:solidFill>
-                    <a:srgbClr val="F6F4EE"/>
-                  </a:solidFill>
-                  <a:latin typeface="Calibri (MS)"/>
-                  <a:ea typeface="Calibri (MS)"/>
-                  <a:cs typeface="Calibri (MS)"/>
-                  <a:sym typeface="Calibri (MS)"/>
-                </a:rPr>
-                <a:t>19</a:t>
-              </a:r>
-            </a:p>
-          </p:txBody>
-        </p:sp>
-      </p:grpSp>
-      <p:grpSp>
-        <p:nvGrpSpPr>
-          <p:cNvPr name="Group 18" id="18"/>
-          <p:cNvGrpSpPr/>
-          <p:nvPr/>
-        </p:nvGrpSpPr>
-        <p:grpSpPr>
-          <a:xfrm rot="0">
-            <a:off x="309486" y="9897618"/>
-            <a:ext cx="10972800" cy="411480"/>
-            <a:chOff x="0" y="0"/>
-            <a:chExt cx="14630400" cy="548640"/>
-          </a:xfrm>
-        </p:grpSpPr>
-        <p:sp>
-          <p:nvSpPr>
-            <p:cNvPr name="Freeform 19" id="19"/>
-            <p:cNvSpPr/>
-            <p:nvPr/>
-          </p:nvSpPr>
-          <p:spPr>
-            <a:xfrm flipH="false" flipV="false" rot="0">
-              <a:off x="0" y="0"/>
-              <a:ext cx="14630400" cy="548640"/>
-            </a:xfrm>
-            <a:custGeom>
-              <a:avLst/>
-              <a:gdLst/>
-              <a:ahLst/>
-              <a:cxnLst/>
-              <a:rect r="r" b="b" t="t" l="l"/>
-              <a:pathLst>
-                <a:path h="548640" w="14630400">
-                  <a:moveTo>
-                    <a:pt x="0" y="0"/>
-                  </a:moveTo>
-                  <a:lnTo>
-                    <a:pt x="14630400" y="0"/>
-                  </a:lnTo>
-                  <a:lnTo>
-                    <a:pt x="14630400" y="548640"/>
-                  </a:lnTo>
-                  <a:lnTo>
-                    <a:pt x="0" y="548640"/>
-                  </a:lnTo>
-                  <a:close/>
-                </a:path>
-              </a:pathLst>
-            </a:custGeom>
-            <a:blipFill>
-              <a:blip r:embed="rId2">
-                <a:alphaModFix amt="0"/>
-              </a:blip>
-              <a:stretch>
-                <a:fillRect l="0" t="-469601" r="0" b="-469601"/>
-              </a:stretch>
-            </a:blipFill>
-          </p:spPr>
-        </p:sp>
-        <p:sp>
-          <p:nvSpPr>
-            <p:cNvPr name="TextBox 20" id="20"/>
-            <p:cNvSpPr txBox="true"/>
-            <p:nvPr/>
-          </p:nvSpPr>
-          <p:spPr>
-            <a:xfrm>
-              <a:off x="0" y="-28575"/>
-              <a:ext cx="14630400" cy="577215"/>
-            </a:xfrm>
-            <a:prstGeom prst="rect">
-              <a:avLst/>
-            </a:prstGeom>
-          </p:spPr>
-          <p:txBody>
-            <a:bodyPr anchor="ctr" rtlCol="false" tIns="0" lIns="0" bIns="0" rIns="0"/>
-            <a:lstStyle/>
-            <a:p>
-              <a:pPr algn="l">
-                <a:lnSpc>
-                  <a:spcPts val="1620"/>
-                </a:lnSpc>
-              </a:pPr>
-              <a:r>
-                <a:rPr lang="en-US" sz="1350">
-                  <a:solidFill>
-                    <a:srgbClr val="5B6B82"/>
-                  </a:solidFill>
-                  <a:latin typeface="Calibri (MS)"/>
-                  <a:ea typeface="Calibri (MS)"/>
-                  <a:cs typeface="Calibri (MS)"/>
-                  <a:sym typeface="Calibri (MS)"/>
-                </a:rPr>
-                <a:t>AHB to APB Bridge UVM Project</a:t>
-              </a:r>
-            </a:p>
-          </p:txBody>
-        </p:sp>
-      </p:grpSp>
-      <p:grpSp>
-        <p:nvGrpSpPr>
-          <p:cNvPr name="Group 21" id="21"/>
-          <p:cNvGrpSpPr/>
-          <p:nvPr/>
-        </p:nvGrpSpPr>
-        <p:grpSpPr>
-          <a:xfrm rot="0">
-            <a:off x="17064228" y="9863328"/>
-            <a:ext cx="685800" cy="411480"/>
-            <a:chOff x="0" y="0"/>
-            <a:chExt cx="914400" cy="548640"/>
-          </a:xfrm>
-        </p:grpSpPr>
-        <p:sp>
-          <p:nvSpPr>
-            <p:cNvPr name="Freeform 22" id="22"/>
-            <p:cNvSpPr/>
-            <p:nvPr/>
-          </p:nvSpPr>
-          <p:spPr>
-            <a:xfrm flipH="false" flipV="false" rot="0">
-              <a:off x="0" y="0"/>
-              <a:ext cx="914400" cy="548640"/>
-            </a:xfrm>
-            <a:custGeom>
-              <a:avLst/>
-              <a:gdLst/>
-              <a:ahLst/>
-              <a:cxnLst/>
-              <a:rect r="r" b="b" t="t" l="l"/>
-              <a:pathLst>
-                <a:path h="548640" w="914400">
-                  <a:moveTo>
-                    <a:pt x="0" y="0"/>
-                  </a:moveTo>
-                  <a:lnTo>
-                    <a:pt x="914400" y="0"/>
-                  </a:lnTo>
-                  <a:lnTo>
-                    <a:pt x="914400" y="548640"/>
-                  </a:lnTo>
-                  <a:lnTo>
-                    <a:pt x="0" y="548640"/>
-                  </a:lnTo>
-                  <a:close/>
-                </a:path>
-              </a:pathLst>
-            </a:custGeom>
-            <a:blipFill>
-              <a:blip r:embed="rId2">
-                <a:alphaModFix amt="0"/>
-              </a:blip>
-              <a:stretch>
-                <a:fillRect l="-26982" t="0" r="-26982" b="0"/>
-              </a:stretch>
-            </a:blipFill>
-          </p:spPr>
-        </p:sp>
-        <p:sp>
-          <p:nvSpPr>
-            <p:cNvPr name="TextBox 23" id="23"/>
-            <p:cNvSpPr txBox="true"/>
-            <p:nvPr/>
-          </p:nvSpPr>
-          <p:spPr>
-            <a:xfrm>
-              <a:off x="0" y="-28575"/>
-              <a:ext cx="914400" cy="577215"/>
-            </a:xfrm>
-            <a:prstGeom prst="rect">
-              <a:avLst/>
-            </a:prstGeom>
-          </p:spPr>
-          <p:txBody>
-            <a:bodyPr anchor="ctr" rtlCol="false" tIns="0" lIns="0" bIns="0" rIns="0"/>
-            <a:lstStyle/>
-            <a:p>
-              <a:pPr algn="r">
-                <a:lnSpc>
-                  <a:spcPts val="1620"/>
-                </a:lnSpc>
-              </a:pPr>
-              <a:r>
-                <a:rPr lang="en-US" sz="1350">
-                  <a:solidFill>
-                    <a:srgbClr val="5B6B82"/>
-                  </a:solidFill>
-                  <a:latin typeface="Calibri (MS)"/>
-                  <a:ea typeface="Calibri (MS)"/>
-                  <a:cs typeface="Calibri (MS)"/>
-                  <a:sym typeface="Calibri (MS)"/>
-                </a:rPr>
-                <a:t>20</a:t>
-              </a:r>
-            </a:p>
-          </p:txBody>
-        </p:sp>
-      </p:grpSp>
-    </p:spTree>
-  </p:cSld>
-  <p:clrMapOvr>
-    <a:masterClrMapping/>
-  </p:clrMapOvr>
-</p:sld>
-</file>
-
-<file path=ppt/slides/slide21.xml><?xml version="1.0" encoding="utf-8"?>
-<p:sld xmlns:p="http://schemas.openxmlformats.org/presentationml/2006/main" xmlns:a="http://schemas.openxmlformats.org/drawingml/2006/main" xmlns:r="http://schemas.openxmlformats.org/officeDocument/2006/relationships">
-  <p:cSld>
-    <p:bg>
-      <p:bgPr>
-        <a:solidFill>
           <a:srgbClr val="F7F5F1"/>
         </a:solidFill>
       </p:bgPr>
@@ -14859,7 +13739,7 @@
                   <a:cs typeface="Calibri (MS)"/>
                   <a:sym typeface="Calibri (MS)"/>
                 </a:rPr>
-                <a:t>21</a:t>
+                <a:t>20</a:t>
               </a:r>
             </a:p>
           </p:txBody>
@@ -15622,7 +14502,7 @@
 </p:sld>
 </file>
 
-<file path=ppt/slides/slide22.xml><?xml version="1.0" encoding="utf-8"?>
+<file path=ppt/slides/slide21.xml><?xml version="1.0" encoding="utf-8"?>
 <p:sld xmlns:p="http://schemas.openxmlformats.org/presentationml/2006/main" xmlns:a="http://schemas.openxmlformats.org/drawingml/2006/main" xmlns:r="http://schemas.openxmlformats.org/officeDocument/2006/relationships">
   <p:cSld>
     <p:bg>
@@ -16221,7 +15101,7 @@
                   <a:cs typeface="Calibri (MS)"/>
                   <a:sym typeface="Calibri (MS)"/>
                 </a:rPr>
-                <a:t>22</a:t>
+                <a:t>21</a:t>
               </a:r>
             </a:p>
           </p:txBody>
@@ -16235,7 +15115,7 @@
 </p:sld>
 </file>
 
-<file path=ppt/slides/slide23.xml><?xml version="1.0" encoding="utf-8"?>
+<file path=ppt/slides/slide22.xml><?xml version="1.0" encoding="utf-8"?>
 <p:sld xmlns:p="http://schemas.openxmlformats.org/presentationml/2006/main" xmlns:a="http://schemas.openxmlformats.org/drawingml/2006/main" xmlns:r="http://schemas.openxmlformats.org/officeDocument/2006/relationships">
   <p:cSld>
     <p:bg>
@@ -17994,7 +16874,7 @@
                   <a:cs typeface="Calibri (MS)"/>
                   <a:sym typeface="Calibri (MS)"/>
                 </a:rPr>
-                <a:t>23</a:t>
+                <a:t>22</a:t>
               </a:r>
             </a:p>
           </p:txBody>
@@ -18008,7 +16888,7 @@
 </p:sld>
 </file>
 
-<file path=ppt/slides/slide24.xml><?xml version="1.0" encoding="utf-8"?>
+<file path=ppt/slides/slide23.xml><?xml version="1.0" encoding="utf-8"?>
 <p:sld xmlns:p="http://schemas.openxmlformats.org/presentationml/2006/main" xmlns:a="http://schemas.openxmlformats.org/drawingml/2006/main" xmlns:r="http://schemas.openxmlformats.org/officeDocument/2006/relationships">
   <p:cSld>
     <p:bg>
@@ -18752,7 +17632,7 @@
                   <a:cs typeface="Calibri (MS)"/>
                   <a:sym typeface="Calibri (MS)"/>
                 </a:rPr>
-                <a:t>24</a:t>
+                <a:t>23</a:t>
               </a:r>
             </a:p>
           </p:txBody>
@@ -18766,7 +17646,7 @@
 </p:sld>
 </file>
 
-<file path=ppt/slides/slide25.xml><?xml version="1.0" encoding="utf-8"?>
+<file path=ppt/slides/slide24.xml><?xml version="1.0" encoding="utf-8"?>
 <p:sld xmlns:p="http://schemas.openxmlformats.org/presentationml/2006/main" xmlns:a="http://schemas.openxmlformats.org/drawingml/2006/main" xmlns:r="http://schemas.openxmlformats.org/officeDocument/2006/relationships">
   <p:cSld>
     <p:bg>
@@ -19716,7 +18596,7 @@
                   <a:cs typeface="Calibri (MS)"/>
                   <a:sym typeface="Calibri (MS)"/>
                 </a:rPr>
-                <a:t>25</a:t>
+                <a:t>24</a:t>
               </a:r>
             </a:p>
           </p:txBody>
@@ -19730,7 +18610,7 @@
 </p:sld>
 </file>
 
-<file path=ppt/slides/slide26.xml><?xml version="1.0" encoding="utf-8"?>
+<file path=ppt/slides/slide25.xml><?xml version="1.0" encoding="utf-8"?>
 <p:sld xmlns:p="http://schemas.openxmlformats.org/presentationml/2006/main" xmlns:a="http://schemas.openxmlformats.org/drawingml/2006/main" xmlns:r="http://schemas.openxmlformats.org/officeDocument/2006/relationships">
   <p:cSld>
     <p:bg>
@@ -20043,12 +18923,773 @@
                   <a:cs typeface="Calibri (MS)"/>
                   <a:sym typeface="Calibri (MS)"/>
                 </a:rPr>
-                <a:t>26</a:t>
+                <a:t>25</a:t>
               </a:r>
             </a:p>
           </p:txBody>
         </p:sp>
       </p:grpSp>
+    </p:spTree>
+  </p:cSld>
+  <p:clrMapOvr>
+    <a:masterClrMapping/>
+  </p:clrMapOvr>
+</p:sld>
+</file>
+
+<file path=ppt/slides/slide26.xml><?xml version="1.0" encoding="utf-8"?>
+<p:sld xmlns:p="http://schemas.openxmlformats.org/presentationml/2006/main" xmlns:a="http://schemas.openxmlformats.org/drawingml/2006/main">
+  <p:cSld>
+    <p:bg>
+      <p:bgPr>
+        <a:solidFill>
+          <a:srgbClr val="F7F5F1"/>
+        </a:solidFill>
+      </p:bgPr>
+    </p:bg>
+    <p:spTree>
+      <p:nvGrpSpPr>
+        <p:cNvPr id="1" name=""/>
+        <p:cNvGrpSpPr/>
+        <p:nvPr/>
+      </p:nvGrpSpPr>
+      <p:grpSpPr>
+        <a:xfrm>
+          <a:off x="0" y="0"/>
+          <a:ext cx="0" cy="0"/>
+          <a:chOff x="0" y="0"/>
+          <a:chExt cx="0" cy="0"/>
+        </a:xfrm>
+      </p:grpSpPr>
+      <p:sp>
+        <p:nvSpPr>
+          <p:cNvPr name="TextBox 2" id="2"/>
+          <p:cNvSpPr txBox="true"/>
+          <p:nvPr/>
+        </p:nvSpPr>
+        <p:spPr>
+          <a:xfrm rot="0">
+            <a:off x="426720" y="248726"/>
+            <a:ext cx="17135856" cy="1231735"/>
+          </a:xfrm>
+          <a:prstGeom prst="rect">
+            <a:avLst/>
+          </a:prstGeom>
+        </p:spPr>
+        <p:txBody>
+          <a:bodyPr anchor="t" rtlCol="false" tIns="0" lIns="0" bIns="0" rIns="0">
+            <a:spAutoFit/>
+          </a:bodyPr>
+          <a:lstStyle/>
+          <a:p>
+            <a:pPr algn="l">
+              <a:lnSpc>
+                <a:spcPts val="9600"/>
+              </a:lnSpc>
+            </a:pPr>
+            <a:r>
+              <a:rPr lang="en-US" sz="8000">
+                <a:solidFill>
+                  <a:srgbClr val="2D5986"/>
+                </a:solidFill>
+                <a:latin typeface="Anton"/>
+                <a:ea typeface="Anton"/>
+                <a:cs typeface="Anton"/>
+                <a:sym typeface="Anton"/>
+              </a:rPr>
+              <a:t>AHB Sequence Strategy</a:t>
+            </a:r>
+          </a:p>
+        </p:txBody>
+      </p:sp>
+      <p:sp>
+        <p:nvSpPr>
+          <p:cNvPr name="TextBox 3" id="3"/>
+          <p:cNvSpPr txBox="true"/>
+          <p:nvPr/>
+        </p:nvSpPr>
+        <p:spPr>
+          <a:xfrm rot="0">
+            <a:off x="530352" y="1436751"/>
+            <a:ext cx="17090136" cy="271758"/>
+          </a:xfrm>
+          <a:prstGeom prst="rect">
+            <a:avLst/>
+          </a:prstGeom>
+        </p:spPr>
+        <p:txBody>
+          <a:bodyPr anchor="t" rtlCol="false" tIns="0" lIns="0" bIns="0" rIns="0">
+            <a:spAutoFit/>
+          </a:bodyPr>
+          <a:lstStyle/>
+          <a:p>
+            <a:pPr algn="l">
+              <a:lnSpc>
+                <a:spcPts val="2040"/>
+              </a:lnSpc>
+            </a:pPr>
+            <a:r>
+              <a:rPr lang="en-US" sz="1700">
+                <a:solidFill>
+                  <a:srgbClr val="63707C"/>
+                </a:solidFill>
+                <a:latin typeface="Aptos"/>
+                <a:ea typeface="Aptos"/>
+                <a:cs typeface="Aptos"/>
+                <a:sym typeface="Aptos"/>
+              </a:rPr>
+              <a:t>Directed and randomized traffic used to exercise bridge behavior.</a:t>
+            </a:r>
+          </a:p>
+        </p:txBody>
+      </p:sp>
+      <p:sp>
+        <p:nvSpPr>
+          <p:cNvPr name="TextBox 4" id="4"/>
+          <p:cNvSpPr txBox="true"/>
+          <p:nvPr/>
+        </p:nvSpPr>
+        <p:spPr>
+          <a:xfrm rot="0">
+            <a:off x="17629632" y="9976104"/>
+            <a:ext cx="128016" cy="100584"/>
+          </a:xfrm>
+          <a:prstGeom prst="rect">
+            <a:avLst/>
+          </a:prstGeom>
+        </p:spPr>
+        <p:txBody>
+          <a:bodyPr anchor="t" rtlCol="false" tIns="0" lIns="0" bIns="0" rIns="0">
+            <a:spAutoFit/>
+          </a:bodyPr>
+          <a:lstStyle/>
+          <a:p>
+            <a:pPr algn="r">
+              <a:lnSpc>
+                <a:spcPts val="1080"/>
+              </a:lnSpc>
+            </a:pPr>
+            <a:r>
+              <a:rPr lang="en-US" sz="900">
+                <a:solidFill>
+                  <a:srgbClr val="5B6874"/>
+                </a:solidFill>
+                <a:latin typeface="Aptos"/>
+                <a:ea typeface="Aptos"/>
+                <a:cs typeface="Aptos"/>
+                <a:sym typeface="Aptos"/>
+              </a:rPr>
+              <a:t>30</a:t>
+            </a:r>
+          </a:p>
+        </p:txBody>
+      </p:sp>
+      <p:grpSp>
+        <p:nvGrpSpPr>
+          <p:cNvPr name="Group 5" id="5"/>
+          <p:cNvGrpSpPr/>
+          <p:nvPr/>
+        </p:nvGrpSpPr>
+        <p:grpSpPr>
+          <a:xfrm rot="0">
+            <a:off x="1684896" y="2194493"/>
+            <a:ext cx="6800088" cy="3211935"/>
+            <a:chOff x="0" y="0"/>
+            <a:chExt cx="9066784" cy="4282580"/>
+          </a:xfrm>
+        </p:grpSpPr>
+        <p:sp>
+          <p:nvSpPr>
+            <p:cNvPr name="Freeform 6" id="6"/>
+            <p:cNvSpPr/>
+            <p:nvPr/>
+          </p:nvSpPr>
+          <p:spPr>
+            <a:xfrm flipH="false" flipV="false" rot="0">
+              <a:off x="0" y="0"/>
+              <a:ext cx="9066784" cy="4282567"/>
+            </a:xfrm>
+            <a:custGeom>
+              <a:avLst/>
+              <a:gdLst/>
+              <a:ahLst/>
+              <a:cxnLst/>
+              <a:rect r="r" b="b" t="t" l="l"/>
+              <a:pathLst>
+                <a:path h="4282567" w="9066784">
+                  <a:moveTo>
+                    <a:pt x="0" y="713740"/>
+                  </a:moveTo>
+                  <a:cubicBezTo>
+                    <a:pt x="0" y="319532"/>
+                    <a:pt x="319532" y="0"/>
+                    <a:pt x="713740" y="0"/>
+                  </a:cubicBezTo>
+                  <a:lnTo>
+                    <a:pt x="8353044" y="0"/>
+                  </a:lnTo>
+                  <a:cubicBezTo>
+                    <a:pt x="8747251" y="0"/>
+                    <a:pt x="9066784" y="319532"/>
+                    <a:pt x="9066784" y="713740"/>
+                  </a:cubicBezTo>
+                  <a:lnTo>
+                    <a:pt x="9066784" y="3568827"/>
+                  </a:lnTo>
+                  <a:cubicBezTo>
+                    <a:pt x="9066784" y="3963035"/>
+                    <a:pt x="8747251" y="4282567"/>
+                    <a:pt x="8353044" y="4282567"/>
+                  </a:cubicBezTo>
+                  <a:lnTo>
+                    <a:pt x="713740" y="4282567"/>
+                  </a:lnTo>
+                  <a:cubicBezTo>
+                    <a:pt x="319532" y="4282567"/>
+                    <a:pt x="0" y="3963035"/>
+                    <a:pt x="0" y="3568827"/>
+                  </a:cubicBezTo>
+                  <a:close/>
+                </a:path>
+              </a:pathLst>
+            </a:custGeom>
+            <a:solidFill>
+              <a:srgbClr val="E1EAF2"/>
+            </a:solidFill>
+            <a:ln w="15240" cap="sq">
+              <a:solidFill>
+                <a:srgbClr val="E5EDF4"/>
+              </a:solidFill>
+              <a:prstDash val="solid"/>
+              <a:miter/>
+            </a:ln>
+          </p:spPr>
+        </p:sp>
+      </p:grpSp>
+      <p:sp>
+        <p:nvSpPr>
+          <p:cNvPr name="TextBox 7" id="7"/>
+          <p:cNvSpPr txBox="true"/>
+          <p:nvPr/>
+        </p:nvSpPr>
+        <p:spPr>
+          <a:xfrm rot="0">
+            <a:off x="2149716" y="2633824"/>
+            <a:ext cx="5382549" cy="369961"/>
+          </a:xfrm>
+          <a:prstGeom prst="rect">
+            <a:avLst/>
+          </a:prstGeom>
+        </p:spPr>
+        <p:txBody>
+          <a:bodyPr anchor="t" rtlCol="false" tIns="0" lIns="0" bIns="0" rIns="0">
+            <a:spAutoFit/>
+          </a:bodyPr>
+          <a:lstStyle/>
+          <a:p>
+            <a:pPr algn="l">
+              <a:lnSpc>
+                <a:spcPts val="2879"/>
+              </a:lnSpc>
+            </a:pPr>
+            <a:r>
+              <a:rPr lang="en-US" sz="2400" b="true">
+                <a:solidFill>
+                  <a:srgbClr val="2D5986"/>
+                </a:solidFill>
+                <a:latin typeface="Aptos Bold"/>
+                <a:ea typeface="Aptos Bold"/>
+                <a:cs typeface="Aptos Bold"/>
+                <a:sym typeface="Aptos Bold"/>
+              </a:rPr>
+              <a:t>Directed back-to-back traffic</a:t>
+            </a:r>
+          </a:p>
+        </p:txBody>
+      </p:sp>
+      <p:sp>
+        <p:nvSpPr>
+          <p:cNvPr name="TextBox 8" id="8"/>
+          <p:cNvSpPr txBox="true"/>
+          <p:nvPr/>
+        </p:nvSpPr>
+        <p:spPr>
+          <a:xfrm rot="0">
+            <a:off x="2168004" y="3072736"/>
+            <a:ext cx="5379720" cy="1683496"/>
+          </a:xfrm>
+          <a:prstGeom prst="rect">
+            <a:avLst/>
+          </a:prstGeom>
+        </p:spPr>
+        <p:txBody>
+          <a:bodyPr anchor="t" rtlCol="false" tIns="0" lIns="0" bIns="0" rIns="0">
+            <a:spAutoFit/>
+          </a:bodyPr>
+          <a:lstStyle/>
+          <a:p>
+            <a:pPr algn="l">
+              <a:lnSpc>
+                <a:spcPts val="2879"/>
+              </a:lnSpc>
+            </a:pPr>
+            <a:r>
+              <a:rPr lang="en-US" sz="2400">
+                <a:solidFill>
+                  <a:srgbClr val="2A3037"/>
+                </a:solidFill>
+                <a:latin typeface="Aptos"/>
+                <a:ea typeface="Aptos"/>
+                <a:cs typeface="Aptos"/>
+                <a:sym typeface="Aptos"/>
+              </a:rPr>
+              <a:t>• 100 NONSEQ reads</a:t>
+            </a:r>
+          </a:p>
+          <a:p>
+            <a:pPr algn="l">
+              <a:lnSpc>
+                <a:spcPts val="2879"/>
+              </a:lnSpc>
+            </a:pPr>
+            <a:r>
+              <a:rPr lang="en-US" sz="2400">
+                <a:solidFill>
+                  <a:srgbClr val="2A3037"/>
+                </a:solidFill>
+                <a:latin typeface="Aptos"/>
+                <a:ea typeface="Aptos"/>
+                <a:cs typeface="Aptos"/>
+                <a:sym typeface="Aptos"/>
+              </a:rPr>
+              <a:t>• 100 NONSEQ writes</a:t>
+            </a:r>
+          </a:p>
+          <a:p>
+            <a:pPr algn="l">
+              <a:lnSpc>
+                <a:spcPts val="2879"/>
+              </a:lnSpc>
+            </a:pPr>
+            <a:r>
+              <a:rPr lang="en-US" sz="2400">
+                <a:solidFill>
+                  <a:srgbClr val="2A3037"/>
+                </a:solidFill>
+                <a:latin typeface="Aptos"/>
+                <a:ea typeface="Aptos"/>
+                <a:cs typeface="Aptos"/>
+                <a:sym typeface="Aptos"/>
+              </a:rPr>
+              <a:t>• Repeated transfers with a fixed direction</a:t>
+            </a:r>
+          </a:p>
+        </p:txBody>
+      </p:sp>
+      <p:grpSp>
+        <p:nvGrpSpPr>
+          <p:cNvPr name="Group 9" id="9"/>
+          <p:cNvGrpSpPr/>
+          <p:nvPr/>
+        </p:nvGrpSpPr>
+        <p:grpSpPr>
+          <a:xfrm rot="0">
+            <a:off x="9514332" y="2194493"/>
+            <a:ext cx="6800088" cy="3211935"/>
+            <a:chOff x="0" y="0"/>
+            <a:chExt cx="9066784" cy="4282580"/>
+          </a:xfrm>
+        </p:grpSpPr>
+        <p:sp>
+          <p:nvSpPr>
+            <p:cNvPr name="Freeform 10" id="10"/>
+            <p:cNvSpPr/>
+            <p:nvPr/>
+          </p:nvSpPr>
+          <p:spPr>
+            <a:xfrm flipH="false" flipV="false" rot="0">
+              <a:off x="0" y="0"/>
+              <a:ext cx="9066784" cy="4282567"/>
+            </a:xfrm>
+            <a:custGeom>
+              <a:avLst/>
+              <a:gdLst/>
+              <a:ahLst/>
+              <a:cxnLst/>
+              <a:rect r="r" b="b" t="t" l="l"/>
+              <a:pathLst>
+                <a:path h="4282567" w="9066784">
+                  <a:moveTo>
+                    <a:pt x="0" y="713740"/>
+                  </a:moveTo>
+                  <a:cubicBezTo>
+                    <a:pt x="0" y="319532"/>
+                    <a:pt x="319532" y="0"/>
+                    <a:pt x="713740" y="0"/>
+                  </a:cubicBezTo>
+                  <a:lnTo>
+                    <a:pt x="8353044" y="0"/>
+                  </a:lnTo>
+                  <a:cubicBezTo>
+                    <a:pt x="8747251" y="0"/>
+                    <a:pt x="9066784" y="319532"/>
+                    <a:pt x="9066784" y="713740"/>
+                  </a:cubicBezTo>
+                  <a:lnTo>
+                    <a:pt x="9066784" y="3568827"/>
+                  </a:lnTo>
+                  <a:cubicBezTo>
+                    <a:pt x="9066784" y="3963035"/>
+                    <a:pt x="8747251" y="4282567"/>
+                    <a:pt x="8353044" y="4282567"/>
+                  </a:cubicBezTo>
+                  <a:lnTo>
+                    <a:pt x="713740" y="4282567"/>
+                  </a:lnTo>
+                  <a:cubicBezTo>
+                    <a:pt x="319532" y="4282567"/>
+                    <a:pt x="0" y="3963035"/>
+                    <a:pt x="0" y="3568827"/>
+                  </a:cubicBezTo>
+                  <a:close/>
+                </a:path>
+              </a:pathLst>
+            </a:custGeom>
+            <a:solidFill>
+              <a:srgbClr val="E1EAF2"/>
+            </a:solidFill>
+            <a:ln w="15240" cap="sq">
+              <a:solidFill>
+                <a:srgbClr val="E5EDF4"/>
+              </a:solidFill>
+              <a:prstDash val="solid"/>
+              <a:miter/>
+            </a:ln>
+          </p:spPr>
+        </p:sp>
+      </p:grpSp>
+      <p:sp>
+        <p:nvSpPr>
+          <p:cNvPr name="TextBox 11" id="11"/>
+          <p:cNvSpPr txBox="true"/>
+          <p:nvPr/>
+        </p:nvSpPr>
+        <p:spPr>
+          <a:xfrm rot="0">
+            <a:off x="10016604" y="2596677"/>
+            <a:ext cx="5355088" cy="369961"/>
+          </a:xfrm>
+          <a:prstGeom prst="rect">
+            <a:avLst/>
+          </a:prstGeom>
+        </p:spPr>
+        <p:txBody>
+          <a:bodyPr anchor="t" rtlCol="false" tIns="0" lIns="0" bIns="0" rIns="0">
+            <a:spAutoFit/>
+          </a:bodyPr>
+          <a:lstStyle/>
+          <a:p>
+            <a:pPr algn="l">
+              <a:lnSpc>
+                <a:spcPts val="2879"/>
+              </a:lnSpc>
+            </a:pPr>
+            <a:r>
+              <a:rPr lang="en-US" sz="2400" b="true">
+                <a:solidFill>
+                  <a:srgbClr val="2D5986"/>
+                </a:solidFill>
+                <a:latin typeface="Aptos Bold"/>
+                <a:ea typeface="Aptos Bold"/>
+                <a:cs typeface="Aptos Bold"/>
+                <a:sym typeface="Aptos Bold"/>
+              </a:rPr>
+              <a:t>Randomized read/write traffic</a:t>
+            </a:r>
+          </a:p>
+        </p:txBody>
+      </p:sp>
+      <p:sp>
+        <p:nvSpPr>
+          <p:cNvPr name="TextBox 12" id="12"/>
+          <p:cNvSpPr txBox="true"/>
+          <p:nvPr/>
+        </p:nvSpPr>
+        <p:spPr>
+          <a:xfrm rot="0">
+            <a:off x="10034892" y="3035589"/>
+            <a:ext cx="5352002" cy="1314164"/>
+          </a:xfrm>
+          <a:prstGeom prst="rect">
+            <a:avLst/>
+          </a:prstGeom>
+        </p:spPr>
+        <p:txBody>
+          <a:bodyPr anchor="t" rtlCol="false" tIns="0" lIns="0" bIns="0" rIns="0">
+            <a:spAutoFit/>
+          </a:bodyPr>
+          <a:lstStyle/>
+          <a:p>
+            <a:pPr algn="l">
+              <a:lnSpc>
+                <a:spcPts val="2879"/>
+              </a:lnSpc>
+            </a:pPr>
+            <a:r>
+              <a:rPr lang="en-US" sz="2400">
+                <a:solidFill>
+                  <a:srgbClr val="2A3037"/>
+                </a:solidFill>
+                <a:latin typeface="Aptos"/>
+                <a:ea typeface="Aptos"/>
+                <a:cs typeface="Aptos"/>
+                <a:sym typeface="Aptos"/>
+              </a:rPr>
+              <a:t>• 100 randomized NONSEQ transfers</a:t>
+            </a:r>
+          </a:p>
+          <a:p>
+            <a:pPr algn="l">
+              <a:lnSpc>
+                <a:spcPts val="2879"/>
+              </a:lnSpc>
+            </a:pPr>
+            <a:r>
+              <a:rPr lang="en-US" sz="2400">
+                <a:solidFill>
+                  <a:srgbClr val="2A3037"/>
+                </a:solidFill>
+                <a:latin typeface="Aptos"/>
+                <a:ea typeface="Aptos"/>
+                <a:cs typeface="Aptos"/>
+                <a:sym typeface="Aptos"/>
+              </a:rPr>
+              <a:t>• HWRITE is unconstrained</a:t>
+            </a:r>
+          </a:p>
+          <a:p>
+            <a:pPr algn="l">
+              <a:lnSpc>
+                <a:spcPts val="2879"/>
+              </a:lnSpc>
+            </a:pPr>
+            <a:r>
+              <a:rPr lang="en-US" sz="2400">
+                <a:solidFill>
+                  <a:srgbClr val="2A3037"/>
+                </a:solidFill>
+                <a:latin typeface="Aptos"/>
+                <a:ea typeface="Aptos"/>
+                <a:cs typeface="Aptos"/>
+                <a:sym typeface="Aptos"/>
+              </a:rPr>
+              <a:t>• Allows both reads and writes</a:t>
+            </a:r>
+          </a:p>
+        </p:txBody>
+      </p:sp>
+      <p:grpSp>
+        <p:nvGrpSpPr>
+          <p:cNvPr name="Group 13" id="13"/>
+          <p:cNvGrpSpPr/>
+          <p:nvPr/>
+        </p:nvGrpSpPr>
+        <p:grpSpPr>
+          <a:xfrm rot="0">
+            <a:off x="5594604" y="5892203"/>
+            <a:ext cx="6800088" cy="3211935"/>
+            <a:chOff x="0" y="0"/>
+            <a:chExt cx="9066784" cy="4282580"/>
+          </a:xfrm>
+        </p:grpSpPr>
+        <p:sp>
+          <p:nvSpPr>
+            <p:cNvPr name="Freeform 14" id="14"/>
+            <p:cNvSpPr/>
+            <p:nvPr/>
+          </p:nvSpPr>
+          <p:spPr>
+            <a:xfrm flipH="false" flipV="false" rot="0">
+              <a:off x="0" y="0"/>
+              <a:ext cx="9066784" cy="4282567"/>
+            </a:xfrm>
+            <a:custGeom>
+              <a:avLst/>
+              <a:gdLst/>
+              <a:ahLst/>
+              <a:cxnLst/>
+              <a:rect r="r" b="b" t="t" l="l"/>
+              <a:pathLst>
+                <a:path h="4282567" w="9066784">
+                  <a:moveTo>
+                    <a:pt x="0" y="713740"/>
+                  </a:moveTo>
+                  <a:cubicBezTo>
+                    <a:pt x="0" y="319532"/>
+                    <a:pt x="319532" y="0"/>
+                    <a:pt x="713740" y="0"/>
+                  </a:cubicBezTo>
+                  <a:lnTo>
+                    <a:pt x="8353044" y="0"/>
+                  </a:lnTo>
+                  <a:cubicBezTo>
+                    <a:pt x="8747251" y="0"/>
+                    <a:pt x="9066784" y="319532"/>
+                    <a:pt x="9066784" y="713740"/>
+                  </a:cubicBezTo>
+                  <a:lnTo>
+                    <a:pt x="9066784" y="3568827"/>
+                  </a:lnTo>
+                  <a:cubicBezTo>
+                    <a:pt x="9066784" y="3963035"/>
+                    <a:pt x="8747251" y="4282567"/>
+                    <a:pt x="8353044" y="4282567"/>
+                  </a:cubicBezTo>
+                  <a:lnTo>
+                    <a:pt x="713740" y="4282567"/>
+                  </a:lnTo>
+                  <a:cubicBezTo>
+                    <a:pt x="319532" y="4282567"/>
+                    <a:pt x="0" y="3963035"/>
+                    <a:pt x="0" y="3568827"/>
+                  </a:cubicBezTo>
+                  <a:close/>
+                </a:path>
+              </a:pathLst>
+            </a:custGeom>
+            <a:solidFill>
+              <a:srgbClr val="2D5986"/>
+            </a:solidFill>
+            <a:ln w="15240" cap="sq">
+              <a:solidFill>
+                <a:srgbClr val="E5EDF4"/>
+              </a:solidFill>
+              <a:prstDash val="solid"/>
+              <a:miter/>
+            </a:ln>
+          </p:spPr>
+        </p:sp>
+      </p:grpSp>
+      <p:sp>
+        <p:nvSpPr>
+          <p:cNvPr name="TextBox 15" id="15"/>
+          <p:cNvSpPr txBox="true"/>
+          <p:nvPr/>
+        </p:nvSpPr>
+        <p:spPr>
+          <a:xfrm rot="0">
+            <a:off x="6115802" y="6330934"/>
+            <a:ext cx="2725817" cy="361950"/>
+          </a:xfrm>
+          <a:prstGeom prst="rect">
+            <a:avLst/>
+          </a:prstGeom>
+        </p:spPr>
+        <p:txBody>
+          <a:bodyPr anchor="t" rtlCol="false" tIns="0" lIns="0" bIns="0" rIns="0">
+            <a:spAutoFit/>
+          </a:bodyPr>
+          <a:lstStyle/>
+          <a:p>
+            <a:pPr algn="l">
+              <a:lnSpc>
+                <a:spcPts val="2879"/>
+              </a:lnSpc>
+            </a:pPr>
+            <a:r>
+              <a:rPr lang="en-US" sz="2400" b="true">
+                <a:solidFill>
+                  <a:srgbClr val="F6F4EE"/>
+                </a:solidFill>
+                <a:latin typeface="Aptos Bold"/>
+                <a:ea typeface="Aptos Bold"/>
+                <a:cs typeface="Aptos Bold"/>
+                <a:sym typeface="Aptos Bold"/>
+              </a:rPr>
+              <a:t>HTRANS transitions</a:t>
+            </a:r>
+          </a:p>
+        </p:txBody>
+      </p:sp>
+      <p:sp>
+        <p:nvSpPr>
+          <p:cNvPr name="TextBox 16" id="16"/>
+          <p:cNvSpPr txBox="true"/>
+          <p:nvPr/>
+        </p:nvSpPr>
+        <p:spPr>
+          <a:xfrm rot="0">
+            <a:off x="6177777" y="6950287"/>
+            <a:ext cx="5327685" cy="1447800"/>
+          </a:xfrm>
+          <a:prstGeom prst="rect">
+            <a:avLst/>
+          </a:prstGeom>
+        </p:spPr>
+        <p:txBody>
+          <a:bodyPr anchor="t" rtlCol="false" tIns="0" lIns="0" bIns="0" rIns="0">
+            <a:spAutoFit/>
+          </a:bodyPr>
+          <a:lstStyle/>
+          <a:p>
+            <a:pPr algn="l">
+              <a:lnSpc>
+                <a:spcPts val="2879"/>
+              </a:lnSpc>
+            </a:pPr>
+            <a:r>
+              <a:rPr lang="en-US" sz="2400">
+                <a:solidFill>
+                  <a:srgbClr val="F6F4EE"/>
+                </a:solidFill>
+                <a:latin typeface="Aptos"/>
+                <a:ea typeface="Aptos"/>
+                <a:cs typeface="Aptos"/>
+                <a:sym typeface="Aptos"/>
+              </a:rPr>
+              <a:t>• NONSEQ → SEQ burst → IDLE</a:t>
+            </a:r>
+          </a:p>
+          <a:p>
+            <a:pPr algn="l">
+              <a:lnSpc>
+                <a:spcPts val="2879"/>
+              </a:lnSpc>
+            </a:pPr>
+            <a:r>
+              <a:rPr lang="en-US" sz="2400">
+                <a:solidFill>
+                  <a:srgbClr val="F6F4EE"/>
+                </a:solidFill>
+                <a:latin typeface="Aptos"/>
+                <a:ea typeface="Aptos"/>
+                <a:cs typeface="Aptos"/>
+                <a:sym typeface="Aptos"/>
+              </a:rPr>
+              <a:t>• A second NONSEQ/SEQ burst</a:t>
+            </a:r>
+          </a:p>
+          <a:p>
+            <a:pPr algn="l">
+              <a:lnSpc>
+                <a:spcPts val="2879"/>
+              </a:lnSpc>
+            </a:pPr>
+            <a:r>
+              <a:rPr lang="en-US" sz="2400">
+                <a:solidFill>
+                  <a:srgbClr val="F6F4EE"/>
+                </a:solidFill>
+                <a:latin typeface="Aptos"/>
+                <a:ea typeface="Aptos"/>
+                <a:cs typeface="Aptos"/>
+                <a:sym typeface="Aptos"/>
+              </a:rPr>
+              <a:t>• BUSY followed by additional SEQ transfers</a:t>
+            </a:r>
+          </a:p>
+        </p:txBody>
+      </p:sp>
     </p:spTree>
   </p:cSld>
   <p:clrMapOvr>
@@ -38693,10 +38334,10 @@
         </p:nvGrpSpPr>
         <p:grpSpPr>
           <a:xfrm rot="0">
-            <a:off x="9887428" y="5600700"/>
-            <a:ext cx="5724496" cy="2287816"/>
+            <a:off x="9887428" y="5687879"/>
+            <a:ext cx="5724496" cy="2113457"/>
             <a:chOff x="0" y="0"/>
-            <a:chExt cx="1507686" cy="602552"/>
+            <a:chExt cx="1507686" cy="556631"/>
           </a:xfrm>
         </p:grpSpPr>
         <p:sp>
@@ -38708,7 +38349,7 @@
           <p:spPr>
             <a:xfrm flipH="false" flipV="false" rot="0">
               <a:off x="0" y="0"/>
-              <a:ext cx="1507686" cy="602552"/>
+              <a:ext cx="1507686" cy="556631"/>
             </a:xfrm>
             <a:custGeom>
               <a:avLst/>
@@ -38717,7 +38358,7 @@
               <a:cxnLst/>
               <a:rect r="r" b="b" t="t" l="l"/>
               <a:pathLst>
-                <a:path h="602552" w="1507686">
+                <a:path h="556631" w="1507686">
                   <a:moveTo>
                     <a:pt x="68973" y="0"/>
                   </a:moveTo>
@@ -38730,25 +38371,25 @@
                     <a:pt x="1507686" y="68973"/>
                   </a:cubicBezTo>
                   <a:lnTo>
-                    <a:pt x="1507686" y="533579"/>
-                  </a:lnTo>
-                  <a:cubicBezTo>
-                    <a:pt x="1507686" y="551872"/>
-                    <a:pt x="1500419" y="569415"/>
-                    <a:pt x="1487484" y="582350"/>
-                  </a:cubicBezTo>
-                  <a:cubicBezTo>
-                    <a:pt x="1474549" y="595285"/>
-                    <a:pt x="1457006" y="602552"/>
-                    <a:pt x="1438713" y="602552"/>
-                  </a:cubicBezTo>
-                  <a:lnTo>
-                    <a:pt x="68973" y="602552"/>
-                  </a:lnTo>
-                  <a:cubicBezTo>
-                    <a:pt x="30880" y="602552"/>
-                    <a:pt x="0" y="571672"/>
-                    <a:pt x="0" y="533579"/>
+                    <a:pt x="1507686" y="487657"/>
+                  </a:lnTo>
+                  <a:cubicBezTo>
+                    <a:pt x="1507686" y="505950"/>
+                    <a:pt x="1500419" y="523494"/>
+                    <a:pt x="1487484" y="536429"/>
+                  </a:cubicBezTo>
+                  <a:cubicBezTo>
+                    <a:pt x="1474549" y="549364"/>
+                    <a:pt x="1457006" y="556631"/>
+                    <a:pt x="1438713" y="556631"/>
+                  </a:cubicBezTo>
+                  <a:lnTo>
+                    <a:pt x="68973" y="556631"/>
+                  </a:lnTo>
+                  <a:cubicBezTo>
+                    <a:pt x="30880" y="556631"/>
+                    <a:pt x="0" y="525750"/>
+                    <a:pt x="0" y="487657"/>
                   </a:cubicBezTo>
                   <a:lnTo>
                     <a:pt x="0" y="68973"/>
@@ -38783,7 +38424,7 @@
           <p:spPr>
             <a:xfrm>
               <a:off x="0" y="-66675"/>
-              <a:ext cx="1507686" cy="669227"/>
+              <a:ext cx="1507686" cy="623306"/>
             </a:xfrm>
             <a:prstGeom prst="rect">
               <a:avLst/>
@@ -38808,7 +38449,7 @@
                   <a:cs typeface="Calibri (MS)"/>
                   <a:sym typeface="Calibri (MS)"/>
                 </a:rPr>
-                <a:t>HPROT, HTRANS different values</a:t>
+                <a:t>HTRANS different values</a:t>
               </a:r>
             </a:p>
           </p:txBody>
@@ -39695,7 +39336,7 @@
         </p:nvSpPr>
         <p:spPr>
           <a:xfrm rot="0">
-            <a:off x="5345557" y="2936134"/>
+            <a:off x="5345557" y="3631459"/>
             <a:ext cx="7596886" cy="2463165"/>
           </a:xfrm>
           <a:prstGeom prst="rect">
@@ -39731,53 +39372,9 @@
           </a:p>
         </p:txBody>
       </p:sp>
-      <p:sp>
-        <p:nvSpPr>
-          <p:cNvPr name="TextBox 3" id="3"/>
-          <p:cNvSpPr txBox="true"/>
-          <p:nvPr/>
-        </p:nvSpPr>
-        <p:spPr>
-          <a:xfrm rot="0">
-            <a:off x="4643793" y="5294524"/>
-            <a:ext cx="9000415" cy="863600"/>
-          </a:xfrm>
-          <a:prstGeom prst="rect">
-            <a:avLst/>
-          </a:prstGeom>
-        </p:spPr>
-        <p:txBody>
-          <a:bodyPr anchor="t" rtlCol="false" tIns="0" lIns="0" bIns="0" rIns="0">
-            <a:spAutoFit/>
-          </a:bodyPr>
-          <a:lstStyle/>
-          <a:p>
-            <a:pPr algn="ctr">
-              <a:lnSpc>
-                <a:spcPts val="7000"/>
-              </a:lnSpc>
-              <a:spcBef>
-                <a:spcPct val="0"/>
-              </a:spcBef>
-            </a:pPr>
-            <a:r>
-              <a:rPr lang="en-US" sz="5000">
-                <a:solidFill>
-                  <a:srgbClr val="2D5986"/>
-                </a:solidFill>
-                <a:latin typeface="Anton"/>
-                <a:ea typeface="Anton"/>
-                <a:cs typeface="Anton"/>
-                <a:sym typeface="Anton"/>
-              </a:rPr>
-              <a:t>Any Questions?</a:t>
-            </a:r>
-          </a:p>
-        </p:txBody>
-      </p:sp>
       <p:grpSp>
         <p:nvGrpSpPr>
-          <p:cNvPr name="Group 4" id="4"/>
+          <p:cNvPr name="Group 3" id="3"/>
           <p:cNvGrpSpPr/>
           <p:nvPr/>
         </p:nvGrpSpPr>
@@ -39791,7 +39388,7 @@
         </p:grpSpPr>
         <p:sp>
           <p:nvSpPr>
-            <p:cNvPr name="Freeform 5" id="5"/>
+            <p:cNvPr name="Freeform 4" id="4"/>
             <p:cNvSpPr/>
             <p:nvPr/>
           </p:nvSpPr>
@@ -39836,7 +39433,7 @@
         </p:sp>
         <p:sp>
           <p:nvSpPr>
-            <p:cNvPr name="TextBox 6" id="6"/>
+            <p:cNvPr name="TextBox 5" id="5"/>
             <p:cNvSpPr txBox="true"/>
             <p:nvPr/>
           </p:nvSpPr>
@@ -39876,7 +39473,7 @@
       </p:grpSp>
       <p:grpSp>
         <p:nvGrpSpPr>
-          <p:cNvPr name="Group 7" id="7"/>
+          <p:cNvPr name="Group 6" id="6"/>
           <p:cNvGrpSpPr/>
           <p:nvPr/>
         </p:nvGrpSpPr>
@@ -39890,7 +39487,7 @@
         </p:grpSpPr>
         <p:sp>
           <p:nvSpPr>
-            <p:cNvPr name="Freeform 8" id="8"/>
+            <p:cNvPr name="Freeform 7" id="7"/>
             <p:cNvSpPr/>
             <p:nvPr/>
           </p:nvSpPr>
@@ -39935,7 +39532,7 @@
         </p:sp>
         <p:sp>
           <p:nvSpPr>
-            <p:cNvPr name="TextBox 9" id="9"/>
+            <p:cNvPr name="TextBox 8" id="8"/>
             <p:cNvSpPr txBox="true"/>
             <p:nvPr/>
           </p:nvSpPr>
@@ -39973,6 +39570,112 @@
           </p:txBody>
         </p:sp>
       </p:grpSp>
+      <p:sp>
+        <p:nvSpPr>
+          <p:cNvPr name="Freeform 9" id="9"/>
+          <p:cNvSpPr/>
+          <p:nvPr/>
+        </p:nvSpPr>
+        <p:spPr>
+          <a:xfrm flipH="false" flipV="false" rot="-2700000">
+            <a:off x="10949686" y="4111577"/>
+            <a:ext cx="10707063" cy="8458580"/>
+          </a:xfrm>
+          <a:custGeom>
+            <a:avLst/>
+            <a:gdLst/>
+            <a:ahLst/>
+            <a:cxnLst/>
+            <a:rect r="r" b="b" t="t" l="l"/>
+            <a:pathLst>
+              <a:path h="8458580" w="10707063">
+                <a:moveTo>
+                  <a:pt x="0" y="0"/>
+                </a:moveTo>
+                <a:lnTo>
+                  <a:pt x="10707063" y="0"/>
+                </a:lnTo>
+                <a:lnTo>
+                  <a:pt x="10707063" y="8458580"/>
+                </a:lnTo>
+                <a:lnTo>
+                  <a:pt x="0" y="8458580"/>
+                </a:lnTo>
+                <a:lnTo>
+                  <a:pt x="0" y="0"/>
+                </a:lnTo>
+                <a:close/>
+              </a:path>
+            </a:pathLst>
+          </a:custGeom>
+          <a:blipFill>
+            <a:blip r:embed="rId3">
+              <a:alphaModFix amt="9999"/>
+              <a:extLst>
+                <a:ext uri="{96DAC541-7B7A-43D3-8B79-37D633B846F1}">
+                  <asvg:svgBlip xmlns:asvg="http://schemas.microsoft.com/office/drawing/2016/SVG/main" r:embed="rId4"/>
+                </a:ext>
+              </a:extLst>
+            </a:blip>
+            <a:stretch>
+              <a:fillRect l="0" t="0" r="0" b="0"/>
+            </a:stretch>
+          </a:blipFill>
+        </p:spPr>
+      </p:sp>
+      <p:sp>
+        <p:nvSpPr>
+          <p:cNvPr name="Freeform 10" id="10"/>
+          <p:cNvSpPr/>
+          <p:nvPr/>
+        </p:nvSpPr>
+        <p:spPr>
+          <a:xfrm flipH="false" flipV="false" rot="8017969">
+            <a:off x="-3743921" y="-2822176"/>
+            <a:ext cx="11734862" cy="9270541"/>
+          </a:xfrm>
+          <a:custGeom>
+            <a:avLst/>
+            <a:gdLst/>
+            <a:ahLst/>
+            <a:cxnLst/>
+            <a:rect r="r" b="b" t="t" l="l"/>
+            <a:pathLst>
+              <a:path h="9270541" w="11734862">
+                <a:moveTo>
+                  <a:pt x="0" y="0"/>
+                </a:moveTo>
+                <a:lnTo>
+                  <a:pt x="11734862" y="0"/>
+                </a:lnTo>
+                <a:lnTo>
+                  <a:pt x="11734862" y="9270541"/>
+                </a:lnTo>
+                <a:lnTo>
+                  <a:pt x="0" y="9270541"/>
+                </a:lnTo>
+                <a:lnTo>
+                  <a:pt x="0" y="0"/>
+                </a:lnTo>
+                <a:close/>
+              </a:path>
+            </a:pathLst>
+          </a:custGeom>
+          <a:blipFill>
+            <a:blip r:embed="rId5">
+              <a:alphaModFix amt="9999"/>
+              <a:extLst>
+                <a:ext uri="{96DAC541-7B7A-43D3-8B79-37D633B846F1}">
+                  <asvg:svgBlip xmlns:asvg="http://schemas.microsoft.com/office/drawing/2016/SVG/main" r:embed="rId6"/>
+                </a:ext>
+              </a:extLst>
+            </a:blip>
+            <a:stretch>
+              <a:fillRect l="0" t="0" r="0" b="0"/>
+            </a:stretch>
+          </a:blipFill>
+        </p:spPr>
+      </p:sp>
     </p:spTree>
   </p:cSld>
   <p:clrMapOvr>
@@ -41455,7 +41158,7 @@
               </a:pathLst>
             </a:custGeom>
             <a:solidFill>
-              <a:srgbClr val="23496D"/>
+              <a:srgbClr val="2D5986"/>
             </a:solidFill>
           </p:spPr>
         </p:sp>
@@ -42496,7 +42199,7 @@
                   <a:cs typeface="Calibri (MS)"/>
                   <a:sym typeface="Calibri (MS)"/>
                 </a:rPr>
-                <a:t>The transfer whose datais on the bus now</a:t>
+                <a:t>The transfer whose data is on the bus now</a:t>
               </a:r>
             </a:p>
           </p:txBody>
@@ -42569,7 +42272,7 @@
               </a:pathLst>
             </a:custGeom>
             <a:solidFill>
-              <a:srgbClr val="23496D"/>
+              <a:srgbClr val="2D5986"/>
             </a:solidFill>
           </p:spPr>
         </p:sp>
@@ -42701,7 +42404,7 @@
               </a:pathLst>
             </a:custGeom>
             <a:solidFill>
-              <a:srgbClr val="23496D"/>
+              <a:srgbClr val="2D5986"/>
             </a:solidFill>
           </p:spPr>
         </p:sp>
@@ -42745,6 +42448,13 @@
             <a:p>
               <a:pPr algn="ctr">
                 <a:lnSpc>
+                  <a:spcPts val="3359"/>
+                </a:lnSpc>
+              </a:pPr>
+            </a:p>
+            <a:p>
+              <a:pPr algn="ctr">
+                <a:lnSpc>
                   <a:spcPts val="2347"/>
                 </a:lnSpc>
               </a:pPr>
@@ -42892,6 +42602,13 @@
                 </a:rPr>
                 <a:t>Drive the address</a:t>
               </a:r>
+            </a:p>
+            <a:p>
+              <a:pPr algn="ctr">
+                <a:lnSpc>
+                  <a:spcPts val="3359"/>
+                </a:lnSpc>
+              </a:pPr>
             </a:p>
             <a:p>
               <a:pPr algn="ctr">
@@ -43034,7 +42751,7 @@
               </a:pathLst>
             </a:custGeom>
             <a:solidFill>
-              <a:srgbClr val="23496D"/>
+              <a:srgbClr val="2D5986"/>
             </a:solidFill>
           </p:spPr>
         </p:sp>
@@ -43074,6 +42791,13 @@
                 </a:rPr>
                 <a:t>Drive the data</a:t>
               </a:r>
+            </a:p>
+            <a:p>
+              <a:pPr algn="ctr">
+                <a:lnSpc>
+                  <a:spcPts val="3359"/>
+                </a:lnSpc>
+              </a:pPr>
             </a:p>
             <a:p>
               <a:pPr algn="ctr">
@@ -43237,6 +42961,13 @@
                 </a:rPr>
                 <a:t>Wait for the clock</a:t>
               </a:r>
+            </a:p>
+            <a:p>
+              <a:pPr algn="ctr">
+                <a:lnSpc>
+                  <a:spcPts val="3359"/>
+                </a:lnSpc>
+              </a:pPr>
             </a:p>
             <a:p>
               <a:pPr algn="ctr">
@@ -43271,7 +43002,7 @@
               <a:r>
                 <a:rPr lang="en-US" sz="1956">
                   <a:solidFill>
-                    <a:srgbClr val="F7F5F1"/>
+                    <a:srgbClr val="2D5986"/>
                   </a:solidFill>
                   <a:latin typeface="Calibri (MS)"/>
                   <a:ea typeface="Calibri (MS)"/>
@@ -43351,7 +43082,7 @@
               </a:pathLst>
             </a:custGeom>
             <a:solidFill>
-              <a:srgbClr val="23496D"/>
+              <a:srgbClr val="2D5986"/>
             </a:solidFill>
           </p:spPr>
         </p:sp>
@@ -43832,7 +43563,7 @@
               </a:pathLst>
             </a:custGeom>
             <a:solidFill>
-              <a:srgbClr val="23496D"/>
+              <a:srgbClr val="2D5986"/>
             </a:solidFill>
           </p:spPr>
         </p:sp>
@@ -44303,7 +44034,7 @@
               </a:pathLst>
             </a:custGeom>
             <a:solidFill>
-              <a:srgbClr val="23496D"/>
+              <a:srgbClr val="2D5986"/>
             </a:solidFill>
           </p:spPr>
         </p:sp>
@@ -44740,7 +44471,7 @@
               </a:pathLst>
             </a:custGeom>
             <a:solidFill>
-              <a:srgbClr val="23496D"/>
+              <a:srgbClr val="2D5986"/>
             </a:solidFill>
           </p:spPr>
         </p:sp>
@@ -44862,7 +44593,7 @@
               </a:pathLst>
             </a:custGeom>
             <a:solidFill>
-              <a:srgbClr val="23496D"/>
+              <a:srgbClr val="2D5986"/>
             </a:solidFill>
           </p:spPr>
         </p:sp>
@@ -44906,6 +44637,13 @@
             <a:p>
               <a:pPr algn="ctr">
                 <a:lnSpc>
+                  <a:spcPts val="3359"/>
+                </a:lnSpc>
+              </a:pPr>
+            </a:p>
+            <a:p>
+              <a:pPr algn="ctr">
+                <a:lnSpc>
                   <a:spcPts val="2347"/>
                 </a:lnSpc>
               </a:pPr>
@@ -45047,6 +44785,13 @@
             <a:p>
               <a:pPr algn="ctr">
                 <a:lnSpc>
+                  <a:spcPts val="3359"/>
+                </a:lnSpc>
+              </a:pPr>
+            </a:p>
+            <a:p>
+              <a:pPr algn="ctr">
+                <a:lnSpc>
                   <a:spcPts val="2347"/>
                 </a:lnSpc>
               </a:pPr>
@@ -45144,7 +44889,7 @@
               </a:pathLst>
             </a:custGeom>
             <a:solidFill>
-              <a:srgbClr val="23496D"/>
+              <a:srgbClr val="2D5986"/>
             </a:solidFill>
           </p:spPr>
         </p:sp>
@@ -45184,6 +44929,13 @@
                 </a:rPr>
                 <a:t>Publish it</a:t>
               </a:r>
+            </a:p>
+            <a:p>
+              <a:pPr algn="ctr">
+                <a:lnSpc>
+                  <a:spcPts val="3359"/>
+                </a:lnSpc>
+              </a:pPr>
             </a:p>
             <a:p>
               <a:pPr algn="ctr">
